--- a/발표/20260805_밭보다_본선발표_v2.pptx
+++ b/발표/20260805_밭보다_본선발표_v2.pptx
@@ -3292,186 +3292,32 @@
           </a:p>
         </p:txBody>
       </p:sp>
-      <p:sp>
-        <p:nvSpPr>
-          <p:cNvPr id="5" name="Shape 3"/>
-          <p:cNvSpPr/>
-          <p:nvPr/>
-        </p:nvSpPr>
+      <p:pic>
+        <p:nvPicPr>
+          <p:cNvPr id="5" name="Image 0" descr="D:/Projects/batboda/발표/캡처/20260805_C01_대관령85-61전_경계.png">    </p:cNvPr>
+          <p:cNvPicPr>
+            <a:picLocks noChangeAspect="1"/>
+          </p:cNvPicPr>
+          <p:nvPr/>
+        </p:nvPicPr>
+        <p:blipFill>
+          <a:blip r:embed="rId1"/>
+          <a:srcRect l="0" r="0" t="0" b="0"/>
+          <a:stretch/>
+        </p:blipFill>
         <p:spPr>
           <a:xfrm>
             <a:off x="566928" y="2688336"/>
             <a:ext cx="1918960" cy="2926080"/>
           </a:xfrm>
-          <a:prstGeom prst="roundRect">
-            <a:avLst>
-              <a:gd name="adj" fmla="val 1906"/>
-            </a:avLst>
-          </a:prstGeom>
-          <a:solidFill>
-            <a:srgbClr val="17323C"/>
-          </a:solidFill>
-          <a:ln w="12700">
-            <a:solidFill>
-              <a:srgbClr val="2B4550"/>
-            </a:solidFill>
-            <a:prstDash val="dash"/>
-          </a:ln>
-        </p:spPr>
-      </p:sp>
-      <p:sp>
-        <p:nvSpPr>
-          <p:cNvPr id="6" name="Text 4"/>
-          <p:cNvSpPr/>
-          <p:nvPr/>
-        </p:nvSpPr>
-        <p:spPr>
-          <a:xfrm>
-            <a:off x="713232" y="2798064"/>
-            <a:ext cx="1626352" cy="237744"/>
-          </a:xfrm>
-          <a:prstGeom prst="rect">
-            <a:avLst/>
-          </a:prstGeom>
-          <a:noFill/>
-          <a:ln/>
-        </p:spPr>
-        <p:txBody>
-          <a:bodyPr wrap="square" lIns="0" tIns="0" rIns="0" bIns="0" rtlCol="0" anchor="ctr"/>
-          <a:lstStyle/>
-          <a:p>
-            <a:pPr indent="0" marL="0">
-              <a:buNone/>
-            </a:pPr>
-            <a:r>
-              <a:rPr lang="en-US" sz="1100" b="1" dirty="0">
-                <a:solidFill>
-                  <a:srgbClr val="A7C0C8"/>
-                </a:solidFill>
-                <a:latin typeface="맑은 고딕" pitchFamily="34" charset="0"/>
-                <a:ea typeface="맑은 고딕" pitchFamily="34" charset="-122"/>
-                <a:cs typeface="맑은 고딕" pitchFamily="34" charset="-120"/>
-              </a:rPr>
-              <a:t>C1 · 01-B</a:t>
-            </a:r>
-            <a:endParaRPr lang="en-US" sz="1100" dirty="0"/>
-          </a:p>
-        </p:txBody>
-      </p:sp>
-      <p:sp>
-        <p:nvSpPr>
-          <p:cNvPr id="7" name="Text 5"/>
-          <p:cNvSpPr/>
-          <p:nvPr/>
-        </p:nvSpPr>
-        <p:spPr>
-          <a:xfrm>
-            <a:off x="713232" y="3072384"/>
-            <a:ext cx="1626352" cy="2395728"/>
-          </a:xfrm>
-          <a:prstGeom prst="rect">
-            <a:avLst/>
-          </a:prstGeom>
-          <a:noFill/>
-          <a:ln/>
-        </p:spPr>
-        <p:txBody>
-          <a:bodyPr wrap="square" lIns="0" tIns="0" rIns="0" bIns="0" rtlCol="0" anchor="t"/>
-          <a:lstStyle/>
-          <a:p>
-            <a:pPr indent="0" marL="0">
-              <a:lnSpc>
-                <a:spcPct val="125000"/>
-              </a:lnSpc>
-              <a:buNone/>
-            </a:pPr>
-            <a:r>
-              <a:rPr lang="en-US" sz="1050" dirty="0">
-                <a:solidFill>
-                  <a:srgbClr val="A7C0C8"/>
-                </a:solidFill>
-                <a:latin typeface="맑은 고딕" pitchFamily="34" charset="0"/>
-                <a:ea typeface="맑은 고딕" pitchFamily="34" charset="-122"/>
-                <a:cs typeface="맑은 고딕" pitchFamily="34" charset="-120"/>
-              </a:rPr>
-              <a:t>농지 경계 폴리곤 조각</a:t>
-            </a:r>
-            <a:endParaRPr lang="en-US" sz="1050" dirty="0"/>
-          </a:p>
-          <a:p>
-            <a:pPr indent="0" marL="0">
-              <a:lnSpc>
-                <a:spcPct val="125000"/>
-              </a:lnSpc>
-              <a:buNone/>
-            </a:pPr>
-            <a:endParaRPr lang="en-US" sz="1050" dirty="0"/>
-          </a:p>
-          <a:p>
-            <a:pPr indent="0" marL="0">
-              <a:lnSpc>
-                <a:spcPct val="125000"/>
-              </a:lnSpc>
-              <a:buNone/>
-            </a:pPr>
-            <a:r>
-              <a:rPr lang="en-US" sz="1050" dirty="0">
-                <a:solidFill>
-                  <a:srgbClr val="A7C0C8"/>
-                </a:solidFill>
-                <a:latin typeface="맑은 고딕" pitchFamily="34" charset="0"/>
-                <a:ea typeface="맑은 고딕" pitchFamily="34" charset="-122"/>
-                <a:cs typeface="맑은 고딕" pitchFamily="34" charset="-120"/>
-              </a:rPr>
-              <a:t>축소 배치.</a:t>
-            </a:r>
-            <a:endParaRPr lang="en-US" sz="1050" dirty="0"/>
-          </a:p>
-          <a:p>
-            <a:pPr indent="0" marL="0">
-              <a:lnSpc>
-                <a:spcPct val="125000"/>
-              </a:lnSpc>
-              <a:buNone/>
-            </a:pPr>
-            <a:r>
-              <a:rPr lang="en-US" sz="1050" dirty="0">
-                <a:solidFill>
-                  <a:srgbClr val="A7C0C8"/>
-                </a:solidFill>
-                <a:latin typeface="맑은 고딕" pitchFamily="34" charset="0"/>
-                <a:ea typeface="맑은 고딕" pitchFamily="34" charset="-122"/>
-                <a:cs typeface="맑은 고딕" pitchFamily="34" charset="-120"/>
-              </a:rPr>
-              <a:t>도형·아이콘으로</a:t>
-            </a:r>
-            <a:endParaRPr lang="en-US" sz="1050" dirty="0"/>
-          </a:p>
-          <a:p>
-            <a:pPr indent="0" marL="0">
-              <a:lnSpc>
-                <a:spcPct val="125000"/>
-              </a:lnSpc>
-              <a:buNone/>
-            </a:pPr>
-            <a:r>
-              <a:rPr lang="en-US" sz="1050" dirty="0">
-                <a:solidFill>
-                  <a:srgbClr val="A7C0C8"/>
-                </a:solidFill>
-                <a:latin typeface="맑은 고딕" pitchFamily="34" charset="0"/>
-                <a:ea typeface="맑은 고딕" pitchFamily="34" charset="-122"/>
-                <a:cs typeface="맑은 고딕" pitchFamily="34" charset="-120"/>
-              </a:rPr>
-              <a:t>대체하지 않는다.</a:t>
-            </a:r>
-            <a:endParaRPr lang="en-US" sz="1050" dirty="0"/>
-          </a:p>
-        </p:txBody>
-      </p:sp>
-      <p:sp>
-        <p:nvSpPr>
-          <p:cNvPr id="8" name="Text 6"/>
+          <a:prstGeom prst="rect">
+            <a:avLst/>
+          </a:prstGeom>
+        </p:spPr>
+      </p:pic>
+      <p:sp>
+        <p:nvSpPr>
+          <p:cNvPr id="6" name="Text 3"/>
           <p:cNvSpPr/>
           <p:nvPr/>
         </p:nvSpPr>
@@ -3510,7 +3356,7 @@
       </p:sp>
       <p:sp>
         <p:nvSpPr>
-          <p:cNvPr id="9" name="Text 7"/>
+          <p:cNvPr id="7" name="Text 4"/>
           <p:cNvSpPr/>
           <p:nvPr/>
         </p:nvSpPr>
@@ -3549,7 +3395,7 @@
       </p:sp>
       <p:sp>
         <p:nvSpPr>
-          <p:cNvPr id="10" name="Text 8"/>
+          <p:cNvPr id="8" name="Text 5"/>
           <p:cNvSpPr/>
           <p:nvPr/>
         </p:nvSpPr>
@@ -3589,186 +3435,32 @@
           </a:p>
         </p:txBody>
       </p:sp>
-      <p:sp>
-        <p:nvSpPr>
-          <p:cNvPr id="11" name="Shape 9"/>
-          <p:cNvSpPr/>
-          <p:nvPr/>
-        </p:nvSpPr>
+      <p:pic>
+        <p:nvPicPr>
+          <p:cNvPr id="9" name="Image 1" descr="D:/Projects/batboda/발표/캡처/20260805_C02_판정서_상단.png">    </p:cNvPr>
+          <p:cNvPicPr>
+            <a:picLocks noChangeAspect="1"/>
+          </p:cNvPicPr>
+          <p:nvPr/>
+        </p:nvPicPr>
+        <p:blipFill>
+          <a:blip r:embed="rId2"/>
+          <a:srcRect l="0" r="0" t="0" b="0"/>
+          <a:stretch/>
+        </p:blipFill>
         <p:spPr>
           <a:xfrm>
             <a:off x="2851648" y="2688336"/>
             <a:ext cx="1918960" cy="2926080"/>
           </a:xfrm>
-          <a:prstGeom prst="roundRect">
-            <a:avLst>
-              <a:gd name="adj" fmla="val 1906"/>
-            </a:avLst>
-          </a:prstGeom>
-          <a:solidFill>
-            <a:srgbClr val="17323C"/>
-          </a:solidFill>
-          <a:ln w="12700">
-            <a:solidFill>
-              <a:srgbClr val="2B4550"/>
-            </a:solidFill>
-            <a:prstDash val="dash"/>
-          </a:ln>
-        </p:spPr>
-      </p:sp>
-      <p:sp>
-        <p:nvSpPr>
-          <p:cNvPr id="12" name="Text 10"/>
-          <p:cNvSpPr/>
-          <p:nvPr/>
-        </p:nvSpPr>
-        <p:spPr>
-          <a:xfrm>
-            <a:off x="2997952" y="2798064"/>
-            <a:ext cx="1626352" cy="237744"/>
-          </a:xfrm>
-          <a:prstGeom prst="rect">
-            <a:avLst/>
-          </a:prstGeom>
-          <a:noFill/>
-          <a:ln/>
-        </p:spPr>
-        <p:txBody>
-          <a:bodyPr wrap="square" lIns="0" tIns="0" rIns="0" bIns="0" rtlCol="0" anchor="ctr"/>
-          <a:lstStyle/>
-          <a:p>
-            <a:pPr indent="0" marL="0">
-              <a:buNone/>
-            </a:pPr>
-            <a:r>
-              <a:rPr lang="en-US" sz="1100" b="1" dirty="0">
-                <a:solidFill>
-                  <a:srgbClr val="A7C0C8"/>
-                </a:solidFill>
-                <a:latin typeface="맑은 고딕" pitchFamily="34" charset="0"/>
-                <a:ea typeface="맑은 고딕" pitchFamily="34" charset="-122"/>
-                <a:cs typeface="맑은 고딕" pitchFamily="34" charset="-120"/>
-              </a:rPr>
-              <a:t>C2 · 02</a:t>
-            </a:r>
-            <a:endParaRPr lang="en-US" sz="1100" dirty="0"/>
-          </a:p>
-        </p:txBody>
-      </p:sp>
-      <p:sp>
-        <p:nvSpPr>
-          <p:cNvPr id="13" name="Text 11"/>
-          <p:cNvSpPr/>
-          <p:nvPr/>
-        </p:nvSpPr>
-        <p:spPr>
-          <a:xfrm>
-            <a:off x="2997952" y="3072384"/>
-            <a:ext cx="1626352" cy="2395728"/>
-          </a:xfrm>
-          <a:prstGeom prst="rect">
-            <a:avLst/>
-          </a:prstGeom>
-          <a:noFill/>
-          <a:ln/>
-        </p:spPr>
-        <p:txBody>
-          <a:bodyPr wrap="square" lIns="0" tIns="0" rIns="0" bIns="0" rtlCol="0" anchor="t"/>
-          <a:lstStyle/>
-          <a:p>
-            <a:pPr indent="0" marL="0">
-              <a:lnSpc>
-                <a:spcPct val="125000"/>
-              </a:lnSpc>
-              <a:buNone/>
-            </a:pPr>
-            <a:r>
-              <a:rPr lang="en-US" sz="1050" dirty="0">
-                <a:solidFill>
-                  <a:srgbClr val="A7C0C8"/>
-                </a:solidFill>
-                <a:latin typeface="맑은 고딕" pitchFamily="34" charset="0"/>
-                <a:ea typeface="맑은 고딕" pitchFamily="34" charset="-122"/>
-                <a:cs typeface="맑은 고딕" pitchFamily="34" charset="-120"/>
-              </a:rPr>
-              <a:t>토양 적성 카드 조각</a:t>
-            </a:r>
-            <a:endParaRPr lang="en-US" sz="1050" dirty="0"/>
-          </a:p>
-          <a:p>
-            <a:pPr indent="0" marL="0">
-              <a:lnSpc>
-                <a:spcPct val="125000"/>
-              </a:lnSpc>
-              <a:buNone/>
-            </a:pPr>
-            <a:endParaRPr lang="en-US" sz="1050" dirty="0"/>
-          </a:p>
-          <a:p>
-            <a:pPr indent="0" marL="0">
-              <a:lnSpc>
-                <a:spcPct val="125000"/>
-              </a:lnSpc>
-              <a:buNone/>
-            </a:pPr>
-            <a:r>
-              <a:rPr lang="en-US" sz="1050" dirty="0">
-                <a:solidFill>
-                  <a:srgbClr val="A7C0C8"/>
-                </a:solidFill>
-                <a:latin typeface="맑은 고딕" pitchFamily="34" charset="0"/>
-                <a:ea typeface="맑은 고딕" pitchFamily="34" charset="-122"/>
-                <a:cs typeface="맑은 고딕" pitchFamily="34" charset="-120"/>
-              </a:rPr>
-              <a:t>축소 배치.</a:t>
-            </a:r>
-            <a:endParaRPr lang="en-US" sz="1050" dirty="0"/>
-          </a:p>
-          <a:p>
-            <a:pPr indent="0" marL="0">
-              <a:lnSpc>
-                <a:spcPct val="125000"/>
-              </a:lnSpc>
-              <a:buNone/>
-            </a:pPr>
-            <a:r>
-              <a:rPr lang="en-US" sz="1050" dirty="0">
-                <a:solidFill>
-                  <a:srgbClr val="A7C0C8"/>
-                </a:solidFill>
-                <a:latin typeface="맑은 고딕" pitchFamily="34" charset="0"/>
-                <a:ea typeface="맑은 고딕" pitchFamily="34" charset="-122"/>
-                <a:cs typeface="맑은 고딕" pitchFamily="34" charset="-120"/>
-              </a:rPr>
-              <a:t>도형·아이콘으로</a:t>
-            </a:r>
-            <a:endParaRPr lang="en-US" sz="1050" dirty="0"/>
-          </a:p>
-          <a:p>
-            <a:pPr indent="0" marL="0">
-              <a:lnSpc>
-                <a:spcPct val="125000"/>
-              </a:lnSpc>
-              <a:buNone/>
-            </a:pPr>
-            <a:r>
-              <a:rPr lang="en-US" sz="1050" dirty="0">
-                <a:solidFill>
-                  <a:srgbClr val="A7C0C8"/>
-                </a:solidFill>
-                <a:latin typeface="맑은 고딕" pitchFamily="34" charset="0"/>
-                <a:ea typeface="맑은 고딕" pitchFamily="34" charset="-122"/>
-                <a:cs typeface="맑은 고딕" pitchFamily="34" charset="-120"/>
-              </a:rPr>
-              <a:t>대체하지 않는다.</a:t>
-            </a:r>
-            <a:endParaRPr lang="en-US" sz="1050" dirty="0"/>
-          </a:p>
-        </p:txBody>
-      </p:sp>
-      <p:sp>
-        <p:nvSpPr>
-          <p:cNvPr id="14" name="Text 12"/>
+          <a:prstGeom prst="rect">
+            <a:avLst/>
+          </a:prstGeom>
+        </p:spPr>
+      </p:pic>
+      <p:sp>
+        <p:nvSpPr>
+          <p:cNvPr id="10" name="Text 6"/>
           <p:cNvSpPr/>
           <p:nvPr/>
         </p:nvSpPr>
@@ -3807,7 +3499,7 @@
       </p:sp>
       <p:sp>
         <p:nvSpPr>
-          <p:cNvPr id="15" name="Text 13"/>
+          <p:cNvPr id="11" name="Text 7"/>
           <p:cNvSpPr/>
           <p:nvPr/>
         </p:nvSpPr>
@@ -3846,7 +3538,7 @@
       </p:sp>
       <p:sp>
         <p:nvSpPr>
-          <p:cNvPr id="16" name="Text 14"/>
+          <p:cNvPr id="12" name="Text 8"/>
           <p:cNvSpPr/>
           <p:nvPr/>
         </p:nvSpPr>
@@ -3886,186 +3578,32 @@
           </a:p>
         </p:txBody>
       </p:sp>
-      <p:sp>
-        <p:nvSpPr>
-          <p:cNvPr id="17" name="Shape 15"/>
-          <p:cNvSpPr/>
-          <p:nvPr/>
-        </p:nvSpPr>
+      <p:pic>
+        <p:nvPicPr>
+          <p:cNvPr id="13" name="Image 2" descr="D:/Projects/batboda/발표/캡처/20260805_C06_유방동870답_상추_밭등급.png">    </p:cNvPr>
+          <p:cNvPicPr>
+            <a:picLocks noChangeAspect="1"/>
+          </p:cNvPicPr>
+          <p:nvPr/>
+        </p:nvPicPr>
+        <p:blipFill>
+          <a:blip r:embed="rId3"/>
+          <a:srcRect l="0" r="0" t="0" b="0"/>
+          <a:stretch/>
+        </p:blipFill>
         <p:spPr>
           <a:xfrm>
             <a:off x="5136368" y="2688336"/>
             <a:ext cx="1918960" cy="2926080"/>
           </a:xfrm>
-          <a:prstGeom prst="roundRect">
-            <a:avLst>
-              <a:gd name="adj" fmla="val 1906"/>
-            </a:avLst>
-          </a:prstGeom>
-          <a:solidFill>
-            <a:srgbClr val="17323C"/>
-          </a:solidFill>
-          <a:ln w="12700">
-            <a:solidFill>
-              <a:srgbClr val="2B4550"/>
-            </a:solidFill>
-            <a:prstDash val="dash"/>
-          </a:ln>
-        </p:spPr>
-      </p:sp>
-      <p:sp>
-        <p:nvSpPr>
-          <p:cNvPr id="18" name="Text 16"/>
-          <p:cNvSpPr/>
-          <p:nvPr/>
-        </p:nvSpPr>
-        <p:spPr>
-          <a:xfrm>
-            <a:off x="5282672" y="2798064"/>
-            <a:ext cx="1626352" cy="237744"/>
-          </a:xfrm>
-          <a:prstGeom prst="rect">
-            <a:avLst/>
-          </a:prstGeom>
-          <a:noFill/>
-          <a:ln/>
-        </p:spPr>
-        <p:txBody>
-          <a:bodyPr wrap="square" lIns="0" tIns="0" rIns="0" bIns="0" rtlCol="0" anchor="ctr"/>
-          <a:lstStyle/>
-          <a:p>
-            <a:pPr indent="0" marL="0">
-              <a:buNone/>
-            </a:pPr>
-            <a:r>
-              <a:rPr lang="en-US" sz="1100" b="1" dirty="0">
-                <a:solidFill>
-                  <a:srgbClr val="A7C0C8"/>
-                </a:solidFill>
-                <a:latin typeface="맑은 고딕" pitchFamily="34" charset="0"/>
-                <a:ea typeface="맑은 고딕" pitchFamily="34" charset="-122"/>
-                <a:cs typeface="맑은 고딕" pitchFamily="34" charset="-120"/>
-              </a:rPr>
-              <a:t>C6 · 02</a:t>
-            </a:r>
-            <a:endParaRPr lang="en-US" sz="1100" dirty="0"/>
-          </a:p>
-        </p:txBody>
-      </p:sp>
-      <p:sp>
-        <p:nvSpPr>
-          <p:cNvPr id="19" name="Text 17"/>
-          <p:cNvSpPr/>
-          <p:nvPr/>
-        </p:nvSpPr>
-        <p:spPr>
-          <a:xfrm>
-            <a:off x="5282672" y="3072384"/>
-            <a:ext cx="1626352" cy="2395728"/>
-          </a:xfrm>
-          <a:prstGeom prst="rect">
-            <a:avLst/>
-          </a:prstGeom>
-          <a:noFill/>
-          <a:ln/>
-        </p:spPr>
-        <p:txBody>
-          <a:bodyPr wrap="square" lIns="0" tIns="0" rIns="0" bIns="0" rtlCol="0" anchor="t"/>
-          <a:lstStyle/>
-          <a:p>
-            <a:pPr indent="0" marL="0">
-              <a:lnSpc>
-                <a:spcPct val="125000"/>
-              </a:lnSpc>
-              <a:buNone/>
-            </a:pPr>
-            <a:r>
-              <a:rPr lang="en-US" sz="1050" dirty="0">
-                <a:solidFill>
-                  <a:srgbClr val="A7C0C8"/>
-                </a:solidFill>
-                <a:latin typeface="맑은 고딕" pitchFamily="34" charset="0"/>
-                <a:ea typeface="맑은 고딕" pitchFamily="34" charset="-122"/>
-                <a:cs typeface="맑은 고딕" pitchFamily="34" charset="-120"/>
-              </a:rPr>
-              <a:t>밭 3급지 표기 조각</a:t>
-            </a:r>
-            <a:endParaRPr lang="en-US" sz="1050" dirty="0"/>
-          </a:p>
-          <a:p>
-            <a:pPr indent="0" marL="0">
-              <a:lnSpc>
-                <a:spcPct val="125000"/>
-              </a:lnSpc>
-              <a:buNone/>
-            </a:pPr>
-            <a:endParaRPr lang="en-US" sz="1050" dirty="0"/>
-          </a:p>
-          <a:p>
-            <a:pPr indent="0" marL="0">
-              <a:lnSpc>
-                <a:spcPct val="125000"/>
-              </a:lnSpc>
-              <a:buNone/>
-            </a:pPr>
-            <a:r>
-              <a:rPr lang="en-US" sz="1050" dirty="0">
-                <a:solidFill>
-                  <a:srgbClr val="A7C0C8"/>
-                </a:solidFill>
-                <a:latin typeface="맑은 고딕" pitchFamily="34" charset="0"/>
-                <a:ea typeface="맑은 고딕" pitchFamily="34" charset="-122"/>
-                <a:cs typeface="맑은 고딕" pitchFamily="34" charset="-120"/>
-              </a:rPr>
-              <a:t>축소 배치.</a:t>
-            </a:r>
-            <a:endParaRPr lang="en-US" sz="1050" dirty="0"/>
-          </a:p>
-          <a:p>
-            <a:pPr indent="0" marL="0">
-              <a:lnSpc>
-                <a:spcPct val="125000"/>
-              </a:lnSpc>
-              <a:buNone/>
-            </a:pPr>
-            <a:r>
-              <a:rPr lang="en-US" sz="1050" dirty="0">
-                <a:solidFill>
-                  <a:srgbClr val="A7C0C8"/>
-                </a:solidFill>
-                <a:latin typeface="맑은 고딕" pitchFamily="34" charset="0"/>
-                <a:ea typeface="맑은 고딕" pitchFamily="34" charset="-122"/>
-                <a:cs typeface="맑은 고딕" pitchFamily="34" charset="-120"/>
-              </a:rPr>
-              <a:t>도형·아이콘으로</a:t>
-            </a:r>
-            <a:endParaRPr lang="en-US" sz="1050" dirty="0"/>
-          </a:p>
-          <a:p>
-            <a:pPr indent="0" marL="0">
-              <a:lnSpc>
-                <a:spcPct val="125000"/>
-              </a:lnSpc>
-              <a:buNone/>
-            </a:pPr>
-            <a:r>
-              <a:rPr lang="en-US" sz="1050" dirty="0">
-                <a:solidFill>
-                  <a:srgbClr val="A7C0C8"/>
-                </a:solidFill>
-                <a:latin typeface="맑은 고딕" pitchFamily="34" charset="0"/>
-                <a:ea typeface="맑은 고딕" pitchFamily="34" charset="-122"/>
-                <a:cs typeface="맑은 고딕" pitchFamily="34" charset="-120"/>
-              </a:rPr>
-              <a:t>대체하지 않는다.</a:t>
-            </a:r>
-            <a:endParaRPr lang="en-US" sz="1050" dirty="0"/>
-          </a:p>
-        </p:txBody>
-      </p:sp>
-      <p:sp>
-        <p:nvSpPr>
-          <p:cNvPr id="20" name="Text 18"/>
+          <a:prstGeom prst="rect">
+            <a:avLst/>
+          </a:prstGeom>
+        </p:spPr>
+      </p:pic>
+      <p:sp>
+        <p:nvSpPr>
+          <p:cNvPr id="14" name="Text 9"/>
           <p:cNvSpPr/>
           <p:nvPr/>
         </p:nvSpPr>
@@ -4104,7 +3642,7 @@
       </p:sp>
       <p:sp>
         <p:nvSpPr>
-          <p:cNvPr id="21" name="Text 19"/>
+          <p:cNvPr id="15" name="Text 10"/>
           <p:cNvSpPr/>
           <p:nvPr/>
         </p:nvSpPr>
@@ -4143,7 +3681,7 @@
       </p:sp>
       <p:sp>
         <p:nvSpPr>
-          <p:cNvPr id="22" name="Text 20"/>
+          <p:cNvPr id="16" name="Text 11"/>
           <p:cNvSpPr/>
           <p:nvPr/>
         </p:nvSpPr>
@@ -4183,186 +3721,32 @@
           </a:p>
         </p:txBody>
       </p:sp>
-      <p:sp>
-        <p:nvSpPr>
-          <p:cNvPr id="23" name="Shape 21"/>
-          <p:cNvSpPr/>
-          <p:nvPr/>
-        </p:nvSpPr>
+      <p:pic>
+        <p:nvPicPr>
+          <p:cNvPr id="17" name="Image 3" descr="D:/Projects/batboda/발표/캡처/20260805_C03_산도_기온_눈금.png">    </p:cNvPr>
+          <p:cNvPicPr>
+            <a:picLocks noChangeAspect="1"/>
+          </p:cNvPicPr>
+          <p:nvPr/>
+        </p:nvPicPr>
+        <p:blipFill>
+          <a:blip r:embed="rId4"/>
+          <a:srcRect l="0" r="0" t="0" b="0"/>
+          <a:stretch/>
+        </p:blipFill>
         <p:spPr>
           <a:xfrm>
             <a:off x="7421088" y="2688336"/>
             <a:ext cx="1918960" cy="2926080"/>
           </a:xfrm>
-          <a:prstGeom prst="roundRect">
-            <a:avLst>
-              <a:gd name="adj" fmla="val 1906"/>
-            </a:avLst>
-          </a:prstGeom>
-          <a:solidFill>
-            <a:srgbClr val="17323C"/>
-          </a:solidFill>
-          <a:ln w="12700">
-            <a:solidFill>
-              <a:srgbClr val="2B4550"/>
-            </a:solidFill>
-            <a:prstDash val="dash"/>
-          </a:ln>
-        </p:spPr>
-      </p:sp>
-      <p:sp>
-        <p:nvSpPr>
-          <p:cNvPr id="24" name="Text 22"/>
-          <p:cNvSpPr/>
-          <p:nvPr/>
-        </p:nvSpPr>
-        <p:spPr>
-          <a:xfrm>
-            <a:off x="7567392" y="2798064"/>
-            <a:ext cx="1626352" cy="237744"/>
-          </a:xfrm>
-          <a:prstGeom prst="rect">
-            <a:avLst/>
-          </a:prstGeom>
-          <a:noFill/>
-          <a:ln/>
-        </p:spPr>
-        <p:txBody>
-          <a:bodyPr wrap="square" lIns="0" tIns="0" rIns="0" bIns="0" rtlCol="0" anchor="ctr"/>
-          <a:lstStyle/>
-          <a:p>
-            <a:pPr indent="0" marL="0">
-              <a:buNone/>
-            </a:pPr>
-            <a:r>
-              <a:rPr lang="en-US" sz="1100" b="1" dirty="0">
-                <a:solidFill>
-                  <a:srgbClr val="A7C0C8"/>
-                </a:solidFill>
-                <a:latin typeface="맑은 고딕" pitchFamily="34" charset="0"/>
-                <a:ea typeface="맑은 고딕" pitchFamily="34" charset="-122"/>
-                <a:cs typeface="맑은 고딕" pitchFamily="34" charset="-120"/>
-              </a:rPr>
-              <a:t>C3 · 03</a:t>
-            </a:r>
-            <a:endParaRPr lang="en-US" sz="1100" dirty="0"/>
-          </a:p>
-        </p:txBody>
-      </p:sp>
-      <p:sp>
-        <p:nvSpPr>
-          <p:cNvPr id="25" name="Text 23"/>
-          <p:cNvSpPr/>
-          <p:nvPr/>
-        </p:nvSpPr>
-        <p:spPr>
-          <a:xfrm>
-            <a:off x="7567392" y="3072384"/>
-            <a:ext cx="1626352" cy="2395728"/>
-          </a:xfrm>
-          <a:prstGeom prst="rect">
-            <a:avLst/>
-          </a:prstGeom>
-          <a:noFill/>
-          <a:ln/>
-        </p:spPr>
-        <p:txBody>
-          <a:bodyPr wrap="square" lIns="0" tIns="0" rIns="0" bIns="0" rtlCol="0" anchor="t"/>
-          <a:lstStyle/>
-          <a:p>
-            <a:pPr indent="0" marL="0">
-              <a:lnSpc>
-                <a:spcPct val="125000"/>
-              </a:lnSpc>
-              <a:buNone/>
-            </a:pPr>
-            <a:r>
-              <a:rPr lang="en-US" sz="1050" dirty="0">
-                <a:solidFill>
-                  <a:srgbClr val="A7C0C8"/>
-                </a:solidFill>
-                <a:latin typeface="맑은 고딕" pitchFamily="34" charset="0"/>
-                <a:ea typeface="맑은 고딕" pitchFamily="34" charset="-122"/>
-                <a:cs typeface="맑은 고딕" pitchFamily="34" charset="-120"/>
-              </a:rPr>
-              <a:t>기온 줄 눈금 조각</a:t>
-            </a:r>
-            <a:endParaRPr lang="en-US" sz="1050" dirty="0"/>
-          </a:p>
-          <a:p>
-            <a:pPr indent="0" marL="0">
-              <a:lnSpc>
-                <a:spcPct val="125000"/>
-              </a:lnSpc>
-              <a:buNone/>
-            </a:pPr>
-            <a:endParaRPr lang="en-US" sz="1050" dirty="0"/>
-          </a:p>
-          <a:p>
-            <a:pPr indent="0" marL="0">
-              <a:lnSpc>
-                <a:spcPct val="125000"/>
-              </a:lnSpc>
-              <a:buNone/>
-            </a:pPr>
-            <a:r>
-              <a:rPr lang="en-US" sz="1050" dirty="0">
-                <a:solidFill>
-                  <a:srgbClr val="A7C0C8"/>
-                </a:solidFill>
-                <a:latin typeface="맑은 고딕" pitchFamily="34" charset="0"/>
-                <a:ea typeface="맑은 고딕" pitchFamily="34" charset="-122"/>
-                <a:cs typeface="맑은 고딕" pitchFamily="34" charset="-120"/>
-              </a:rPr>
-              <a:t>축소 배치.</a:t>
-            </a:r>
-            <a:endParaRPr lang="en-US" sz="1050" dirty="0"/>
-          </a:p>
-          <a:p>
-            <a:pPr indent="0" marL="0">
-              <a:lnSpc>
-                <a:spcPct val="125000"/>
-              </a:lnSpc>
-              <a:buNone/>
-            </a:pPr>
-            <a:r>
-              <a:rPr lang="en-US" sz="1050" dirty="0">
-                <a:solidFill>
-                  <a:srgbClr val="A7C0C8"/>
-                </a:solidFill>
-                <a:latin typeface="맑은 고딕" pitchFamily="34" charset="0"/>
-                <a:ea typeface="맑은 고딕" pitchFamily="34" charset="-122"/>
-                <a:cs typeface="맑은 고딕" pitchFamily="34" charset="-120"/>
-              </a:rPr>
-              <a:t>도형·아이콘으로</a:t>
-            </a:r>
-            <a:endParaRPr lang="en-US" sz="1050" dirty="0"/>
-          </a:p>
-          <a:p>
-            <a:pPr indent="0" marL="0">
-              <a:lnSpc>
-                <a:spcPct val="125000"/>
-              </a:lnSpc>
-              <a:buNone/>
-            </a:pPr>
-            <a:r>
-              <a:rPr lang="en-US" sz="1050" dirty="0">
-                <a:solidFill>
-                  <a:srgbClr val="A7C0C8"/>
-                </a:solidFill>
-                <a:latin typeface="맑은 고딕" pitchFamily="34" charset="0"/>
-                <a:ea typeface="맑은 고딕" pitchFamily="34" charset="-122"/>
-                <a:cs typeface="맑은 고딕" pitchFamily="34" charset="-120"/>
-              </a:rPr>
-              <a:t>대체하지 않는다.</a:t>
-            </a:r>
-            <a:endParaRPr lang="en-US" sz="1050" dirty="0"/>
-          </a:p>
-        </p:txBody>
-      </p:sp>
-      <p:sp>
-        <p:nvSpPr>
-          <p:cNvPr id="26" name="Text 24"/>
+          <a:prstGeom prst="rect">
+            <a:avLst/>
+          </a:prstGeom>
+        </p:spPr>
+      </p:pic>
+      <p:sp>
+        <p:nvSpPr>
+          <p:cNvPr id="18" name="Text 12"/>
           <p:cNvSpPr/>
           <p:nvPr/>
         </p:nvSpPr>
@@ -4401,7 +3785,7 @@
       </p:sp>
       <p:sp>
         <p:nvSpPr>
-          <p:cNvPr id="27" name="Text 25"/>
+          <p:cNvPr id="19" name="Text 13"/>
           <p:cNvSpPr/>
           <p:nvPr/>
         </p:nvSpPr>
@@ -4440,7 +3824,7 @@
       </p:sp>
       <p:sp>
         <p:nvSpPr>
-          <p:cNvPr id="28" name="Text 26"/>
+          <p:cNvPr id="20" name="Text 14"/>
           <p:cNvSpPr/>
           <p:nvPr/>
         </p:nvSpPr>
@@ -4480,186 +3864,32 @@
           </a:p>
         </p:txBody>
       </p:sp>
-      <p:sp>
-        <p:nvSpPr>
-          <p:cNvPr id="29" name="Shape 27"/>
-          <p:cNvSpPr/>
-          <p:nvPr/>
-        </p:nvSpPr>
+      <p:pic>
+        <p:nvPicPr>
+          <p:cNvPr id="21" name="Image 4" descr="D:/Projects/batboda/발표/캡처/20260805_C04b_상태_기준시각.png">    </p:cNvPr>
+          <p:cNvPicPr>
+            <a:picLocks noChangeAspect="1"/>
+          </p:cNvPicPr>
+          <p:nvPr/>
+        </p:nvPicPr>
+        <p:blipFill>
+          <a:blip r:embed="rId5"/>
+          <a:srcRect l="0" r="0" t="0" b="0"/>
+          <a:stretch/>
+        </p:blipFill>
         <p:spPr>
           <a:xfrm>
             <a:off x="9705807" y="2688336"/>
             <a:ext cx="1918960" cy="2926080"/>
           </a:xfrm>
-          <a:prstGeom prst="roundRect">
-            <a:avLst>
-              <a:gd name="adj" fmla="val 1906"/>
-            </a:avLst>
-          </a:prstGeom>
-          <a:solidFill>
-            <a:srgbClr val="17323C"/>
-          </a:solidFill>
-          <a:ln w="12700">
-            <a:solidFill>
-              <a:srgbClr val="2B4550"/>
-            </a:solidFill>
-            <a:prstDash val="dash"/>
-          </a:ln>
-        </p:spPr>
-      </p:sp>
-      <p:sp>
-        <p:nvSpPr>
-          <p:cNvPr id="30" name="Text 28"/>
-          <p:cNvSpPr/>
-          <p:nvPr/>
-        </p:nvSpPr>
-        <p:spPr>
-          <a:xfrm>
-            <a:off x="9852111" y="2798064"/>
-            <a:ext cx="1626352" cy="237744"/>
-          </a:xfrm>
-          <a:prstGeom prst="rect">
-            <a:avLst/>
-          </a:prstGeom>
-          <a:noFill/>
-          <a:ln/>
-        </p:spPr>
-        <p:txBody>
-          <a:bodyPr wrap="square" lIns="0" tIns="0" rIns="0" bIns="0" rtlCol="0" anchor="ctr"/>
-          <a:lstStyle/>
-          <a:p>
-            <a:pPr indent="0" marL="0">
-              <a:buNone/>
-            </a:pPr>
-            <a:r>
-              <a:rPr lang="en-US" sz="1100" b="1" dirty="0">
-                <a:solidFill>
-                  <a:srgbClr val="A7C0C8"/>
-                </a:solidFill>
-                <a:latin typeface="맑은 고딕" pitchFamily="34" charset="0"/>
-                <a:ea typeface="맑은 고딕" pitchFamily="34" charset="-122"/>
-                <a:cs typeface="맑은 고딕" pitchFamily="34" charset="-120"/>
-              </a:rPr>
-              <a:t>C4 · 03</a:t>
-            </a:r>
-            <a:endParaRPr lang="en-US" sz="1100" dirty="0"/>
-          </a:p>
-        </p:txBody>
-      </p:sp>
-      <p:sp>
-        <p:nvSpPr>
-          <p:cNvPr id="31" name="Text 29"/>
-          <p:cNvSpPr/>
-          <p:nvPr/>
-        </p:nvSpPr>
-        <p:spPr>
-          <a:xfrm>
-            <a:off x="9852111" y="3072384"/>
-            <a:ext cx="1626352" cy="2395728"/>
-          </a:xfrm>
-          <a:prstGeom prst="rect">
-            <a:avLst/>
-          </a:prstGeom>
-          <a:noFill/>
-          <a:ln/>
-        </p:spPr>
-        <p:txBody>
-          <a:bodyPr wrap="square" lIns="0" tIns="0" rIns="0" bIns="0" rtlCol="0" anchor="t"/>
-          <a:lstStyle/>
-          <a:p>
-            <a:pPr indent="0" marL="0">
-              <a:lnSpc>
-                <a:spcPct val="125000"/>
-              </a:lnSpc>
-              <a:buNone/>
-            </a:pPr>
-            <a:r>
-              <a:rPr lang="en-US" sz="1050" dirty="0">
-                <a:solidFill>
-                  <a:srgbClr val="A7C0C8"/>
-                </a:solidFill>
-                <a:latin typeface="맑은 고딕" pitchFamily="34" charset="0"/>
-                <a:ea typeface="맑은 고딕" pitchFamily="34" charset="-122"/>
-                <a:cs typeface="맑은 고딕" pitchFamily="34" charset="-120"/>
-              </a:rPr>
-              <a:t>상태·기준시각 열 조각</a:t>
-            </a:r>
-            <a:endParaRPr lang="en-US" sz="1050" dirty="0"/>
-          </a:p>
-          <a:p>
-            <a:pPr indent="0" marL="0">
-              <a:lnSpc>
-                <a:spcPct val="125000"/>
-              </a:lnSpc>
-              <a:buNone/>
-            </a:pPr>
-            <a:endParaRPr lang="en-US" sz="1050" dirty="0"/>
-          </a:p>
-          <a:p>
-            <a:pPr indent="0" marL="0">
-              <a:lnSpc>
-                <a:spcPct val="125000"/>
-              </a:lnSpc>
-              <a:buNone/>
-            </a:pPr>
-            <a:r>
-              <a:rPr lang="en-US" sz="1050" dirty="0">
-                <a:solidFill>
-                  <a:srgbClr val="A7C0C8"/>
-                </a:solidFill>
-                <a:latin typeface="맑은 고딕" pitchFamily="34" charset="0"/>
-                <a:ea typeface="맑은 고딕" pitchFamily="34" charset="-122"/>
-                <a:cs typeface="맑은 고딕" pitchFamily="34" charset="-120"/>
-              </a:rPr>
-              <a:t>축소 배치.</a:t>
-            </a:r>
-            <a:endParaRPr lang="en-US" sz="1050" dirty="0"/>
-          </a:p>
-          <a:p>
-            <a:pPr indent="0" marL="0">
-              <a:lnSpc>
-                <a:spcPct val="125000"/>
-              </a:lnSpc>
-              <a:buNone/>
-            </a:pPr>
-            <a:r>
-              <a:rPr lang="en-US" sz="1050" dirty="0">
-                <a:solidFill>
-                  <a:srgbClr val="A7C0C8"/>
-                </a:solidFill>
-                <a:latin typeface="맑은 고딕" pitchFamily="34" charset="0"/>
-                <a:ea typeface="맑은 고딕" pitchFamily="34" charset="-122"/>
-                <a:cs typeface="맑은 고딕" pitchFamily="34" charset="-120"/>
-              </a:rPr>
-              <a:t>도형·아이콘으로</a:t>
-            </a:r>
-            <a:endParaRPr lang="en-US" sz="1050" dirty="0"/>
-          </a:p>
-          <a:p>
-            <a:pPr indent="0" marL="0">
-              <a:lnSpc>
-                <a:spcPct val="125000"/>
-              </a:lnSpc>
-              <a:buNone/>
-            </a:pPr>
-            <a:r>
-              <a:rPr lang="en-US" sz="1050" dirty="0">
-                <a:solidFill>
-                  <a:srgbClr val="A7C0C8"/>
-                </a:solidFill>
-                <a:latin typeface="맑은 고딕" pitchFamily="34" charset="0"/>
-                <a:ea typeface="맑은 고딕" pitchFamily="34" charset="-122"/>
-                <a:cs typeface="맑은 고딕" pitchFamily="34" charset="-120"/>
-              </a:rPr>
-              <a:t>대체하지 않는다.</a:t>
-            </a:r>
-            <a:endParaRPr lang="en-US" sz="1050" dirty="0"/>
-          </a:p>
-        </p:txBody>
-      </p:sp>
-      <p:sp>
-        <p:nvSpPr>
-          <p:cNvPr id="32" name="Text 30"/>
+          <a:prstGeom prst="rect">
+            <a:avLst/>
+          </a:prstGeom>
+        </p:spPr>
+      </p:pic>
+      <p:sp>
+        <p:nvSpPr>
+          <p:cNvPr id="22" name="Text 15"/>
           <p:cNvSpPr/>
           <p:nvPr/>
         </p:nvSpPr>

--- a/발표/20260805_밭보다_본선발표_v2.pptx
+++ b/발표/20260805_밭보다_본선발표_v2.pptx
@@ -1983,13 +1983,14 @@
         </p:nvPicPr>
         <p:blipFill>
           <a:blip r:embed="rId1"/>
-          <a:srcRect l="0" r="0" t="0" b="0"/>
-          <a:stretch/>
+          <a:stretch>
+            <a:fillRect/>
+          </a:stretch>
         </p:blipFill>
         <p:spPr>
           <a:xfrm>
-            <a:off x="7187184" y="1170432"/>
-            <a:ext cx="4434840" cy="4242816"/>
+            <a:off x="7187184" y="2044226"/>
+            <a:ext cx="4434840" cy="2495229"/>
           </a:xfrm>
           <a:prstGeom prst="rect">
             <a:avLst/>
@@ -2273,137 +2274,9 @@
           </a:p>
         </p:txBody>
       </p:sp>
-      <p:sp>
-        <p:nvSpPr>
-          <p:cNvPr id="7" name="Shape 5"/>
-          <p:cNvSpPr/>
-          <p:nvPr/>
-        </p:nvSpPr>
-        <p:spPr>
-          <a:xfrm>
-            <a:off x="7187184" y="1481328"/>
-            <a:ext cx="2103120" cy="2103120"/>
-          </a:xfrm>
-          <a:prstGeom prst="roundRect">
-            <a:avLst>
-              <a:gd name="adj" fmla="val 1739"/>
-            </a:avLst>
-          </a:prstGeom>
-          <a:solidFill>
-            <a:srgbClr val="17323C"/>
-          </a:solidFill>
-          <a:ln w="12700">
-            <a:solidFill>
-              <a:srgbClr val="2B4550"/>
-            </a:solidFill>
-            <a:prstDash val="dash"/>
-          </a:ln>
-        </p:spPr>
-      </p:sp>
-      <p:sp>
-        <p:nvSpPr>
-          <p:cNvPr id="8" name="Text 6"/>
-          <p:cNvSpPr/>
-          <p:nvPr/>
-        </p:nvSpPr>
-        <p:spPr>
-          <a:xfrm>
-            <a:off x="7333488" y="1591056"/>
-            <a:ext cx="1810512" cy="237744"/>
-          </a:xfrm>
-          <a:prstGeom prst="rect">
-            <a:avLst/>
-          </a:prstGeom>
-          <a:noFill/>
-          <a:ln/>
-        </p:spPr>
-        <p:txBody>
-          <a:bodyPr wrap="square" lIns="0" tIns="0" rIns="0" bIns="0" rtlCol="0" anchor="ctr"/>
-          <a:lstStyle/>
-          <a:p>
-            <a:pPr indent="0" marL="0">
-              <a:buNone/>
-            </a:pPr>
-            <a:r>
-              <a:rPr lang="en-US" sz="1100" b="1" dirty="0">
-                <a:solidFill>
-                  <a:srgbClr val="A7C0C8"/>
-                </a:solidFill>
-                <a:latin typeface="맑은 고딕" pitchFamily="34" charset="0"/>
-                <a:ea typeface="맑은 고딕" pitchFamily="34" charset="-122"/>
-                <a:cs typeface="맑은 고딕" pitchFamily="34" charset="-120"/>
-              </a:rPr>
-              <a:t>C12 · QR</a:t>
-            </a:r>
-            <a:endParaRPr lang="en-US" sz="1100" dirty="0"/>
-          </a:p>
-        </p:txBody>
-      </p:sp>
-      <p:sp>
-        <p:nvSpPr>
-          <p:cNvPr id="9" name="Text 7"/>
-          <p:cNvSpPr/>
-          <p:nvPr/>
-        </p:nvSpPr>
-        <p:spPr>
-          <a:xfrm>
-            <a:off x="7333488" y="1865376"/>
-            <a:ext cx="1810512" cy="1572768"/>
-          </a:xfrm>
-          <a:prstGeom prst="rect">
-            <a:avLst/>
-          </a:prstGeom>
-          <a:noFill/>
-          <a:ln/>
-        </p:spPr>
-        <p:txBody>
-          <a:bodyPr wrap="square" lIns="0" tIns="0" rIns="0" bIns="0" rtlCol="0" anchor="t"/>
-          <a:lstStyle/>
-          <a:p>
-            <a:pPr indent="0" marL="0">
-              <a:lnSpc>
-                <a:spcPct val="125000"/>
-              </a:lnSpc>
-              <a:buNone/>
-            </a:pPr>
-            <a:r>
-              <a:rPr lang="en-US" sz="1050" dirty="0">
-                <a:solidFill>
-                  <a:srgbClr val="A7C0C8"/>
-                </a:solidFill>
-                <a:latin typeface="맑은 고딕" pitchFamily="34" charset="0"/>
-                <a:ea typeface="맑은 고딕" pitchFamily="34" charset="-122"/>
-                <a:cs typeface="맑은 고딕" pitchFamily="34" charset="-120"/>
-              </a:rPr>
-              <a:t>batboda.vercel.app</a:t>
-            </a:r>
-            <a:endParaRPr lang="en-US" sz="1050" dirty="0"/>
-          </a:p>
-          <a:p>
-            <a:pPr indent="0" marL="0">
-              <a:lnSpc>
-                <a:spcPct val="125000"/>
-              </a:lnSpc>
-              <a:buNone/>
-            </a:pPr>
-            <a:r>
-              <a:rPr lang="en-US" sz="1050" dirty="0">
-                <a:solidFill>
-                  <a:srgbClr val="A7C0C8"/>
-                </a:solidFill>
-                <a:latin typeface="맑은 고딕" pitchFamily="34" charset="0"/>
-                <a:ea typeface="맑은 고딕" pitchFamily="34" charset="-122"/>
-                <a:cs typeface="맑은 고딕" pitchFamily="34" charset="-120"/>
-              </a:rPr>
-              <a:t>QR. 여백 포함.</a:t>
-            </a:r>
-            <a:endParaRPr lang="en-US" sz="1050" dirty="0"/>
-          </a:p>
-        </p:txBody>
-      </p:sp>
       <p:pic>
         <p:nvPicPr>
-          <p:cNvPr id="10" name="Image 0" descr="D:/Projects/batboda/발표/캡처/20260805_C01_대관령85-61전_경계.png">    </p:cNvPr>
+          <p:cNvPr id="7" name="Image 0" descr="D:/Projects/batboda/발표/캡처/20260805_C12_QR.png">    </p:cNvPr>
           <p:cNvPicPr>
             <a:picLocks noChangeAspect="1"/>
           </p:cNvPicPr>
@@ -2411,12 +2284,13 @@
         </p:nvPicPr>
         <p:blipFill>
           <a:blip r:embed="rId1"/>
-          <a:srcRect l="0" r="0" t="0" b="0"/>
-          <a:stretch/>
+          <a:stretch>
+            <a:fillRect/>
+          </a:stretch>
         </p:blipFill>
         <p:spPr>
           <a:xfrm>
-            <a:off x="9528048" y="1481328"/>
+            <a:off x="7187184" y="1481328"/>
             <a:ext cx="2103120" cy="2103120"/>
           </a:xfrm>
           <a:prstGeom prst="rect">
@@ -2424,9 +2298,33 @@
           </a:prstGeom>
         </p:spPr>
       </p:pic>
-      <p:sp>
-        <p:nvSpPr>
-          <p:cNvPr id="11" name="Text 8"/>
+      <p:pic>
+        <p:nvPicPr>
+          <p:cNvPr id="8" name="Image 1" descr="D:/Projects/batboda/발표/캡처/20260805_C01_대관령85-61전_경계.png">    </p:cNvPr>
+          <p:cNvPicPr>
+            <a:picLocks noChangeAspect="1"/>
+          </p:cNvPicPr>
+          <p:nvPr/>
+        </p:nvPicPr>
+        <p:blipFill>
+          <a:blip r:embed="rId2"/>
+          <a:stretch>
+            <a:fillRect/>
+          </a:stretch>
+        </p:blipFill>
+        <p:spPr>
+          <a:xfrm>
+            <a:off x="9528048" y="1941236"/>
+            <a:ext cx="2103120" cy="1183304"/>
+          </a:xfrm>
+          <a:prstGeom prst="rect">
+            <a:avLst/>
+          </a:prstGeom>
+        </p:spPr>
+      </p:pic>
+      <p:sp>
+        <p:nvSpPr>
+          <p:cNvPr id="9" name="Text 5"/>
           <p:cNvSpPr/>
           <p:nvPr/>
         </p:nvSpPr>
@@ -2606,13 +2504,14 @@
         </p:nvPicPr>
         <p:blipFill>
           <a:blip r:embed="rId1"/>
-          <a:srcRect l="0" r="0" t="0" b="0"/>
-          <a:stretch/>
+          <a:stretch>
+            <a:fillRect/>
+          </a:stretch>
         </p:blipFill>
         <p:spPr>
           <a:xfrm>
-            <a:off x="566928" y="2304288"/>
-            <a:ext cx="7635240" cy="3749040"/>
+            <a:off x="3413997" y="2377440"/>
+            <a:ext cx="5363702" cy="3968496"/>
           </a:xfrm>
           <a:prstGeom prst="rect">
             <a:avLst/>
@@ -2627,27 +2526,24 @@
         </p:nvSpPr>
         <p:spPr>
           <a:xfrm>
-            <a:off x="8430768" y="2304288"/>
-            <a:ext cx="3200400" cy="566928"/>
-          </a:xfrm>
-          <a:prstGeom prst="rect">
-            <a:avLst/>
-          </a:prstGeom>
-          <a:noFill/>
-          <a:ln/>
-        </p:spPr>
-        <p:txBody>
-          <a:bodyPr wrap="square" lIns="0" tIns="0" rIns="0" bIns="0" rtlCol="0" anchor="t"/>
+            <a:off x="566928" y="1993392"/>
+            <a:ext cx="11057839" cy="292608"/>
+          </a:xfrm>
+          <a:prstGeom prst="rect">
+            <a:avLst/>
+          </a:prstGeom>
+          <a:noFill/>
+          <a:ln/>
+        </p:spPr>
+        <p:txBody>
+          <a:bodyPr wrap="square" lIns="0" tIns="0" rIns="0" bIns="0" rtlCol="0" anchor="ctr"/>
           <a:lstStyle/>
           <a:p>
             <a:pPr indent="0" marL="0">
-              <a:lnSpc>
-                <a:spcPct val="120000"/>
-              </a:lnSpc>
-              <a:buNone/>
-            </a:pPr>
-            <a:r>
-              <a:rPr lang="en-US" sz="1400" b="1" dirty="0">
+              <a:buNone/>
+            </a:pPr>
+            <a:r>
+              <a:rPr lang="en-US" sz="1500" b="1" dirty="0">
                 <a:solidFill>
                   <a:srgbClr val="0B5A72"/>
                 </a:solidFill>
@@ -2655,455 +2551,15 @@
                 <a:ea typeface="맑은 고딕" pitchFamily="34" charset="-122"/>
                 <a:cs typeface="맑은 고딕" pitchFamily="34" charset="-120"/>
               </a:rPr>
-              <a:t>네 갈래 · 기관도 단위도</a:t>
-            </a:r>
-            <a:endParaRPr lang="en-US" sz="1400" dirty="0"/>
-          </a:p>
-          <a:p>
-            <a:pPr indent="0" marL="0">
-              <a:lnSpc>
-                <a:spcPct val="120000"/>
-              </a:lnSpc>
-              <a:buNone/>
-            </a:pPr>
-            <a:r>
-              <a:rPr lang="en-US" sz="1400" b="1" dirty="0">
-                <a:solidFill>
-                  <a:srgbClr val="0B5A72"/>
-                </a:solidFill>
-                <a:latin typeface="맑은 고딕" pitchFamily="34" charset="0"/>
-                <a:ea typeface="맑은 고딕" pitchFamily="34" charset="-122"/>
-                <a:cs typeface="맑은 고딕" pitchFamily="34" charset="-120"/>
-              </a:rPr>
-              <a:t>기준시각도 다릅니다</a:t>
-            </a:r>
-            <a:endParaRPr lang="en-US" sz="1400" dirty="0"/>
-          </a:p>
-        </p:txBody>
-      </p:sp>
-      <p:sp>
-        <p:nvSpPr>
-          <p:cNvPr id="6" name="Shape 3"/>
-          <p:cNvSpPr/>
-          <p:nvPr/>
-        </p:nvSpPr>
-        <p:spPr>
-          <a:xfrm>
-            <a:off x="8430768" y="2999232"/>
-            <a:ext cx="3200400" cy="621792"/>
-          </a:xfrm>
-          <a:prstGeom prst="roundRect">
-            <a:avLst>
-              <a:gd name="adj" fmla="val 8824"/>
-            </a:avLst>
-          </a:prstGeom>
-          <a:solidFill>
-            <a:srgbClr val="FFFFFF"/>
-          </a:solidFill>
-          <a:ln w="12700">
-            <a:solidFill>
-              <a:srgbClr val="DDE4E6"/>
-            </a:solidFill>
-            <a:prstDash val="solid"/>
-          </a:ln>
-        </p:spPr>
-      </p:sp>
-      <p:sp>
-        <p:nvSpPr>
-          <p:cNvPr id="7" name="Text 4"/>
-          <p:cNvSpPr/>
-          <p:nvPr/>
-        </p:nvSpPr>
-        <p:spPr>
-          <a:xfrm>
-            <a:off x="8577072" y="3063240"/>
-            <a:ext cx="2926080" cy="246888"/>
-          </a:xfrm>
-          <a:prstGeom prst="rect">
-            <a:avLst/>
-          </a:prstGeom>
-          <a:noFill/>
-          <a:ln/>
-        </p:spPr>
-        <p:txBody>
-          <a:bodyPr wrap="square" lIns="0" tIns="0" rIns="0" bIns="0" rtlCol="0" anchor="ctr"/>
-          <a:lstStyle/>
-          <a:p>
-            <a:pPr indent="0" marL="0">
-              <a:buNone/>
-            </a:pPr>
-            <a:r>
-              <a:rPr lang="en-US" sz="1300" b="1" dirty="0">
-                <a:solidFill>
-                  <a:srgbClr val="14181A"/>
-                </a:solidFill>
-                <a:latin typeface="맑은 고딕" pitchFamily="34" charset="0"/>
-                <a:ea typeface="맑은 고딕" pitchFamily="34" charset="-122"/>
-                <a:cs typeface="맑은 고딕" pitchFamily="34" charset="-120"/>
-              </a:rPr>
-              <a:t>농지 경계</a:t>
-            </a:r>
-            <a:endParaRPr lang="en-US" sz="1300" dirty="0"/>
-          </a:p>
-        </p:txBody>
-      </p:sp>
-      <p:sp>
-        <p:nvSpPr>
-          <p:cNvPr id="8" name="Text 5"/>
-          <p:cNvSpPr/>
-          <p:nvPr/>
-        </p:nvSpPr>
-        <p:spPr>
-          <a:xfrm>
-            <a:off x="8577072" y="3310128"/>
-            <a:ext cx="2926080" cy="246888"/>
-          </a:xfrm>
-          <a:prstGeom prst="rect">
-            <a:avLst/>
-          </a:prstGeom>
-          <a:noFill/>
-          <a:ln/>
-        </p:spPr>
-        <p:txBody>
-          <a:bodyPr wrap="square" lIns="0" tIns="0" rIns="0" bIns="0" rtlCol="0" anchor="ctr"/>
-          <a:lstStyle/>
-          <a:p>
-            <a:pPr indent="0" marL="0">
-              <a:buNone/>
-            </a:pPr>
-            <a:r>
-              <a:rPr lang="en-US" sz="1150" dirty="0">
-                <a:solidFill>
-                  <a:srgbClr val="55636A"/>
-                </a:solidFill>
-                <a:latin typeface="맑은 고딕" pitchFamily="34" charset="0"/>
-                <a:ea typeface="맑은 고딕" pitchFamily="34" charset="-122"/>
-                <a:cs typeface="맑은 고딕" pitchFamily="34" charset="-120"/>
-              </a:rPr>
-              <a:t>농림축산식품부 팜맵</a:t>
-            </a:r>
-            <a:endParaRPr lang="en-US" sz="1150" dirty="0"/>
-          </a:p>
-        </p:txBody>
-      </p:sp>
-      <p:sp>
-        <p:nvSpPr>
-          <p:cNvPr id="9" name="Shape 6"/>
-          <p:cNvSpPr/>
-          <p:nvPr/>
-        </p:nvSpPr>
-        <p:spPr>
-          <a:xfrm>
-            <a:off x="8430768" y="3749040"/>
-            <a:ext cx="3200400" cy="621792"/>
-          </a:xfrm>
-          <a:prstGeom prst="roundRect">
-            <a:avLst>
-              <a:gd name="adj" fmla="val 8824"/>
-            </a:avLst>
-          </a:prstGeom>
-          <a:solidFill>
-            <a:srgbClr val="FFFFFF"/>
-          </a:solidFill>
-          <a:ln w="12700">
-            <a:solidFill>
-              <a:srgbClr val="DDE4E6"/>
-            </a:solidFill>
-            <a:prstDash val="solid"/>
-          </a:ln>
-        </p:spPr>
-      </p:sp>
-      <p:sp>
-        <p:nvSpPr>
-          <p:cNvPr id="10" name="Text 7"/>
-          <p:cNvSpPr/>
-          <p:nvPr/>
-        </p:nvSpPr>
-        <p:spPr>
-          <a:xfrm>
-            <a:off x="8577072" y="3813048"/>
-            <a:ext cx="2926080" cy="246888"/>
-          </a:xfrm>
-          <a:prstGeom prst="rect">
-            <a:avLst/>
-          </a:prstGeom>
-          <a:noFill/>
-          <a:ln/>
-        </p:spPr>
-        <p:txBody>
-          <a:bodyPr wrap="square" lIns="0" tIns="0" rIns="0" bIns="0" rtlCol="0" anchor="ctr"/>
-          <a:lstStyle/>
-          <a:p>
-            <a:pPr indent="0" marL="0">
-              <a:buNone/>
-            </a:pPr>
-            <a:r>
-              <a:rPr lang="en-US" sz="1300" b="1" dirty="0">
-                <a:solidFill>
-                  <a:srgbClr val="14181A"/>
-                </a:solidFill>
-                <a:latin typeface="맑은 고딕" pitchFamily="34" charset="0"/>
-                <a:ea typeface="맑은 고딕" pitchFamily="34" charset="-122"/>
-                <a:cs typeface="맑은 고딕" pitchFamily="34" charset="-120"/>
-              </a:rPr>
-              <a:t>토양 특성·화학성</a:t>
-            </a:r>
-            <a:endParaRPr lang="en-US" sz="1300" dirty="0"/>
-          </a:p>
-        </p:txBody>
-      </p:sp>
-      <p:sp>
-        <p:nvSpPr>
-          <p:cNvPr id="11" name="Text 8"/>
-          <p:cNvSpPr/>
-          <p:nvPr/>
-        </p:nvSpPr>
-        <p:spPr>
-          <a:xfrm>
-            <a:off x="8577072" y="4059936"/>
-            <a:ext cx="2926080" cy="246888"/>
-          </a:xfrm>
-          <a:prstGeom prst="rect">
-            <a:avLst/>
-          </a:prstGeom>
-          <a:noFill/>
-          <a:ln/>
-        </p:spPr>
-        <p:txBody>
-          <a:bodyPr wrap="square" lIns="0" tIns="0" rIns="0" bIns="0" rtlCol="0" anchor="ctr"/>
-          <a:lstStyle/>
-          <a:p>
-            <a:pPr indent="0" marL="0">
-              <a:buNone/>
-            </a:pPr>
-            <a:r>
-              <a:rPr lang="en-US" sz="1150" dirty="0">
-                <a:solidFill>
-                  <a:srgbClr val="55636A"/>
-                </a:solidFill>
-                <a:latin typeface="맑은 고딕" pitchFamily="34" charset="0"/>
-                <a:ea typeface="맑은 고딕" pitchFamily="34" charset="-122"/>
-                <a:cs typeface="맑은 고딕" pitchFamily="34" charset="-120"/>
-              </a:rPr>
-              <a:t>농촌진흥청 흙토람</a:t>
-            </a:r>
-            <a:endParaRPr lang="en-US" sz="1150" dirty="0"/>
-          </a:p>
-        </p:txBody>
-      </p:sp>
-      <p:sp>
-        <p:nvSpPr>
-          <p:cNvPr id="12" name="Shape 9"/>
-          <p:cNvSpPr/>
-          <p:nvPr/>
-        </p:nvSpPr>
-        <p:spPr>
-          <a:xfrm>
-            <a:off x="8430768" y="4498848"/>
-            <a:ext cx="3200400" cy="621792"/>
-          </a:xfrm>
-          <a:prstGeom prst="roundRect">
-            <a:avLst>
-              <a:gd name="adj" fmla="val 8824"/>
-            </a:avLst>
-          </a:prstGeom>
-          <a:solidFill>
-            <a:srgbClr val="FFFFFF"/>
-          </a:solidFill>
-          <a:ln w="12700">
-            <a:solidFill>
-              <a:srgbClr val="DDE4E6"/>
-            </a:solidFill>
-            <a:prstDash val="solid"/>
-          </a:ln>
-        </p:spPr>
-      </p:sp>
-      <p:sp>
-        <p:nvSpPr>
-          <p:cNvPr id="13" name="Text 10"/>
-          <p:cNvSpPr/>
-          <p:nvPr/>
-        </p:nvSpPr>
-        <p:spPr>
-          <a:xfrm>
-            <a:off x="8577072" y="4562856"/>
-            <a:ext cx="2926080" cy="246888"/>
-          </a:xfrm>
-          <a:prstGeom prst="rect">
-            <a:avLst/>
-          </a:prstGeom>
-          <a:noFill/>
-          <a:ln/>
-        </p:spPr>
-        <p:txBody>
-          <a:bodyPr wrap="square" lIns="0" tIns="0" rIns="0" bIns="0" rtlCol="0" anchor="ctr"/>
-          <a:lstStyle/>
-          <a:p>
-            <a:pPr indent="0" marL="0">
-              <a:buNone/>
-            </a:pPr>
-            <a:r>
-              <a:rPr lang="en-US" sz="1300" b="1" dirty="0">
-                <a:solidFill>
-                  <a:srgbClr val="14181A"/>
-                </a:solidFill>
-                <a:latin typeface="맑은 고딕" pitchFamily="34" charset="0"/>
-                <a:ea typeface="맑은 고딕" pitchFamily="34" charset="-122"/>
-                <a:cs typeface="맑은 고딕" pitchFamily="34" charset="-120"/>
-              </a:rPr>
-              <a:t>단기예보</a:t>
-            </a:r>
-            <a:endParaRPr lang="en-US" sz="1300" dirty="0"/>
-          </a:p>
-        </p:txBody>
-      </p:sp>
-      <p:sp>
-        <p:nvSpPr>
-          <p:cNvPr id="14" name="Text 11"/>
-          <p:cNvSpPr/>
-          <p:nvPr/>
-        </p:nvSpPr>
-        <p:spPr>
-          <a:xfrm>
-            <a:off x="8577072" y="4809744"/>
-            <a:ext cx="2926080" cy="246888"/>
-          </a:xfrm>
-          <a:prstGeom prst="rect">
-            <a:avLst/>
-          </a:prstGeom>
-          <a:noFill/>
-          <a:ln/>
-        </p:spPr>
-        <p:txBody>
-          <a:bodyPr wrap="square" lIns="0" tIns="0" rIns="0" bIns="0" rtlCol="0" anchor="ctr"/>
-          <a:lstStyle/>
-          <a:p>
-            <a:pPr indent="0" marL="0">
-              <a:buNone/>
-            </a:pPr>
-            <a:r>
-              <a:rPr lang="en-US" sz="1150" dirty="0">
-                <a:solidFill>
-                  <a:srgbClr val="55636A"/>
-                </a:solidFill>
-                <a:latin typeface="맑은 고딕" pitchFamily="34" charset="0"/>
-                <a:ea typeface="맑은 고딕" pitchFamily="34" charset="-122"/>
-                <a:cs typeface="맑은 고딕" pitchFamily="34" charset="-120"/>
-              </a:rPr>
-              <a:t>기상청</a:t>
-            </a:r>
-            <a:endParaRPr lang="en-US" sz="1150" dirty="0"/>
-          </a:p>
-        </p:txBody>
-      </p:sp>
-      <p:sp>
-        <p:nvSpPr>
-          <p:cNvPr id="15" name="Shape 12"/>
-          <p:cNvSpPr/>
-          <p:nvPr/>
-        </p:nvSpPr>
-        <p:spPr>
-          <a:xfrm>
-            <a:off x="8430768" y="5248656"/>
-            <a:ext cx="3200400" cy="621792"/>
-          </a:xfrm>
-          <a:prstGeom prst="roundRect">
-            <a:avLst>
-              <a:gd name="adj" fmla="val 8824"/>
-            </a:avLst>
-          </a:prstGeom>
-          <a:solidFill>
-            <a:srgbClr val="FFFFFF"/>
-          </a:solidFill>
-          <a:ln w="12700">
-            <a:solidFill>
-              <a:srgbClr val="DDE4E6"/>
-            </a:solidFill>
-            <a:prstDash val="solid"/>
-          </a:ln>
-        </p:spPr>
-      </p:sp>
-      <p:sp>
-        <p:nvSpPr>
-          <p:cNvPr id="16" name="Text 13"/>
-          <p:cNvSpPr/>
-          <p:nvPr/>
-        </p:nvSpPr>
-        <p:spPr>
-          <a:xfrm>
-            <a:off x="8577072" y="5312664"/>
-            <a:ext cx="2926080" cy="246888"/>
-          </a:xfrm>
-          <a:prstGeom prst="rect">
-            <a:avLst/>
-          </a:prstGeom>
-          <a:noFill/>
-          <a:ln/>
-        </p:spPr>
-        <p:txBody>
-          <a:bodyPr wrap="square" lIns="0" tIns="0" rIns="0" bIns="0" rtlCol="0" anchor="ctr"/>
-          <a:lstStyle/>
-          <a:p>
-            <a:pPr indent="0" marL="0">
-              <a:buNone/>
-            </a:pPr>
-            <a:r>
-              <a:rPr lang="en-US" sz="1300" b="1" dirty="0">
-                <a:solidFill>
-                  <a:srgbClr val="14181A"/>
-                </a:solidFill>
-                <a:latin typeface="맑은 고딕" pitchFamily="34" charset="0"/>
-                <a:ea typeface="맑은 고딕" pitchFamily="34" charset="-122"/>
-                <a:cs typeface="맑은 고딕" pitchFamily="34" charset="-120"/>
-              </a:rPr>
-              <a:t>최근 7일 관측</a:t>
-            </a:r>
-            <a:endParaRPr lang="en-US" sz="1300" dirty="0"/>
-          </a:p>
-        </p:txBody>
-      </p:sp>
-      <p:sp>
-        <p:nvSpPr>
-          <p:cNvPr id="17" name="Text 14"/>
-          <p:cNvSpPr/>
-          <p:nvPr/>
-        </p:nvSpPr>
-        <p:spPr>
-          <a:xfrm>
-            <a:off x="8577072" y="5559552"/>
-            <a:ext cx="2926080" cy="246888"/>
-          </a:xfrm>
-          <a:prstGeom prst="rect">
-            <a:avLst/>
-          </a:prstGeom>
-          <a:noFill/>
-          <a:ln/>
-        </p:spPr>
-        <p:txBody>
-          <a:bodyPr wrap="square" lIns="0" tIns="0" rIns="0" bIns="0" rtlCol="0" anchor="ctr"/>
-          <a:lstStyle/>
-          <a:p>
-            <a:pPr indent="0" marL="0">
-              <a:buNone/>
-            </a:pPr>
-            <a:r>
-              <a:rPr lang="en-US" sz="1150" dirty="0">
-                <a:solidFill>
-                  <a:srgbClr val="55636A"/>
-                </a:solidFill>
-                <a:latin typeface="맑은 고딕" pitchFamily="34" charset="0"/>
-                <a:ea typeface="맑은 고딕" pitchFamily="34" charset="-122"/>
-                <a:cs typeface="맑은 고딕" pitchFamily="34" charset="-120"/>
-              </a:rPr>
-              <a:t>농촌진흥청 농업기상</a:t>
-            </a:r>
-            <a:endParaRPr lang="en-US" sz="1150" dirty="0"/>
-          </a:p>
-        </p:txBody>
-      </p:sp>
-      <p:sp>
-        <p:nvSpPr>
-          <p:cNvPr id="18" name="Text 15"/>
+              <a:t>네 갈래 · 기관도 단위도 기준시각도 다릅니다</a:t>
+            </a:r>
+            <a:endParaRPr lang="en-US" sz="1500" dirty="0"/>
+          </a:p>
+        </p:txBody>
+      </p:sp>
+      <p:sp>
+        <p:nvSpPr>
+          <p:cNvPr id="6" name="Text 3"/>
           <p:cNvSpPr/>
           <p:nvPr/>
         </p:nvSpPr>
@@ -3302,13 +2758,14 @@
         </p:nvPicPr>
         <p:blipFill>
           <a:blip r:embed="rId1"/>
-          <a:srcRect l="0" r="0" t="0" b="0"/>
-          <a:stretch/>
+          <a:stretch>
+            <a:fillRect/>
+          </a:stretch>
         </p:blipFill>
         <p:spPr>
           <a:xfrm>
-            <a:off x="566928" y="2688336"/>
-            <a:ext cx="1918960" cy="2926080"/>
+            <a:off x="566928" y="3611532"/>
+            <a:ext cx="1918960" cy="1079688"/>
           </a:xfrm>
           <a:prstGeom prst="rect">
             <a:avLst/>
@@ -3445,13 +2902,14 @@
         </p:nvPicPr>
         <p:blipFill>
           <a:blip r:embed="rId2"/>
-          <a:srcRect l="0" r="0" t="0" b="0"/>
-          <a:stretch/>
+          <a:stretch>
+            <a:fillRect/>
+          </a:stretch>
         </p:blipFill>
         <p:spPr>
           <a:xfrm>
-            <a:off x="2851648" y="2688336"/>
-            <a:ext cx="1918960" cy="2926080"/>
+            <a:off x="2851648" y="3621677"/>
+            <a:ext cx="1918960" cy="1059397"/>
           </a:xfrm>
           <a:prstGeom prst="rect">
             <a:avLst/>
@@ -3588,13 +3046,14 @@
         </p:nvPicPr>
         <p:blipFill>
           <a:blip r:embed="rId3"/>
-          <a:srcRect l="0" r="0" t="0" b="0"/>
-          <a:stretch/>
+          <a:stretch>
+            <a:fillRect/>
+          </a:stretch>
         </p:blipFill>
         <p:spPr>
           <a:xfrm>
-            <a:off x="5136368" y="2688336"/>
-            <a:ext cx="1918960" cy="2926080"/>
+            <a:off x="5136368" y="3450299"/>
+            <a:ext cx="1918960" cy="1402154"/>
           </a:xfrm>
           <a:prstGeom prst="rect">
             <a:avLst/>
@@ -3731,13 +3190,14 @@
         </p:nvPicPr>
         <p:blipFill>
           <a:blip r:embed="rId4"/>
-          <a:srcRect l="0" r="0" t="0" b="0"/>
-          <a:stretch/>
+          <a:stretch>
+            <a:fillRect/>
+          </a:stretch>
         </p:blipFill>
         <p:spPr>
           <a:xfrm>
-            <a:off x="7421088" y="2688336"/>
-            <a:ext cx="1918960" cy="2926080"/>
+            <a:off x="7421088" y="2943560"/>
+            <a:ext cx="1918960" cy="2415632"/>
           </a:xfrm>
           <a:prstGeom prst="rect">
             <a:avLst/>
@@ -3874,13 +3334,14 @@
         </p:nvPicPr>
         <p:blipFill>
           <a:blip r:embed="rId5"/>
-          <a:srcRect l="0" r="0" t="0" b="0"/>
-          <a:stretch/>
+          <a:stretch>
+            <a:fillRect/>
+          </a:stretch>
         </p:blipFill>
         <p:spPr>
           <a:xfrm>
-            <a:off x="9705807" y="2688336"/>
-            <a:ext cx="1918960" cy="2926080"/>
+            <a:off x="9705807" y="2837270"/>
+            <a:ext cx="1918960" cy="2628213"/>
           </a:xfrm>
           <a:prstGeom prst="rect">
             <a:avLst/>
@@ -4193,13 +3654,14 @@
         </p:nvPicPr>
         <p:blipFill>
           <a:blip r:embed="rId1"/>
-          <a:srcRect l="0" r="0" t="0" b="0"/>
-          <a:stretch/>
+          <a:stretch>
+            <a:fillRect/>
+          </a:stretch>
         </p:blipFill>
         <p:spPr>
           <a:xfrm>
-            <a:off x="6455664" y="2450592"/>
-            <a:ext cx="932688" cy="2286000"/>
+            <a:off x="6455664" y="3331207"/>
+            <a:ext cx="932688" cy="524770"/>
           </a:xfrm>
           <a:prstGeom prst="rect">
             <a:avLst/>
@@ -4255,13 +3717,14 @@
         </p:nvPicPr>
         <p:blipFill>
           <a:blip r:embed="rId2"/>
-          <a:srcRect l="0" r="0" t="0" b="0"/>
-          <a:stretch/>
+          <a:stretch>
+            <a:fillRect/>
+          </a:stretch>
         </p:blipFill>
         <p:spPr>
           <a:xfrm>
-            <a:off x="7516368" y="2450592"/>
-            <a:ext cx="932688" cy="2286000"/>
+            <a:off x="7516368" y="3336138"/>
+            <a:ext cx="932688" cy="514908"/>
           </a:xfrm>
           <a:prstGeom prst="rect">
             <a:avLst/>
@@ -4317,13 +3780,14 @@
         </p:nvPicPr>
         <p:blipFill>
           <a:blip r:embed="rId3"/>
-          <a:srcRect l="0" r="0" t="0" b="0"/>
-          <a:stretch/>
+          <a:stretch>
+            <a:fillRect/>
+          </a:stretch>
         </p:blipFill>
         <p:spPr>
           <a:xfrm>
-            <a:off x="8577072" y="2450592"/>
-            <a:ext cx="932688" cy="2286000"/>
+            <a:off x="8577072" y="3006547"/>
+            <a:ext cx="932688" cy="1174090"/>
           </a:xfrm>
           <a:prstGeom prst="rect">
             <a:avLst/>
@@ -4379,13 +3843,14 @@
         </p:nvPicPr>
         <p:blipFill>
           <a:blip r:embed="rId4"/>
-          <a:srcRect l="0" r="0" t="0" b="0"/>
-          <a:stretch/>
+          <a:stretch>
+            <a:fillRect/>
+          </a:stretch>
         </p:blipFill>
         <p:spPr>
           <a:xfrm>
-            <a:off x="9637776" y="2450592"/>
-            <a:ext cx="932688" cy="2286000"/>
+            <a:off x="9637776" y="3248553"/>
+            <a:ext cx="932688" cy="690077"/>
           </a:xfrm>
           <a:prstGeom prst="rect">
             <a:avLst/>
@@ -4441,13 +3906,14 @@
         </p:nvPicPr>
         <p:blipFill>
           <a:blip r:embed="rId5"/>
-          <a:srcRect l="0" r="0" t="0" b="0"/>
-          <a:stretch/>
+          <a:stretch>
+            <a:fillRect/>
+          </a:stretch>
         </p:blipFill>
         <p:spPr>
           <a:xfrm>
-            <a:off x="10698480" y="2450592"/>
-            <a:ext cx="932688" cy="2286000"/>
+            <a:off x="10698480" y="3229718"/>
+            <a:ext cx="932688" cy="727748"/>
           </a:xfrm>
           <a:prstGeom prst="rect">
             <a:avLst/>
@@ -4846,13 +4312,14 @@
         </p:nvPicPr>
         <p:blipFill>
           <a:blip r:embed="rId1"/>
-          <a:srcRect l="0" r="0" t="0" b="0"/>
-          <a:stretch/>
+          <a:stretch>
+            <a:fillRect/>
+          </a:stretch>
         </p:blipFill>
         <p:spPr>
           <a:xfrm>
-            <a:off x="566928" y="3346704"/>
-            <a:ext cx="5373472" cy="2286000"/>
+            <a:off x="1451605" y="3273552"/>
+            <a:ext cx="3604117" cy="2633472"/>
           </a:xfrm>
           <a:prstGeom prst="rect">
             <a:avLst/>
@@ -4974,13 +4441,14 @@
         </p:nvPicPr>
         <p:blipFill>
           <a:blip r:embed="rId2"/>
-          <a:srcRect l="0" r="0" t="0" b="0"/>
-          <a:stretch/>
+          <a:stretch>
+            <a:fillRect/>
+          </a:stretch>
         </p:blipFill>
         <p:spPr>
           <a:xfrm>
-            <a:off x="6251296" y="3346704"/>
-            <a:ext cx="5373472" cy="2286000"/>
+            <a:off x="7135973" y="3273552"/>
+            <a:ext cx="3604117" cy="2633472"/>
           </a:xfrm>
           <a:prstGeom prst="rect">
             <a:avLst/>
@@ -4995,7 +4463,7 @@
         </p:nvSpPr>
         <p:spPr>
           <a:xfrm>
-            <a:off x="566928" y="5815584"/>
+            <a:off x="566928" y="6053328"/>
             <a:ext cx="11057839" cy="274320"/>
           </a:xfrm>
           <a:prstGeom prst="rect">
@@ -5227,13 +4695,14 @@
         </p:nvPicPr>
         <p:blipFill>
           <a:blip r:embed="rId1"/>
-          <a:srcRect l="0" r="0" t="0" b="0"/>
-          <a:stretch/>
+          <a:stretch>
+            <a:fillRect/>
+          </a:stretch>
         </p:blipFill>
         <p:spPr>
           <a:xfrm>
-            <a:off x="566928" y="2231136"/>
-            <a:ext cx="6903720" cy="3054096"/>
+            <a:off x="2061709" y="2231136"/>
+            <a:ext cx="3914158" cy="3054096"/>
           </a:xfrm>
           <a:prstGeom prst="rect">
             <a:avLst/>
@@ -5250,13 +4719,14 @@
         </p:nvPicPr>
         <p:blipFill>
           <a:blip r:embed="rId2"/>
-          <a:srcRect l="0" r="0" t="0" b="0"/>
-          <a:stretch/>
+          <a:stretch>
+            <a:fillRect/>
+          </a:stretch>
         </p:blipFill>
         <p:spPr>
           <a:xfrm>
-            <a:off x="7699248" y="2231136"/>
-            <a:ext cx="3931920" cy="3054096"/>
+            <a:off x="7699248" y="3272762"/>
+            <a:ext cx="3931920" cy="970844"/>
           </a:xfrm>
           <a:prstGeom prst="rect">
             <a:avLst/>
@@ -5534,7 +5004,7 @@
                 <a:ea typeface="맑은 고딕" pitchFamily="34" charset="-122"/>
                 <a:cs typeface="맑은 고딕" pitchFamily="34" charset="-120"/>
               </a:rPr>
-              <a:t>세 가지 상태를 화면에서 구분합니다</a:t>
+              <a:t>소스마다 상태와 기준시각을 따로 남깁니다</a:t>
             </a:r>
             <a:endParaRPr lang="en-US" sz="2800" dirty="0"/>
           </a:p>
@@ -5542,13 +5012,52 @@
       </p:sp>
       <p:sp>
         <p:nvSpPr>
-          <p:cNvPr id="4" name="Shape 2"/>
-          <p:cNvSpPr/>
-          <p:nvPr/>
-        </p:nvSpPr>
-        <p:spPr>
-          <a:xfrm>
-            <a:off x="566928" y="2249424"/>
+          <p:cNvPr id="4" name="Text 2"/>
+          <p:cNvSpPr/>
+          <p:nvPr/>
+        </p:nvSpPr>
+        <p:spPr>
+          <a:xfrm>
+            <a:off x="566928" y="1938528"/>
+            <a:ext cx="4114800" cy="256032"/>
+          </a:xfrm>
+          <a:prstGeom prst="rect">
+            <a:avLst/>
+          </a:prstGeom>
+          <a:noFill/>
+          <a:ln/>
+        </p:spPr>
+        <p:txBody>
+          <a:bodyPr wrap="square" lIns="0" tIns="0" rIns="0" bIns="0" rtlCol="0" anchor="ctr"/>
+          <a:lstStyle/>
+          <a:p>
+            <a:pPr indent="0" marL="0">
+              <a:buNone/>
+            </a:pPr>
+            <a:r>
+              <a:rPr lang="en-US" sz="1300" b="1" dirty="0">
+                <a:solidFill>
+                  <a:srgbClr val="0B5A72"/>
+                </a:solidFill>
+                <a:latin typeface="맑은 고딕" pitchFamily="34" charset="0"/>
+                <a:ea typeface="맑은 고딕" pitchFamily="34" charset="-122"/>
+                <a:cs typeface="맑은 고딕" pitchFamily="34" charset="-120"/>
+              </a:rPr>
+              <a:t>화면에 쓰는 세 가지 표시</a:t>
+            </a:r>
+            <a:endParaRPr lang="en-US" sz="1300" dirty="0"/>
+          </a:p>
+        </p:txBody>
+      </p:sp>
+      <p:sp>
+        <p:nvSpPr>
+          <p:cNvPr id="5" name="Shape 3"/>
+          <p:cNvSpPr/>
+          <p:nvPr/>
+        </p:nvSpPr>
+        <p:spPr>
+          <a:xfrm>
+            <a:off x="566928" y="2286000"/>
             <a:ext cx="4114800" cy="713232"/>
           </a:xfrm>
           <a:prstGeom prst="roundRect">
@@ -5569,13 +5078,13 @@
       </p:sp>
       <p:sp>
         <p:nvSpPr>
-          <p:cNvPr id="5" name="Text 3"/>
-          <p:cNvSpPr/>
-          <p:nvPr/>
-        </p:nvSpPr>
-        <p:spPr>
-          <a:xfrm>
-            <a:off x="768096" y="2322576"/>
+          <p:cNvPr id="6" name="Text 4"/>
+          <p:cNvSpPr/>
+          <p:nvPr/>
+        </p:nvSpPr>
+        <p:spPr>
+          <a:xfrm>
+            <a:off x="768096" y="2359152"/>
             <a:ext cx="3749040" cy="274320"/>
           </a:xfrm>
           <a:prstGeom prst="rect">
@@ -5608,13 +5117,13 @@
       </p:sp>
       <p:sp>
         <p:nvSpPr>
-          <p:cNvPr id="6" name="Text 4"/>
-          <p:cNvSpPr/>
-          <p:nvPr/>
-        </p:nvSpPr>
-        <p:spPr>
-          <a:xfrm>
-            <a:off x="768096" y="2615184"/>
+          <p:cNvPr id="7" name="Text 5"/>
+          <p:cNvSpPr/>
+          <p:nvPr/>
+        </p:nvSpPr>
+        <p:spPr>
+          <a:xfrm>
+            <a:off x="768096" y="2651760"/>
             <a:ext cx="3749040" cy="256032"/>
           </a:xfrm>
           <a:prstGeom prst="rect">
@@ -5647,13 +5156,13 @@
       </p:sp>
       <p:sp>
         <p:nvSpPr>
-          <p:cNvPr id="7" name="Shape 5"/>
-          <p:cNvSpPr/>
-          <p:nvPr/>
-        </p:nvSpPr>
-        <p:spPr>
-          <a:xfrm>
-            <a:off x="566928" y="3127248"/>
+          <p:cNvPr id="8" name="Shape 6"/>
+          <p:cNvSpPr/>
+          <p:nvPr/>
+        </p:nvSpPr>
+        <p:spPr>
+          <a:xfrm>
+            <a:off x="566928" y="3163824"/>
             <a:ext cx="4114800" cy="713232"/>
           </a:xfrm>
           <a:prstGeom prst="roundRect">
@@ -5674,13 +5183,13 @@
       </p:sp>
       <p:sp>
         <p:nvSpPr>
-          <p:cNvPr id="8" name="Text 6"/>
-          <p:cNvSpPr/>
-          <p:nvPr/>
-        </p:nvSpPr>
-        <p:spPr>
-          <a:xfrm>
-            <a:off x="768096" y="3200400"/>
+          <p:cNvPr id="9" name="Text 7"/>
+          <p:cNvSpPr/>
+          <p:nvPr/>
+        </p:nvSpPr>
+        <p:spPr>
+          <a:xfrm>
+            <a:off x="768096" y="3236976"/>
             <a:ext cx="3749040" cy="274320"/>
           </a:xfrm>
           <a:prstGeom prst="rect">
@@ -5713,13 +5222,13 @@
       </p:sp>
       <p:sp>
         <p:nvSpPr>
-          <p:cNvPr id="9" name="Text 7"/>
-          <p:cNvSpPr/>
-          <p:nvPr/>
-        </p:nvSpPr>
-        <p:spPr>
-          <a:xfrm>
-            <a:off x="768096" y="3493008"/>
+          <p:cNvPr id="10" name="Text 8"/>
+          <p:cNvSpPr/>
+          <p:nvPr/>
+        </p:nvSpPr>
+        <p:spPr>
+          <a:xfrm>
+            <a:off x="768096" y="3529584"/>
             <a:ext cx="3749040" cy="256032"/>
           </a:xfrm>
           <a:prstGeom prst="rect">
@@ -5752,13 +5261,13 @@
       </p:sp>
       <p:sp>
         <p:nvSpPr>
-          <p:cNvPr id="10" name="Shape 8"/>
-          <p:cNvSpPr/>
-          <p:nvPr/>
-        </p:nvSpPr>
-        <p:spPr>
-          <a:xfrm>
-            <a:off x="566928" y="4005072"/>
+          <p:cNvPr id="11" name="Shape 9"/>
+          <p:cNvSpPr/>
+          <p:nvPr/>
+        </p:nvSpPr>
+        <p:spPr>
+          <a:xfrm>
+            <a:off x="566928" y="4041648"/>
             <a:ext cx="4114800" cy="713232"/>
           </a:xfrm>
           <a:prstGeom prst="roundRect">
@@ -5779,13 +5288,13 @@
       </p:sp>
       <p:sp>
         <p:nvSpPr>
-          <p:cNvPr id="11" name="Text 9"/>
-          <p:cNvSpPr/>
-          <p:nvPr/>
-        </p:nvSpPr>
-        <p:spPr>
-          <a:xfrm>
-            <a:off x="768096" y="4078224"/>
+          <p:cNvPr id="12" name="Text 10"/>
+          <p:cNvSpPr/>
+          <p:nvPr/>
+        </p:nvSpPr>
+        <p:spPr>
+          <a:xfrm>
+            <a:off x="768096" y="4114800"/>
             <a:ext cx="3749040" cy="274320"/>
           </a:xfrm>
           <a:prstGeom prst="rect">
@@ -5818,13 +5327,13 @@
       </p:sp>
       <p:sp>
         <p:nvSpPr>
-          <p:cNvPr id="12" name="Text 10"/>
-          <p:cNvSpPr/>
-          <p:nvPr/>
-        </p:nvSpPr>
-        <p:spPr>
-          <a:xfrm>
-            <a:off x="768096" y="4370832"/>
+          <p:cNvPr id="13" name="Text 11"/>
+          <p:cNvSpPr/>
+          <p:nvPr/>
+        </p:nvSpPr>
+        <p:spPr>
+          <a:xfrm>
+            <a:off x="768096" y="4407408"/>
             <a:ext cx="3749040" cy="256032"/>
           </a:xfrm>
           <a:prstGeom prst="rect">
@@ -5857,7 +5366,7 @@
       </p:sp>
       <p:pic>
         <p:nvPicPr>
-          <p:cNvPr id="13" name="Image 0" descr="D:/Projects/batboda/발표/캡처/20260805_C04b_상태_기준시각.png">    </p:cNvPr>
+          <p:cNvPr id="14" name="Image 0" descr="D:/Projects/batboda/발표/캡처/20260805_C04b_상태_기준시각.png">    </p:cNvPr>
           <p:cNvPicPr>
             <a:picLocks noChangeAspect="1"/>
           </p:cNvPicPr>
@@ -5865,13 +5374,14 @@
         </p:nvPicPr>
         <p:blipFill>
           <a:blip r:embed="rId1"/>
-          <a:srcRect l="0" r="0" t="0" b="0"/>
-          <a:stretch/>
+          <a:stretch>
+            <a:fillRect/>
+          </a:stretch>
         </p:blipFill>
         <p:spPr>
           <a:xfrm>
-            <a:off x="4974336" y="2249424"/>
-            <a:ext cx="6656832" cy="2542032"/>
+            <a:off x="4901184" y="1956958"/>
+            <a:ext cx="3017520" cy="4132804"/>
           </a:xfrm>
           <a:prstGeom prst="rect">
             <a:avLst/>
@@ -5880,18 +5390,18 @@
       </p:pic>
       <p:sp>
         <p:nvSpPr>
-          <p:cNvPr id="14" name="Shape 11"/>
-          <p:cNvSpPr/>
-          <p:nvPr/>
-        </p:nvSpPr>
-        <p:spPr>
-          <a:xfrm>
-            <a:off x="4974336" y="4956048"/>
-            <a:ext cx="6656832" cy="1280160"/>
+          <p:cNvPr id="15" name="Shape 12"/>
+          <p:cNvSpPr/>
+          <p:nvPr/>
+        </p:nvSpPr>
+        <p:spPr>
+          <a:xfrm>
+            <a:off x="8101584" y="1938528"/>
+            <a:ext cx="3529584" cy="1883664"/>
           </a:xfrm>
           <a:prstGeom prst="roundRect">
             <a:avLst>
-              <a:gd name="adj" fmla="val 4286"/>
+              <a:gd name="adj" fmla="val 2913"/>
             </a:avLst>
           </a:prstGeom>
           <a:solidFill>
@@ -5907,26 +5417,29 @@
       </p:sp>
       <p:sp>
         <p:nvSpPr>
-          <p:cNvPr id="15" name="Text 12"/>
-          <p:cNvSpPr/>
-          <p:nvPr/>
-        </p:nvSpPr>
-        <p:spPr>
-          <a:xfrm>
-            <a:off x="5175504" y="5084064"/>
-            <a:ext cx="6254496" cy="274320"/>
-          </a:xfrm>
-          <a:prstGeom prst="rect">
-            <a:avLst/>
-          </a:prstGeom>
-          <a:noFill/>
-          <a:ln/>
-        </p:spPr>
-        <p:txBody>
-          <a:bodyPr wrap="square" lIns="0" tIns="0" rIns="0" bIns="0" rtlCol="0" anchor="ctr"/>
+          <p:cNvPr id="16" name="Text 13"/>
+          <p:cNvSpPr/>
+          <p:nvPr/>
+        </p:nvSpPr>
+        <p:spPr>
+          <a:xfrm>
+            <a:off x="8284464" y="2066544"/>
+            <a:ext cx="3163824" cy="640080"/>
+          </a:xfrm>
+          <a:prstGeom prst="rect">
+            <a:avLst/>
+          </a:prstGeom>
+          <a:noFill/>
+          <a:ln/>
+        </p:spPr>
+        <p:txBody>
+          <a:bodyPr wrap="square" lIns="0" tIns="0" rIns="0" bIns="0" rtlCol="0" anchor="t"/>
           <a:lstStyle/>
           <a:p>
             <a:pPr indent="0" marL="0">
+              <a:lnSpc>
+                <a:spcPct val="120000"/>
+              </a:lnSpc>
               <a:buNone/>
             </a:pPr>
             <a:r>
@@ -5938,22 +5451,42 @@
                 <a:ea typeface="맑은 고딕" pitchFamily="34" charset="-122"/>
                 <a:cs typeface="맑은 고딕" pitchFamily="34" charset="-120"/>
               </a:rPr>
-              <a:t>2026-08-03 · 공공데이터 인증이 실제로 막혔습니다 (HTTP 401)</a:t>
+              <a:t>2026-08-03</a:t>
             </a:r>
             <a:endParaRPr lang="en-US" sz="1400" dirty="0"/>
           </a:p>
-        </p:txBody>
-      </p:sp>
-      <p:sp>
-        <p:nvSpPr>
-          <p:cNvPr id="16" name="Text 13"/>
-          <p:cNvSpPr/>
-          <p:nvPr/>
-        </p:nvSpPr>
-        <p:spPr>
-          <a:xfrm>
-            <a:off x="5175504" y="5394960"/>
-            <a:ext cx="6254496" cy="694944"/>
+          <a:p>
+            <a:pPr indent="0" marL="0">
+              <a:lnSpc>
+                <a:spcPct val="120000"/>
+              </a:lnSpc>
+              <a:buNone/>
+            </a:pPr>
+            <a:r>
+              <a:rPr lang="en-US" sz="1400" b="1" dirty="0">
+                <a:solidFill>
+                  <a:srgbClr val="14181A"/>
+                </a:solidFill>
+                <a:latin typeface="맑은 고딕" pitchFamily="34" charset="0"/>
+                <a:ea typeface="맑은 고딕" pitchFamily="34" charset="-122"/>
+                <a:cs typeface="맑은 고딕" pitchFamily="34" charset="-120"/>
+              </a:rPr>
+              <a:t>공공데이터 인증이 실제로 막혔습니다 (HTTP 401)</a:t>
+            </a:r>
+            <a:endParaRPr lang="en-US" sz="1400" dirty="0"/>
+          </a:p>
+        </p:txBody>
+      </p:sp>
+      <p:sp>
+        <p:nvSpPr>
+          <p:cNvPr id="17" name="Text 14"/>
+          <p:cNvSpPr/>
+          <p:nvPr/>
+        </p:nvSpPr>
+        <p:spPr>
+          <a:xfrm>
+            <a:off x="8284464" y="2779776"/>
+            <a:ext cx="3163824" cy="914400"/>
           </a:xfrm>
           <a:prstGeom prst="rect">
             <a:avLst/>
@@ -5988,7 +5521,49 @@
       </p:sp>
       <p:sp>
         <p:nvSpPr>
-          <p:cNvPr id="17" name="Text 14"/>
+          <p:cNvPr id="18" name="Text 15"/>
+          <p:cNvSpPr/>
+          <p:nvPr/>
+        </p:nvSpPr>
+        <p:spPr>
+          <a:xfrm>
+            <a:off x="8101584" y="4023360"/>
+            <a:ext cx="3529584" cy="548640"/>
+          </a:xfrm>
+          <a:prstGeom prst="rect">
+            <a:avLst/>
+          </a:prstGeom>
+          <a:noFill/>
+          <a:ln/>
+        </p:spPr>
+        <p:txBody>
+          <a:bodyPr wrap="square" lIns="0" tIns="0" rIns="0" bIns="0" rtlCol="0" anchor="t"/>
+          <a:lstStyle/>
+          <a:p>
+            <a:pPr indent="0" marL="0">
+              <a:lnSpc>
+                <a:spcPct val="125000"/>
+              </a:lnSpc>
+              <a:buNone/>
+            </a:pPr>
+            <a:r>
+              <a:rPr lang="en-US" sz="1350" b="1" dirty="0">
+                <a:solidFill>
+                  <a:srgbClr val="0B5A72"/>
+                </a:solidFill>
+                <a:latin typeface="맑은 고딕" pitchFamily="34" charset="0"/>
+                <a:ea typeface="맑은 고딕" pitchFamily="34" charset="-122"/>
+                <a:cs typeface="맑은 고딕" pitchFamily="34" charset="-120"/>
+              </a:rPr>
+              <a:t>실패한 소스만 대체하고, 나머지는 실시간을 그대로 씁니다.</a:t>
+            </a:r>
+            <a:endParaRPr lang="en-US" sz="1350" dirty="0"/>
+          </a:p>
+        </p:txBody>
+      </p:sp>
+      <p:sp>
+        <p:nvSpPr>
+          <p:cNvPr id="19" name="Text 16"/>
           <p:cNvSpPr/>
           <p:nvPr/>
         </p:nvSpPr>
@@ -6424,13 +5999,14 @@
         </p:nvPicPr>
         <p:blipFill>
           <a:blip r:embed="rId1"/>
-          <a:srcRect l="0" r="0" t="0" b="0"/>
-          <a:stretch/>
+          <a:stretch>
+            <a:fillRect/>
+          </a:stretch>
         </p:blipFill>
         <p:spPr>
           <a:xfrm>
-            <a:off x="5175504" y="2212848"/>
-            <a:ext cx="6455664" cy="2377440"/>
+            <a:off x="5175504" y="2907731"/>
+            <a:ext cx="6455664" cy="987674"/>
           </a:xfrm>
           <a:prstGeom prst="rect">
             <a:avLst/>
@@ -7205,13 +6781,14 @@
         </p:nvPicPr>
         <p:blipFill>
           <a:blip r:embed="rId1"/>
-          <a:srcRect l="0" r="0" t="0" b="0"/>
-          <a:stretch/>
+          <a:stretch>
+            <a:fillRect/>
+          </a:stretch>
         </p:blipFill>
         <p:spPr>
           <a:xfrm>
-            <a:off x="7461504" y="2157984"/>
-            <a:ext cx="4169664" cy="1572768"/>
+            <a:off x="7461504" y="2597970"/>
+            <a:ext cx="4169664" cy="692796"/>
           </a:xfrm>
           <a:prstGeom prst="rect">
             <a:avLst/>
@@ -7228,13 +6805,14 @@
         </p:nvPicPr>
         <p:blipFill>
           <a:blip r:embed="rId2"/>
-          <a:srcRect l="0" r="0" t="0" b="0"/>
-          <a:stretch/>
+          <a:stretch>
+            <a:fillRect/>
+          </a:stretch>
         </p:blipFill>
         <p:spPr>
           <a:xfrm>
-            <a:off x="7461504" y="3858768"/>
-            <a:ext cx="4169664" cy="1810512"/>
+            <a:off x="7461504" y="3882475"/>
+            <a:ext cx="4169664" cy="1763099"/>
           </a:xfrm>
           <a:prstGeom prst="rect">
             <a:avLst/>

--- a/발표/20260805_밭보다_본선발표_v2.pptx
+++ b/발표/20260805_밭보다_본선발표_v2.pptx
@@ -4,6 +4,9 @@
   <p:sldMasterIdLst>
     <p:sldMasterId id="2147483648" r:id="rId1"/>
   </p:sldMasterIdLst>
+  <p:notesMasterIdLst>
+    <p:notesMasterId r:id="rId12"/>
+  </p:notesMasterIdLst>
   <p:sldIdLst>
     <p:sldId id="256" r:id="rId2"/>
     <p:sldId id="257" r:id="rId3"/>
@@ -16,9 +19,6 @@
     <p:sldId id="264" r:id="rId10"/>
     <p:sldId id="265" r:id="rId11"/>
   </p:sldIdLst>
-  <p:notesMasterIdLst>
-    <p:notesMasterId r:id="rId12"/>
-  </p:notesMasterIdLst>
   <p:sldSz cx="12192000" cy="6858000"/>
   <p:notesSz cx="6858000" cy="12192000"/>
   <p:defaultTextStyle>
@@ -113,6 +113,11 @@
       </a:defRPr>
     </a:lvl9pPr>
   </p:defaultTextStyle>
+  <p:extLst>
+    <p:ext uri="{EFAFB233-063F-42B5-8137-9DF3F51BA10A}">
+      <p15:sldGuideLst xmlns:p15="http://schemas.microsoft.com/office/powerpoint/2012/main"/>
+    </p:ext>
+  </p:extLst>
 </p:presentation>
 </file>
 
@@ -138,240 +143,16 @@
           <a:chExt cx="0" cy="0"/>
         </a:xfrm>
       </p:grpSpPr>
-      <p:sp>
-        <p:nvSpPr>
-          <p:cNvPr id="2" name="Header Placeholder 1"/>
-          <p:cNvSpPr>
-            <a:spLocks noGrp="1"/>
-          </p:cNvSpPr>
-          <p:nvPr>
-            <p:ph type="hdr" sz="quarter"/>
-          </p:nvPr>
-        </p:nvSpPr>
-        <p:spPr>
-          <a:xfrm>
-            <a:off x="0" y="0"/>
-            <a:ext cx="2971800" cy="458788"/>
-          </a:xfrm>
-          <a:prstGeom prst="rect">
-            <a:avLst/>
-          </a:prstGeom>
-        </p:spPr>
-        <p:txBody>
-          <a:bodyPr vert="horz" lIns="91440" tIns="45720" rIns="91440" bIns="45720" rtlCol="0"/>
-          <a:lstStyle>
-            <a:lvl1pPr algn="l">
-              <a:defRPr sz="1200"/>
-            </a:lvl1pPr>
-          </a:lstStyle>
-          <a:p>
-            <a:endParaRPr lang="en-US"/>
-          </a:p>
-        </p:txBody>
-      </p:sp>
-      <p:sp>
-        <p:nvSpPr>
-          <p:cNvPr id="3" name="Date Placeholder 2"/>
-          <p:cNvSpPr>
-            <a:spLocks noGrp="1"/>
-          </p:cNvSpPr>
-          <p:nvPr>
-            <p:ph type="dt" idx="1"/>
-          </p:nvPr>
-        </p:nvSpPr>
-        <p:spPr>
-          <a:xfrm>
-            <a:off x="3884613" y="0"/>
-            <a:ext cx="2971800" cy="458788"/>
-          </a:xfrm>
-          <a:prstGeom prst="rect">
-            <a:avLst/>
-          </a:prstGeom>
-        </p:spPr>
-        <p:txBody>
-          <a:bodyPr vert="horz" lIns="91440" tIns="45720" rIns="91440" bIns="45720" rtlCol="0"/>
-          <a:lstStyle>
-            <a:lvl1pPr algn="r">
-              <a:defRPr sz="1200"/>
-            </a:lvl1pPr>
-          </a:lstStyle>
-          <a:p>
-            <a:fld id="{5282F153-3F37-0F45-9E97-73ACFA13230C}" type="datetimeFigureOut">
-              <a:rPr lang="en-US"/>
-              <a:t>7/23/19</a:t>
-            </a:fld>
-            <a:endParaRPr lang="en-US"/>
-          </a:p>
-        </p:txBody>
-      </p:sp>
-      <p:sp>
-        <p:nvSpPr>
-          <p:cNvPr id="4" name="Slide Image Placeholder 3"/>
-          <p:cNvSpPr>
-            <a:spLocks noGrp="1" noRot="1" noChangeAspect="1"/>
-          </p:cNvSpPr>
-          <p:nvPr>
-            <p:ph type="sldImg" idx="2"/>
-          </p:nvPr>
-        </p:nvSpPr>
-        <p:spPr>
-          <a:xfrm>
-            <a:off x="685800" y="1143000"/>
-            <a:ext cx="5486400" cy="3086100"/>
-          </a:xfrm>
-          <a:prstGeom prst="rect">
-            <a:avLst/>
-          </a:prstGeom>
-          <a:noFill/>
-          <a:ln w="12700">
-            <a:solidFill>
-              <a:prstClr val="black"/>
-            </a:solidFill>
-          </a:ln>
-        </p:spPr>
-        <p:txBody>
-          <a:bodyPr vert="horz" lIns="91440" tIns="45720" rIns="91440" bIns="45720" rtlCol="0" anchor="ctr"/>
-          <a:lstStyle/>
-          <a:p>
-            <a:endParaRPr lang="en-US"/>
-          </a:p>
-        </p:txBody>
-      </p:sp>
-      <p:sp>
-        <p:nvSpPr>
-          <p:cNvPr id="5" name="Notes Placeholder 4"/>
-          <p:cNvSpPr>
-            <a:spLocks noGrp="1"/>
-          </p:cNvSpPr>
-          <p:nvPr>
-            <p:ph type="body" sz="quarter" idx="3"/>
-          </p:nvPr>
-        </p:nvSpPr>
-        <p:spPr>
-          <a:xfrm>
-            <a:off x="685800" y="4400550"/>
-            <a:ext cx="5486400" cy="3600450"/>
-          </a:xfrm>
-          <a:prstGeom prst="rect">
-            <a:avLst/>
-          </a:prstGeom>
-        </p:spPr>
-        <p:txBody>
-          <a:bodyPr vert="horz" lIns="91440" tIns="45720" rIns="91440" bIns="45720" rtlCol="0"/>
-          <a:lstStyle/>
-          <a:p>
-            <a:pPr lvl="0"/>
-            <a:r>
-              <a:rPr lang="en-US"/>
-              <a:t>Click to edit Master text styles</a:t>
-            </a:r>
-          </a:p>
-          <a:p>
-            <a:pPr lvl="1"/>
-            <a:r>
-              <a:rPr lang="en-US"/>
-              <a:t>Second level</a:t>
-            </a:r>
-          </a:p>
-          <a:p>
-            <a:pPr lvl="2"/>
-            <a:r>
-              <a:rPr lang="en-US"/>
-              <a:t>Third level</a:t>
-            </a:r>
-          </a:p>
-          <a:p>
-            <a:pPr lvl="3"/>
-            <a:r>
-              <a:rPr lang="en-US"/>
-              <a:t>Fourth level</a:t>
-            </a:r>
-          </a:p>
-          <a:p>
-            <a:pPr lvl="4"/>
-            <a:r>
-              <a:rPr lang="en-US"/>
-              <a:t>Fifth level</a:t>
-            </a:r>
-          </a:p>
-        </p:txBody>
-      </p:sp>
-      <p:sp>
-        <p:nvSpPr>
-          <p:cNvPr id="6" name="Footer Placeholder 5"/>
-          <p:cNvSpPr>
-            <a:spLocks noGrp="1"/>
-          </p:cNvSpPr>
-          <p:nvPr>
-            <p:ph type="ftr" sz="quarter" idx="4"/>
-          </p:nvPr>
-        </p:nvSpPr>
-        <p:spPr>
-          <a:xfrm>
-            <a:off x="0" y="8685213"/>
-            <a:ext cx="2971800" cy="458787"/>
-          </a:xfrm>
-          <a:prstGeom prst="rect">
-            <a:avLst/>
-          </a:prstGeom>
-        </p:spPr>
-        <p:txBody>
-          <a:bodyPr vert="horz" lIns="91440" tIns="45720" rIns="91440" bIns="45720" rtlCol="0" anchor="b"/>
-          <a:lstStyle>
-            <a:lvl1pPr algn="l">
-              <a:defRPr sz="1200"/>
-            </a:lvl1pPr>
-          </a:lstStyle>
-          <a:p>
-            <a:endParaRPr lang="en-US"/>
-          </a:p>
-        </p:txBody>
-      </p:sp>
-      <p:sp>
-        <p:nvSpPr>
-          <p:cNvPr id="7" name="Slide Number Placeholder 6"/>
-          <p:cNvSpPr>
-            <a:spLocks noGrp="1"/>
-          </p:cNvSpPr>
-          <p:nvPr>
-            <p:ph type="sldNum" sz="quarter" idx="5"/>
-          </p:nvPr>
-        </p:nvSpPr>
-        <p:spPr>
-          <a:xfrm>
-            <a:off x="3884613" y="8685213"/>
-            <a:ext cx="2971800" cy="458787"/>
-          </a:xfrm>
-          <a:prstGeom prst="rect">
-            <a:avLst/>
-          </a:prstGeom>
-        </p:spPr>
-        <p:txBody>
-          <a:bodyPr vert="horz" lIns="91440" tIns="45720" rIns="91440" bIns="45720" rtlCol="0" anchor="b"/>
-          <a:lstStyle>
-            <a:lvl1pPr algn="r">
-              <a:defRPr sz="1200"/>
-            </a:lvl1pPr>
-          </a:lstStyle>
-          <a:p>
-            <a:fld id="{CE5E9CC1-C706-0F49-92D6-E571CC5EEA8F}" type="slidenum">
-              <a:rPr lang="en-US"/>
-              <a:t>‹#›</a:t>
-            </a:fld>
-            <a:endParaRPr lang="en-US"/>
-          </a:p>
-        </p:txBody>
-      </p:sp>
     </p:spTree>
     <p:extLst>
       <p:ext uri="{BB962C8B-B14F-4D97-AF65-F5344CB8AC3E}">
-        <p14:creationId xmlns:p14="http://schemas.microsoft.com/office/powerpoint/2010/main" val="1024086991"/>
+        <p14:creationId xmlns:p14="http://schemas.microsoft.com/office/powerpoint/2010/main" val="690722410"/>
       </p:ext>
     </p:extLst>
   </p:cSld>
   <p:clrMap bg1="lt1" tx1="dk1" bg2="lt2" tx2="dk2" accent1="accent1" accent2="accent2" accent3="accent3" accent4="accent4" accent5="accent5" accent6="accent6" hlink="hlink" folHlink="folHlink"/>
   <p:notesStyle>
-    <a:lvl1pPr marL="0" algn="l" defTabSz="914400" rtl="0" eaLnBrk="1" latinLnBrk="0" hangingPunct="1">
+    <a:lvl1pPr marL="0" algn="l" defTabSz="914400" rtl="0" eaLnBrk="1" latinLnBrk="1" hangingPunct="1">
       <a:defRPr sz="1200" kern="1200">
         <a:solidFill>
           <a:schemeClr val="tx1"/>
@@ -381,7 +162,7 @@
         <a:cs typeface="+mn-cs"/>
       </a:defRPr>
     </a:lvl1pPr>
-    <a:lvl2pPr marL="457200" algn="l" defTabSz="914400" rtl="0" eaLnBrk="1" latinLnBrk="0" hangingPunct="1">
+    <a:lvl2pPr marL="457200" algn="l" defTabSz="914400" rtl="0" eaLnBrk="1" latinLnBrk="1" hangingPunct="1">
       <a:defRPr sz="1200" kern="1200">
         <a:solidFill>
           <a:schemeClr val="tx1"/>
@@ -391,7 +172,7 @@
         <a:cs typeface="+mn-cs"/>
       </a:defRPr>
     </a:lvl2pPr>
-    <a:lvl3pPr marL="914400" algn="l" defTabSz="914400" rtl="0" eaLnBrk="1" latinLnBrk="0" hangingPunct="1">
+    <a:lvl3pPr marL="914400" algn="l" defTabSz="914400" rtl="0" eaLnBrk="1" latinLnBrk="1" hangingPunct="1">
       <a:defRPr sz="1200" kern="1200">
         <a:solidFill>
           <a:schemeClr val="tx1"/>
@@ -401,7 +182,7 @@
         <a:cs typeface="+mn-cs"/>
       </a:defRPr>
     </a:lvl3pPr>
-    <a:lvl4pPr marL="1371600" algn="l" defTabSz="914400" rtl="0" eaLnBrk="1" latinLnBrk="0" hangingPunct="1">
+    <a:lvl4pPr marL="1371600" algn="l" defTabSz="914400" rtl="0" eaLnBrk="1" latinLnBrk="1" hangingPunct="1">
       <a:defRPr sz="1200" kern="1200">
         <a:solidFill>
           <a:schemeClr val="tx1"/>
@@ -411,7 +192,7 @@
         <a:cs typeface="+mn-cs"/>
       </a:defRPr>
     </a:lvl4pPr>
-    <a:lvl5pPr marL="1828800" algn="l" defTabSz="914400" rtl="0" eaLnBrk="1" latinLnBrk="0" hangingPunct="1">
+    <a:lvl5pPr marL="1828800" algn="l" defTabSz="914400" rtl="0" eaLnBrk="1" latinLnBrk="1" hangingPunct="1">
       <a:defRPr sz="1200" kern="1200">
         <a:solidFill>
           <a:schemeClr val="tx1"/>
@@ -421,7 +202,7 @@
         <a:cs typeface="+mn-cs"/>
       </a:defRPr>
     </a:lvl5pPr>
-    <a:lvl6pPr marL="2286000" algn="l" defTabSz="914400" rtl="0" eaLnBrk="1" latinLnBrk="0" hangingPunct="1">
+    <a:lvl6pPr marL="2286000" algn="l" defTabSz="914400" rtl="0" eaLnBrk="1" latinLnBrk="1" hangingPunct="1">
       <a:defRPr sz="1200" kern="1200">
         <a:solidFill>
           <a:schemeClr val="tx1"/>
@@ -431,7 +212,7 @@
         <a:cs typeface="+mn-cs"/>
       </a:defRPr>
     </a:lvl6pPr>
-    <a:lvl7pPr marL="2743200" algn="l" defTabSz="914400" rtl="0" eaLnBrk="1" latinLnBrk="0" hangingPunct="1">
+    <a:lvl7pPr marL="2743200" algn="l" defTabSz="914400" rtl="0" eaLnBrk="1" latinLnBrk="1" hangingPunct="1">
       <a:defRPr sz="1200" kern="1200">
         <a:solidFill>
           <a:schemeClr val="tx1"/>
@@ -441,7 +222,7 @@
         <a:cs typeface="+mn-cs"/>
       </a:defRPr>
     </a:lvl7pPr>
-    <a:lvl8pPr marL="3200400" algn="l" defTabSz="914400" rtl="0" eaLnBrk="1" latinLnBrk="0" hangingPunct="1">
+    <a:lvl8pPr marL="3200400" algn="l" defTabSz="914400" rtl="0" eaLnBrk="1" latinLnBrk="1" hangingPunct="1">
       <a:defRPr sz="1200" kern="1200">
         <a:solidFill>
           <a:schemeClr val="tx1"/>
@@ -451,7 +232,7 @@
         <a:cs typeface="+mn-cs"/>
       </a:defRPr>
     </a:lvl8pPr>
-    <a:lvl9pPr marL="3657600" algn="l" defTabSz="914400" rtl="0" eaLnBrk="1" latinLnBrk="0" hangingPunct="1">
+    <a:lvl9pPr marL="3657600" algn="l" defTabSz="914400" rtl="0" eaLnBrk="1" latinLnBrk="1" hangingPunct="1">
       <a:defRPr sz="1200" kern="1200">
         <a:solidFill>
           <a:schemeClr val="tx1"/>
@@ -515,7 +296,6 @@
 내 땅에 이 작물을 심어도 될까. 밭보다는 좌표가 아니라 농지 경계를 먼저 확인합니다. 그 필지번호의 토양과 그 좌표의 예보를 작물별 공식 기준에 대조합니다.
 금지 — 팀 소개 길게, 귀농 인구·실패율 통계, 기관 로고, 기능 목록.</a:t>
             </a:r>
-            <a:endParaRPr lang="en-US" dirty="0"/>
           </a:p>
         </p:txBody>
       </p:sp>
@@ -606,7 +386,6 @@
 금지 — 새 기능·수치·로드맵, 감사 인사 전용 장, 팀 사진, 연락처.
 여기서 멈추고 질의응답으로 넘어간다. 답변은 대본 v3 5절 28문.</a:t>
             </a:r>
-            <a:endParaRPr lang="en-US" dirty="0"/>
           </a:p>
         </p:txBody>
       </p:sp>
@@ -696,7 +475,6 @@
 농지, 토양, 예보는 서로 다른 기관이 서로 다른 단위와 시각으로 냅니다. 초보자는 이 네 화면을 각각 찾아 자기 농지 값을 골라내고 작물 기준과 직접 대조해야 합니다.
 금지 — 「대부분의 서비스는 시·군 평균만 제공한다」, 기존 서비스 비교표, 다른 팀·기관 이름.</a:t>
             </a:r>
-            <a:endParaRPr lang="en-US" dirty="0"/>
           </a:p>
         </p:txBody>
       </p:sp>
@@ -787,7 +565,6 @@
 이 장이 비교 기준을 남기는 장이다. 발표 순서 1번이므로 심사위원이 뒤의 다섯 팀을 볼 때 쓸 낱말을 여기서 심는다.
 금지 — API 개수·아키텍처 도해, 「필지 단위 서비스는 밭보다뿐」, 제목 아래 추가 설명 문장.</a:t>
             </a:r>
-            <a:endParaRPr lang="en-US" dirty="0"/>
           </a:p>
         </p:txBody>
       </p:sp>
@@ -885,7 +662,6 @@
 ■ 고정 전환 문장(그대로 말한다) — “지금은 저장된 검증 장면으로 이어가며, 서비스에서는 실시간과 검증 스냅샷, 시연 자료를 구분해 표시합니다.”
 ■ 실패 원인을 설명하지 않는다. 위 문장을 말하고 이 장의 다섯 조각을 순서대로 넘긴다.</a:t>
             </a:r>
-            <a:endParaRPr lang="en-US" dirty="0"/>
           </a:p>
         </p:txBody>
       </p:sp>
@@ -976,7 +752,6 @@
 이 장이 무대에서 실물로 보일 수 있는 가장 강한 판정 논리 증거다.
 금지 — 필드 코드명, 등급 전수 표, 이 항목을 한계로 언급, 다른 서비스는 밭 등급만 쓴다는 추정.</a:t>
             </a:r>
-            <a:endParaRPr lang="en-US" dirty="0"/>
           </a:p>
         </p:txBody>
       </p:sp>
@@ -1067,7 +842,6 @@
 회귀 테스트 수치는 당일 아침 재실행 결과로 말한다.
 금지 — 「AI가 모든 숫자 오류를 차단한다」, 프롬프트 전문·검사 항목 나열, 모델 이름·버전 고정(화면 배지가 실제 모델을 표시한다), 560 시나리오를 정확도로 제시. 위험 라벨 변동(완화 60% · 보수 10%)은 질의응답에서만.</a:t>
             </a:r>
-            <a:endParaRPr lang="en-US" dirty="0"/>
           </a:p>
         </p:txBody>
       </p:sp>
@@ -1157,7 +931,6 @@
 운영에서 중요한 것은 잘 될 때가 아니라 안 될 때입니다. 실패한 소스만 대체하고 이유를 남깁니다. 8월 3일에 인증이 실제로 막혔을 때 이 경로로 판정까지 이어지는 것을 확인했습니다. 가정이 아니라 겪은 일입니다.
 금지 — 운영비 0원·운영 인력 없음, 지역 확대 건수, 발표장에서 장애를 라이브로 재현, 401 화면을 조작해 만든 캡처.</a:t>
             </a:r>
-            <a:endParaRPr lang="en-US" dirty="0"/>
           </a:p>
         </p:txBody>
       </p:sp>
@@ -1247,7 +1020,6 @@
 농지 계약 전, 작물을 바꿀 때, 파종 전에 다시 옵니다. 재방문율은 아직 측정하지 않았습니다. 유료 고객과 확정 가격도 없습니다. 귀농귀촌센터·농업기술센터·농협 상담 창구를 첫 실증 파트너로 제안하고, 반복 사용이 확인되면 기관용 연간 라이선스를 검토하겠습니다.
 「제안」과 「검토」를 반드시 말로도 붙인다. 금지 — 「센터가 매일 쓴다」, 기관 도입 확정, 시장 규모 수치, 라이선스 금액.</a:t>
             </a:r>
-            <a:endParaRPr lang="en-US" dirty="0"/>
           </a:p>
         </p:txBody>
       </p:sp>
@@ -1337,7 +1109,6 @@
 세 가지만 말씀드립니다. 대관령 표본의 토양 산도 조회는 258필지 중 18건, 7.0%였고 없는 값을 다른 농지에서 채우지 않습니다. 예보는 3일이고, 관측소는 6.45km 떨어져 점수에 넣지 않습니다. 현장 정확도는 아직 없습니다. 그래서 참고 판정으로 한정합니다.
 7.0%는 반드시 분모와 함께 말한다. 금지 — 한계 네 개 이상 나열(나머지는 질의응답), 과수·논 등급 미반영, 중기예보 구현 주장.</a:t>
             </a:r>
-            <a:endParaRPr lang="en-US" dirty="0"/>
           </a:p>
         </p:txBody>
       </p:sp>
@@ -1410,6 +1181,11 @@
 <file path=ppt/slideMasters/slideMaster1.xml><?xml version="1.0" encoding="utf-8"?>
 <p:sldMaster xmlns:a="http://schemas.openxmlformats.org/drawingml/2006/main" xmlns:r="http://schemas.openxmlformats.org/officeDocument/2006/relationships" xmlns:p="http://schemas.openxmlformats.org/presentationml/2006/main">
   <p:cSld>
+    <p:bg>
+      <p:bgRef idx="1001">
+        <a:schemeClr val="bg1"/>
+      </p:bgRef>
+    </p:bg>
     <p:spTree>
       <p:nvGrpSpPr>
         <p:cNvPr id="1" name=""/>
@@ -1692,6 +1468,7 @@
         <a:solidFill>
           <a:srgbClr val="10262E"/>
         </a:solidFill>
+        <a:effectLst/>
       </p:bgPr>
     </p:bg>
     <p:spTree>
@@ -1716,8 +1493,8 @@
         </p:nvSpPr>
         <p:spPr>
           <a:xfrm>
-            <a:off x="566928" y="566928"/>
-            <a:ext cx="6583680" cy="274320"/>
+            <a:off x="566927" y="566928"/>
+            <a:ext cx="9570413" cy="274320"/>
           </a:xfrm>
           <a:prstGeom prst="rect">
             <a:avLst/>
@@ -1729,11 +1506,11 @@
           <a:bodyPr wrap="square" lIns="0" tIns="0" rIns="0" bIns="0" rtlCol="0" anchor="ctr"/>
           <a:lstStyle/>
           <a:p>
-            <a:pPr indent="0" marL="0">
-              <a:buNone/>
-            </a:pPr>
-            <a:r>
-              <a:rPr lang="en-US" sz="1250" b="1" spc="100" kern="0" dirty="0">
+            <a:pPr marL="0" indent="0">
+              <a:buNone/>
+            </a:pPr>
+            <a:r>
+              <a:rPr lang="en-US" sz="2400" b="1" kern="0" spc="100" dirty="0">
                 <a:solidFill>
                   <a:srgbClr val="A7C0C8"/>
                 </a:solidFill>
@@ -1743,7 +1520,7 @@
               </a:rPr>
               <a:t>2026 지역산업 문제기반 AI 해커톤 본선 · 기업 문제 1</a:t>
             </a:r>
-            <a:endParaRPr lang="en-US" sz="1250" dirty="0"/>
+            <a:endParaRPr lang="en-US" sz="2400" dirty="0"/>
           </a:p>
         </p:txBody>
       </p:sp>
@@ -1768,7 +1545,7 @@
           <a:bodyPr wrap="square" lIns="0" tIns="0" rIns="0" bIns="0" rtlCol="0" anchor="t"/>
           <a:lstStyle/>
           <a:p>
-            <a:pPr indent="0" marL="0">
+            <a:pPr marL="0" indent="0">
               <a:lnSpc>
                 <a:spcPct val="118000"/>
               </a:lnSpc>
@@ -1788,7 +1565,7 @@
             <a:endParaRPr lang="en-US" sz="3100" dirty="0"/>
           </a:p>
           <a:p>
-            <a:pPr indent="0" marL="0">
+            <a:pPr marL="0" indent="0">
               <a:lnSpc>
                 <a:spcPct val="118000"/>
               </a:lnSpc>
@@ -1808,7 +1585,7 @@
             <a:endParaRPr lang="en-US" sz="3100" dirty="0"/>
           </a:p>
           <a:p>
-            <a:pPr indent="0" marL="0">
+            <a:pPr marL="0" indent="0">
               <a:lnSpc>
                 <a:spcPct val="118000"/>
               </a:lnSpc>
@@ -1837,8 +1614,8 @@
         </p:nvSpPr>
         <p:spPr>
           <a:xfrm>
-            <a:off x="566928" y="4224528"/>
-            <a:ext cx="1847088" cy="420624"/>
+            <a:off x="566928" y="3736541"/>
+            <a:ext cx="1847088" cy="908611"/>
           </a:xfrm>
           <a:prstGeom prst="roundRect">
             <a:avLst>
@@ -1855,6 +1632,13 @@
             <a:prstDash val="solid"/>
           </a:ln>
         </p:spPr>
+        <p:txBody>
+          <a:bodyPr/>
+          <a:lstStyle/>
+          <a:p>
+            <a:endParaRPr lang="ko-KR" altLang="en-US"/>
+          </a:p>
+        </p:txBody>
       </p:sp>
       <p:sp>
         <p:nvSpPr>
@@ -1864,8 +1648,8 @@
         </p:nvSpPr>
         <p:spPr>
           <a:xfrm>
-            <a:off x="566928" y="4224528"/>
-            <a:ext cx="1847088" cy="420624"/>
+            <a:off x="566928" y="3736541"/>
+            <a:ext cx="1847088" cy="908611"/>
           </a:xfrm>
           <a:prstGeom prst="rect">
             <a:avLst/>
@@ -1877,11 +1661,11 @@
           <a:bodyPr wrap="square" lIns="0" tIns="0" rIns="0" bIns="0" rtlCol="0" anchor="ctr"/>
           <a:lstStyle/>
           <a:p>
-            <a:pPr algn="ctr" indent="0" marL="0">
-              <a:buNone/>
-            </a:pPr>
-            <a:r>
-              <a:rPr lang="en-US" sz="1700" b="1" dirty="0">
+            <a:pPr marL="0" indent="0" algn="ctr">
+              <a:buNone/>
+            </a:pPr>
+            <a:r>
+              <a:rPr lang="en-US" sz="2800" b="1" dirty="0">
                 <a:solidFill>
                   <a:srgbClr val="FFFFFF"/>
                 </a:solidFill>
@@ -1891,7 +1675,7 @@
               </a:rPr>
               <a:t>밭보다</a:t>
             </a:r>
-            <a:endParaRPr lang="en-US" sz="1700" dirty="0"/>
+            <a:endParaRPr lang="en-US" sz="2800" dirty="0"/>
           </a:p>
         </p:txBody>
       </p:sp>
@@ -1903,7 +1687,7 @@
         </p:nvSpPr>
         <p:spPr>
           <a:xfrm>
-            <a:off x="2615184" y="4224528"/>
+            <a:off x="2615184" y="3980534"/>
             <a:ext cx="4114800" cy="420624"/>
           </a:xfrm>
           <a:prstGeom prst="rect">
@@ -1916,7 +1700,7 @@
           <a:bodyPr wrap="square" lIns="0" tIns="0" rIns="0" bIns="0" rtlCol="0" anchor="ctr"/>
           <a:lstStyle/>
           <a:p>
-            <a:pPr indent="0" marL="0">
+            <a:pPr marL="0" indent="0">
               <a:buNone/>
             </a:pPr>
             <a:r>
@@ -1955,11 +1739,11 @@
           <a:bodyPr wrap="square" lIns="0" tIns="0" rIns="0" bIns="0" rtlCol="0" anchor="ctr"/>
           <a:lstStyle/>
           <a:p>
-            <a:pPr indent="0" marL="0">
-              <a:buNone/>
-            </a:pPr>
-            <a:r>
-              <a:rPr lang="en-US" sz="1300" dirty="0">
+            <a:pPr marL="0" indent="0">
+              <a:buNone/>
+            </a:pPr>
+            <a:r>
+              <a:rPr lang="en-US" sz="1300" dirty="0" err="1">
                 <a:solidFill>
                   <a:srgbClr val="A7C0C8"/>
                 </a:solidFill>
@@ -1967,30 +1751,54 @@
                 <a:ea typeface="맑은 고딕" pitchFamily="34" charset="-122"/>
                 <a:cs typeface="맑은 고딕" pitchFamily="34" charset="-120"/>
               </a:rPr>
-              <a:t>김남궁택 · 남궁도현 · 김택명</a:t>
-            </a:r>
-            <a:endParaRPr lang="en-US" sz="1300" dirty="0"/>
+              <a:t>김남궁택</a:t>
+            </a:r>
+            <a:endParaRPr lang="en-US" sz="1300" dirty="0">
+              <a:solidFill>
+                <a:srgbClr val="A7C0C8"/>
+              </a:solidFill>
+              <a:latin typeface="맑은 고딕" pitchFamily="34" charset="0"/>
+              <a:ea typeface="맑은 고딕" pitchFamily="34" charset="-122"/>
+              <a:cs typeface="맑은 고딕" pitchFamily="34" charset="-120"/>
+            </a:endParaRPr>
+          </a:p>
+          <a:p>
+            <a:pPr marL="0" indent="0">
+              <a:buNone/>
+            </a:pPr>
+            <a:r>
+              <a:rPr lang="en-US" sz="1300" b="1" dirty="0">
+                <a:solidFill>
+                  <a:srgbClr val="A7C0C8"/>
+                </a:solidFill>
+                <a:latin typeface="맑은 고딕" pitchFamily="34" charset="0"/>
+                <a:ea typeface="맑은 고딕" pitchFamily="34" charset="-122"/>
+                <a:cs typeface="맑은 고딕" pitchFamily="34" charset="-120"/>
+              </a:rPr>
+              <a:t>남궁도현 · 김택명</a:t>
+            </a:r>
+            <a:endParaRPr lang="en-US" sz="1300" b="1" dirty="0"/>
           </a:p>
         </p:txBody>
       </p:sp>
       <p:pic>
         <p:nvPicPr>
-          <p:cNvPr id="8" name="Image 0" descr="D:/Projects/batboda/발표/캡처/20260805_C01_대관령85-61전_경계.png">    </p:cNvPr>
+          <p:cNvPr id="8" name="Image 0" descr="D:/Projects/batboda/발표/캡처/20260805_C01_대관령85-61전_경계.png"/>
           <p:cNvPicPr>
             <a:picLocks noChangeAspect="1"/>
           </p:cNvPicPr>
           <p:nvPr/>
         </p:nvPicPr>
         <p:blipFill>
-          <a:blip r:embed="rId1"/>
+          <a:blip r:embed="rId3"/>
           <a:stretch>
             <a:fillRect/>
           </a:stretch>
         </p:blipFill>
         <p:spPr>
           <a:xfrm>
-            <a:off x="7187184" y="2044226"/>
-            <a:ext cx="4434840" cy="2495229"/>
+            <a:off x="5889949" y="2283985"/>
+            <a:ext cx="5922849" cy="3332446"/>
           </a:xfrm>
           <a:prstGeom prst="rect">
             <a:avLst/>
@@ -2018,7 +1826,7 @@
           <a:bodyPr wrap="square" lIns="0" tIns="0" rIns="0" bIns="0" rtlCol="0" anchor="ctr"/>
           <a:lstStyle/>
           <a:p>
-            <a:pPr algn="r" indent="0" marL="0">
+            <a:pPr marL="0" indent="0" algn="r">
               <a:buNone/>
             </a:pPr>
             <a:r>
@@ -2052,6 +1860,7 @@
         <a:solidFill>
           <a:srgbClr val="10262E"/>
         </a:solidFill>
+        <a:effectLst/>
       </p:bgPr>
     </p:bg>
     <p:spTree>
@@ -2089,7 +1898,7 @@
           <a:bodyPr wrap="square" lIns="0" tIns="0" rIns="0" bIns="0" rtlCol="0" anchor="t"/>
           <a:lstStyle/>
           <a:p>
-            <a:pPr indent="0" marL="0">
+            <a:pPr marL="0" indent="0">
               <a:lnSpc>
                 <a:spcPct val="116000"/>
               </a:lnSpc>
@@ -2109,7 +1918,7 @@
             <a:endParaRPr lang="en-US" sz="3100" dirty="0"/>
           </a:p>
           <a:p>
-            <a:pPr indent="0" marL="0">
+            <a:pPr marL="0" indent="0">
               <a:lnSpc>
                 <a:spcPct val="116000"/>
               </a:lnSpc>
@@ -2156,6 +1965,13 @@
             <a:prstDash val="solid"/>
           </a:ln>
         </p:spPr>
+        <p:txBody>
+          <a:bodyPr/>
+          <a:lstStyle/>
+          <a:p>
+            <a:endParaRPr lang="ko-KR" altLang="en-US"/>
+          </a:p>
+        </p:txBody>
       </p:sp>
       <p:sp>
         <p:nvSpPr>
@@ -2178,7 +1994,7 @@
           <a:bodyPr wrap="square" lIns="0" tIns="0" rIns="0" bIns="0" rtlCol="0" anchor="ctr"/>
           <a:lstStyle/>
           <a:p>
-            <a:pPr algn="ctr" indent="0" marL="0">
+            <a:pPr marL="0" indent="0" algn="ctr">
               <a:buNone/>
             </a:pPr>
             <a:r>
@@ -2217,7 +2033,7 @@
           <a:bodyPr wrap="square" lIns="0" tIns="0" rIns="0" bIns="0" rtlCol="0" anchor="ctr"/>
           <a:lstStyle/>
           <a:p>
-            <a:pPr indent="0" marL="0">
+            <a:pPr marL="0" indent="0">
               <a:buNone/>
             </a:pPr>
             <a:r>
@@ -2256,7 +2072,7 @@
           <a:bodyPr wrap="square" lIns="0" tIns="0" rIns="0" bIns="0" rtlCol="0" anchor="ctr"/>
           <a:lstStyle/>
           <a:p>
-            <a:pPr indent="0" marL="0">
+            <a:pPr marL="0" indent="0">
               <a:buNone/>
             </a:pPr>
             <a:r>
@@ -2276,14 +2092,14 @@
       </p:sp>
       <p:pic>
         <p:nvPicPr>
-          <p:cNvPr id="7" name="Image 0" descr="D:/Projects/batboda/발표/캡처/20260805_C12_QR.png">    </p:cNvPr>
+          <p:cNvPr id="7" name="Image 0" descr="D:/Projects/batboda/발표/캡처/20260805_C12_QR.png"/>
           <p:cNvPicPr>
             <a:picLocks noChangeAspect="1"/>
           </p:cNvPicPr>
           <p:nvPr/>
         </p:nvPicPr>
         <p:blipFill>
-          <a:blip r:embed="rId1"/>
+          <a:blip r:embed="rId3"/>
           <a:stretch>
             <a:fillRect/>
           </a:stretch>
@@ -2300,22 +2116,22 @@
       </p:pic>
       <p:pic>
         <p:nvPicPr>
-          <p:cNvPr id="8" name="Image 1" descr="D:/Projects/batboda/발표/캡처/20260805_C01_대관령85-61전_경계.png">    </p:cNvPr>
+          <p:cNvPr id="8" name="Image 1" descr="D:/Projects/batboda/발표/캡처/20260805_C01_대관령85-61전_경계.png"/>
           <p:cNvPicPr>
             <a:picLocks noChangeAspect="1"/>
           </p:cNvPicPr>
           <p:nvPr/>
         </p:nvPicPr>
         <p:blipFill>
-          <a:blip r:embed="rId2"/>
+          <a:blip r:embed="rId4"/>
           <a:stretch>
             <a:fillRect/>
           </a:stretch>
         </p:blipFill>
         <p:spPr>
           <a:xfrm>
-            <a:off x="9528048" y="1941236"/>
-            <a:ext cx="2103120" cy="1183304"/>
+            <a:off x="5671233" y="3822795"/>
+            <a:ext cx="4874496" cy="2742597"/>
           </a:xfrm>
           <a:prstGeom prst="rect">
             <a:avLst/>
@@ -2343,7 +2159,7 @@
           <a:bodyPr wrap="square" lIns="0" tIns="0" rIns="0" bIns="0" rtlCol="0" anchor="ctr"/>
           <a:lstStyle/>
           <a:p>
-            <a:pPr algn="r" indent="0" marL="0">
+            <a:pPr marL="0" indent="0" algn="r">
               <a:buNone/>
             </a:pPr>
             <a:r>
@@ -2377,6 +2193,7 @@
         <a:solidFill>
           <a:srgbClr val="F7F9FA"/>
         </a:solidFill>
+        <a:effectLst/>
       </p:bgPr>
     </p:bg>
     <p:spTree>
@@ -2414,7 +2231,7 @@
           <a:bodyPr wrap="square" lIns="0" tIns="0" rIns="0" bIns="0" rtlCol="0" anchor="ctr"/>
           <a:lstStyle/>
           <a:p>
-            <a:pPr algn="r" indent="0" marL="0">
+            <a:pPr marL="0" indent="0" algn="r">
               <a:buNone/>
             </a:pPr>
             <a:r>
@@ -2453,7 +2270,7 @@
           <a:bodyPr wrap="square" lIns="0" tIns="0" rIns="0" bIns="0" rtlCol="0" anchor="t"/>
           <a:lstStyle/>
           <a:p>
-            <a:pPr indent="0" marL="0">
+            <a:pPr marL="0" indent="0">
               <a:lnSpc>
                 <a:spcPct val="118000"/>
               </a:lnSpc>
@@ -2473,7 +2290,7 @@
             <a:endParaRPr lang="en-US" sz="2700" dirty="0"/>
           </a:p>
           <a:p>
-            <a:pPr indent="0" marL="0">
+            <a:pPr marL="0" indent="0">
               <a:lnSpc>
                 <a:spcPct val="118000"/>
               </a:lnSpc>
@@ -2496,21 +2313,21 @@
       </p:sp>
       <p:pic>
         <p:nvPicPr>
-          <p:cNvPr id="4" name="Image 0" descr="D:/Projects/batboda/발표/캡처/20260805_C04_사용한자료_표.png">    </p:cNvPr>
+          <p:cNvPr id="4" name="Image 0" descr="D:/Projects/batboda/발표/캡처/20260805_C04_사용한자료_표.png"/>
           <p:cNvPicPr>
             <a:picLocks noChangeAspect="1"/>
           </p:cNvPicPr>
           <p:nvPr/>
         </p:nvPicPr>
         <p:blipFill>
-          <a:blip r:embed="rId1"/>
+          <a:blip r:embed="rId3"/>
           <a:stretch>
             <a:fillRect/>
           </a:stretch>
         </p:blipFill>
         <p:spPr>
           <a:xfrm>
-            <a:off x="3413997" y="2377440"/>
+            <a:off x="499759" y="2596896"/>
             <a:ext cx="5363702" cy="3968496"/>
           </a:xfrm>
           <a:prstGeom prst="rect">
@@ -2539,7 +2356,7 @@
           <a:bodyPr wrap="square" lIns="0" tIns="0" rIns="0" bIns="0" rtlCol="0" anchor="ctr"/>
           <a:lstStyle/>
           <a:p>
-            <a:pPr indent="0" marL="0">
+            <a:pPr marL="0" indent="0">
               <a:buNone/>
             </a:pPr>
             <a:r>
@@ -2578,7 +2395,7 @@
           <a:bodyPr wrap="square" lIns="0" tIns="0" rIns="0" bIns="0" rtlCol="0" anchor="ctr"/>
           <a:lstStyle/>
           <a:p>
-            <a:pPr algn="r" indent="0" marL="0">
+            <a:pPr marL="0" indent="0" algn="r">
               <a:buNone/>
             </a:pPr>
             <a:r>
@@ -2612,6 +2429,7 @@
         <a:solidFill>
           <a:srgbClr val="10262E"/>
         </a:solidFill>
+        <a:effectLst/>
       </p:bgPr>
     </p:bg>
     <p:spTree>
@@ -2649,7 +2467,7 @@
           <a:bodyPr wrap="square" lIns="0" tIns="0" rIns="0" bIns="0" rtlCol="0" anchor="ctr"/>
           <a:lstStyle/>
           <a:p>
-            <a:pPr indent="0" marL="0">
+            <a:pPr marL="0" indent="0">
               <a:buNone/>
             </a:pPr>
             <a:r>
@@ -2688,7 +2506,7 @@
           <a:bodyPr wrap="square" lIns="0" tIns="0" rIns="0" bIns="0" rtlCol="0" anchor="ctr"/>
           <a:lstStyle/>
           <a:p>
-            <a:pPr indent="0" marL="0">
+            <a:pPr marL="0" indent="0">
               <a:buNone/>
             </a:pPr>
             <a:r>
@@ -2727,7 +2545,7 @@
           <a:bodyPr wrap="square" lIns="0" tIns="0" rIns="0" bIns="0" rtlCol="0" anchor="t"/>
           <a:lstStyle/>
           <a:p>
-            <a:pPr indent="0" marL="0">
+            <a:pPr marL="0" indent="0">
               <a:lnSpc>
                 <a:spcPct val="115000"/>
               </a:lnSpc>
@@ -2750,295 +2568,7 @@
       </p:sp>
       <p:pic>
         <p:nvPicPr>
-          <p:cNvPr id="5" name="Image 0" descr="D:/Projects/batboda/발표/캡처/20260805_C01_대관령85-61전_경계.png">    </p:cNvPr>
-          <p:cNvPicPr>
-            <a:picLocks noChangeAspect="1"/>
-          </p:cNvPicPr>
-          <p:nvPr/>
-        </p:nvPicPr>
-        <p:blipFill>
-          <a:blip r:embed="rId1"/>
-          <a:stretch>
-            <a:fillRect/>
-          </a:stretch>
-        </p:blipFill>
-        <p:spPr>
-          <a:xfrm>
-            <a:off x="566928" y="3611532"/>
-            <a:ext cx="1918960" cy="1079688"/>
-          </a:xfrm>
-          <a:prstGeom prst="rect">
-            <a:avLst/>
-          </a:prstGeom>
-        </p:spPr>
-      </p:pic>
-      <p:sp>
-        <p:nvSpPr>
-          <p:cNvPr id="6" name="Text 3"/>
-          <p:cNvSpPr/>
-          <p:nvPr/>
-        </p:nvSpPr>
-        <p:spPr>
-          <a:xfrm>
-            <a:off x="2485888" y="1929384"/>
-            <a:ext cx="365760" cy="329184"/>
-          </a:xfrm>
-          <a:prstGeom prst="rect">
-            <a:avLst/>
-          </a:prstGeom>
-          <a:noFill/>
-          <a:ln/>
-        </p:spPr>
-        <p:txBody>
-          <a:bodyPr wrap="square" lIns="0" tIns="0" rIns="0" bIns="0" rtlCol="0" anchor="t"/>
-          <a:lstStyle/>
-          <a:p>
-            <a:pPr algn="ctr" indent="0" marL="0">
-              <a:buNone/>
-            </a:pPr>
-            <a:r>
-              <a:rPr lang="en-US" sz="1600" b="1" dirty="0">
-                <a:solidFill>
-                  <a:srgbClr val="0891B2"/>
-                </a:solidFill>
-                <a:latin typeface="맑은 고딕" pitchFamily="34" charset="0"/>
-                <a:ea typeface="맑은 고딕" pitchFamily="34" charset="-122"/>
-                <a:cs typeface="맑은 고딕" pitchFamily="34" charset="-120"/>
-              </a:rPr>
-              <a:t>→</a:t>
-            </a:r>
-            <a:endParaRPr lang="en-US" sz="1600" dirty="0"/>
-          </a:p>
-        </p:txBody>
-      </p:sp>
-      <p:sp>
-        <p:nvSpPr>
-          <p:cNvPr id="7" name="Text 4"/>
-          <p:cNvSpPr/>
-          <p:nvPr/>
-        </p:nvSpPr>
-        <p:spPr>
-          <a:xfrm>
-            <a:off x="2851648" y="1572768"/>
-            <a:ext cx="365760" cy="310896"/>
-          </a:xfrm>
-          <a:prstGeom prst="rect">
-            <a:avLst/>
-          </a:prstGeom>
-          <a:noFill/>
-          <a:ln/>
-        </p:spPr>
-        <p:txBody>
-          <a:bodyPr wrap="square" lIns="0" tIns="0" rIns="0" bIns="0" rtlCol="0" anchor="ctr"/>
-          <a:lstStyle/>
-          <a:p>
-            <a:pPr indent="0" marL="0">
-              <a:buNone/>
-            </a:pPr>
-            <a:r>
-              <a:rPr lang="en-US" sz="1500" b="1" dirty="0">
-                <a:solidFill>
-                  <a:srgbClr val="CFFAFE"/>
-                </a:solidFill>
-                <a:latin typeface="맑은 고딕" pitchFamily="34" charset="0"/>
-                <a:ea typeface="맑은 고딕" pitchFamily="34" charset="-122"/>
-                <a:cs typeface="맑은 고딕" pitchFamily="34" charset="-120"/>
-              </a:rPr>
-              <a:t>2</a:t>
-            </a:r>
-            <a:endParaRPr lang="en-US" sz="1500" dirty="0"/>
-          </a:p>
-        </p:txBody>
-      </p:sp>
-      <p:sp>
-        <p:nvSpPr>
-          <p:cNvPr id="8" name="Text 5"/>
-          <p:cNvSpPr/>
-          <p:nvPr/>
-        </p:nvSpPr>
-        <p:spPr>
-          <a:xfrm>
-            <a:off x="2851648" y="1920240"/>
-            <a:ext cx="1918960" cy="658368"/>
-          </a:xfrm>
-          <a:prstGeom prst="rect">
-            <a:avLst/>
-          </a:prstGeom>
-          <a:noFill/>
-          <a:ln/>
-        </p:spPr>
-        <p:txBody>
-          <a:bodyPr wrap="square" lIns="0" tIns="0" rIns="0" bIns="0" rtlCol="0" anchor="t"/>
-          <a:lstStyle/>
-          <a:p>
-            <a:pPr indent="0" marL="0">
-              <a:lnSpc>
-                <a:spcPct val="115000"/>
-              </a:lnSpc>
-              <a:buNone/>
-            </a:pPr>
-            <a:r>
-              <a:rPr lang="en-US" sz="1550" b="1" dirty="0">
-                <a:solidFill>
-                  <a:srgbClr val="FFFFFF"/>
-                </a:solidFill>
-                <a:latin typeface="맑은 고딕" pitchFamily="34" charset="0"/>
-                <a:ea typeface="맑은 고딕" pitchFamily="34" charset="-122"/>
-                <a:cs typeface="맑은 고딕" pitchFamily="34" charset="-120"/>
-              </a:rPr>
-              <a:t>같은 필지번호 토양</a:t>
-            </a:r>
-            <a:endParaRPr lang="en-US" sz="1550" dirty="0"/>
-          </a:p>
-        </p:txBody>
-      </p:sp>
-      <p:pic>
-        <p:nvPicPr>
-          <p:cNvPr id="9" name="Image 1" descr="D:/Projects/batboda/발표/캡처/20260805_C02_판정서_상단.png">    </p:cNvPr>
-          <p:cNvPicPr>
-            <a:picLocks noChangeAspect="1"/>
-          </p:cNvPicPr>
-          <p:nvPr/>
-        </p:nvPicPr>
-        <p:blipFill>
-          <a:blip r:embed="rId2"/>
-          <a:stretch>
-            <a:fillRect/>
-          </a:stretch>
-        </p:blipFill>
-        <p:spPr>
-          <a:xfrm>
-            <a:off x="2851648" y="3621677"/>
-            <a:ext cx="1918960" cy="1059397"/>
-          </a:xfrm>
-          <a:prstGeom prst="rect">
-            <a:avLst/>
-          </a:prstGeom>
-        </p:spPr>
-      </p:pic>
-      <p:sp>
-        <p:nvSpPr>
-          <p:cNvPr id="10" name="Text 6"/>
-          <p:cNvSpPr/>
-          <p:nvPr/>
-        </p:nvSpPr>
-        <p:spPr>
-          <a:xfrm>
-            <a:off x="4770608" y="1929384"/>
-            <a:ext cx="365760" cy="329184"/>
-          </a:xfrm>
-          <a:prstGeom prst="rect">
-            <a:avLst/>
-          </a:prstGeom>
-          <a:noFill/>
-          <a:ln/>
-        </p:spPr>
-        <p:txBody>
-          <a:bodyPr wrap="square" lIns="0" tIns="0" rIns="0" bIns="0" rtlCol="0" anchor="t"/>
-          <a:lstStyle/>
-          <a:p>
-            <a:pPr algn="ctr" indent="0" marL="0">
-              <a:buNone/>
-            </a:pPr>
-            <a:r>
-              <a:rPr lang="en-US" sz="1600" b="1" dirty="0">
-                <a:solidFill>
-                  <a:srgbClr val="0891B2"/>
-                </a:solidFill>
-                <a:latin typeface="맑은 고딕" pitchFamily="34" charset="0"/>
-                <a:ea typeface="맑은 고딕" pitchFamily="34" charset="-122"/>
-                <a:cs typeface="맑은 고딕" pitchFamily="34" charset="-120"/>
-              </a:rPr>
-              <a:t>→</a:t>
-            </a:r>
-            <a:endParaRPr lang="en-US" sz="1600" dirty="0"/>
-          </a:p>
-        </p:txBody>
-      </p:sp>
-      <p:sp>
-        <p:nvSpPr>
-          <p:cNvPr id="11" name="Text 7"/>
-          <p:cNvSpPr/>
-          <p:nvPr/>
-        </p:nvSpPr>
-        <p:spPr>
-          <a:xfrm>
-            <a:off x="5136368" y="1572768"/>
-            <a:ext cx="365760" cy="310896"/>
-          </a:xfrm>
-          <a:prstGeom prst="rect">
-            <a:avLst/>
-          </a:prstGeom>
-          <a:noFill/>
-          <a:ln/>
-        </p:spPr>
-        <p:txBody>
-          <a:bodyPr wrap="square" lIns="0" tIns="0" rIns="0" bIns="0" rtlCol="0" anchor="ctr"/>
-          <a:lstStyle/>
-          <a:p>
-            <a:pPr indent="0" marL="0">
-              <a:buNone/>
-            </a:pPr>
-            <a:r>
-              <a:rPr lang="en-US" sz="1500" b="1" dirty="0">
-                <a:solidFill>
-                  <a:srgbClr val="CFFAFE"/>
-                </a:solidFill>
-                <a:latin typeface="맑은 고딕" pitchFamily="34" charset="0"/>
-                <a:ea typeface="맑은 고딕" pitchFamily="34" charset="-122"/>
-                <a:cs typeface="맑은 고딕" pitchFamily="34" charset="-120"/>
-              </a:rPr>
-              <a:t>3</a:t>
-            </a:r>
-            <a:endParaRPr lang="en-US" sz="1500" dirty="0"/>
-          </a:p>
-        </p:txBody>
-      </p:sp>
-      <p:sp>
-        <p:nvSpPr>
-          <p:cNvPr id="12" name="Text 8"/>
-          <p:cNvSpPr/>
-          <p:nvPr/>
-        </p:nvSpPr>
-        <p:spPr>
-          <a:xfrm>
-            <a:off x="5136368" y="1920240"/>
-            <a:ext cx="1918960" cy="658368"/>
-          </a:xfrm>
-          <a:prstGeom prst="rect">
-            <a:avLst/>
-          </a:prstGeom>
-          <a:noFill/>
-          <a:ln/>
-        </p:spPr>
-        <p:txBody>
-          <a:bodyPr wrap="square" lIns="0" tIns="0" rIns="0" bIns="0" rtlCol="0" anchor="t"/>
-          <a:lstStyle/>
-          <a:p>
-            <a:pPr indent="0" marL="0">
-              <a:lnSpc>
-                <a:spcPct val="115000"/>
-              </a:lnSpc>
-              <a:buNone/>
-            </a:pPr>
-            <a:r>
-              <a:rPr lang="en-US" sz="1550" b="1" dirty="0">
-                <a:solidFill>
-                  <a:srgbClr val="FFFFFF"/>
-                </a:solidFill>
-                <a:latin typeface="맑은 고딕" pitchFamily="34" charset="0"/>
-                <a:ea typeface="맑은 고딕" pitchFamily="34" charset="-122"/>
-                <a:cs typeface="맑은 고딕" pitchFamily="34" charset="-120"/>
-              </a:rPr>
-              <a:t>작물별 공식 등급</a:t>
-            </a:r>
-            <a:endParaRPr lang="en-US" sz="1550" dirty="0"/>
-          </a:p>
-        </p:txBody>
-      </p:sp>
-      <p:pic>
-        <p:nvPicPr>
-          <p:cNvPr id="13" name="Image 2" descr="D:/Projects/batboda/발표/캡처/20260805_C06_유방동870답_상추_밭등급.png">    </p:cNvPr>
+          <p:cNvPr id="5" name="Image 0" descr="D:/Projects/batboda/발표/캡처/20260805_C01_대관령85-61전_경계.png"/>
           <p:cNvPicPr>
             <a:picLocks noChangeAspect="1"/>
           </p:cNvPicPr>
@@ -3052,8 +2582,8 @@
         </p:blipFill>
         <p:spPr>
           <a:xfrm>
-            <a:off x="5136368" y="3450299"/>
-            <a:ext cx="1918960" cy="1402154"/>
+            <a:off x="566928" y="3611532"/>
+            <a:ext cx="1918960" cy="1079688"/>
           </a:xfrm>
           <a:prstGeom prst="rect">
             <a:avLst/>
@@ -3062,13 +2592,13 @@
       </p:pic>
       <p:sp>
         <p:nvSpPr>
-          <p:cNvPr id="14" name="Text 9"/>
-          <p:cNvSpPr/>
-          <p:nvPr/>
-        </p:nvSpPr>
-        <p:spPr>
-          <a:xfrm>
-            <a:off x="7055328" y="1929384"/>
+          <p:cNvPr id="6" name="Text 3"/>
+          <p:cNvSpPr/>
+          <p:nvPr/>
+        </p:nvSpPr>
+        <p:spPr>
+          <a:xfrm>
+            <a:off x="2485888" y="1929384"/>
             <a:ext cx="365760" cy="329184"/>
           </a:xfrm>
           <a:prstGeom prst="rect">
@@ -3081,7 +2611,7 @@
           <a:bodyPr wrap="square" lIns="0" tIns="0" rIns="0" bIns="0" rtlCol="0" anchor="t"/>
           <a:lstStyle/>
           <a:p>
-            <a:pPr algn="ctr" indent="0" marL="0">
+            <a:pPr marL="0" indent="0" algn="ctr">
               <a:buNone/>
             </a:pPr>
             <a:r>
@@ -3101,13 +2631,13 @@
       </p:sp>
       <p:sp>
         <p:nvSpPr>
-          <p:cNvPr id="15" name="Text 10"/>
-          <p:cNvSpPr/>
-          <p:nvPr/>
-        </p:nvSpPr>
-        <p:spPr>
-          <a:xfrm>
-            <a:off x="7421088" y="1572768"/>
+          <p:cNvPr id="7" name="Text 4"/>
+          <p:cNvSpPr/>
+          <p:nvPr/>
+        </p:nvSpPr>
+        <p:spPr>
+          <a:xfrm>
+            <a:off x="2851648" y="1572768"/>
             <a:ext cx="365760" cy="310896"/>
           </a:xfrm>
           <a:prstGeom prst="rect">
@@ -3120,7 +2650,7 @@
           <a:bodyPr wrap="square" lIns="0" tIns="0" rIns="0" bIns="0" rtlCol="0" anchor="ctr"/>
           <a:lstStyle/>
           <a:p>
-            <a:pPr indent="0" marL="0">
+            <a:pPr marL="0" indent="0">
               <a:buNone/>
             </a:pPr>
             <a:r>
@@ -3132,7 +2662,7 @@
                 <a:ea typeface="맑은 고딕" pitchFamily="34" charset="-122"/>
                 <a:cs typeface="맑은 고딕" pitchFamily="34" charset="-120"/>
               </a:rPr>
-              <a:t>4</a:t>
+              <a:t>2</a:t>
             </a:r>
             <a:endParaRPr lang="en-US" sz="1500" dirty="0"/>
           </a:p>
@@ -3140,13 +2670,13 @@
       </p:sp>
       <p:sp>
         <p:nvSpPr>
-          <p:cNvPr id="16" name="Text 11"/>
-          <p:cNvSpPr/>
-          <p:nvPr/>
-        </p:nvSpPr>
-        <p:spPr>
-          <a:xfrm>
-            <a:off x="7421088" y="1920240"/>
+          <p:cNvPr id="8" name="Text 5"/>
+          <p:cNvSpPr/>
+          <p:nvPr/>
+        </p:nvSpPr>
+        <p:spPr>
+          <a:xfrm>
+            <a:off x="2851648" y="1920240"/>
             <a:ext cx="1918960" cy="658368"/>
           </a:xfrm>
           <a:prstGeom prst="rect">
@@ -3159,7 +2689,7 @@
           <a:bodyPr wrap="square" lIns="0" tIns="0" rIns="0" bIns="0" rtlCol="0" anchor="t"/>
           <a:lstStyle/>
           <a:p>
-            <a:pPr indent="0" marL="0">
+            <a:pPr marL="0" indent="0">
               <a:lnSpc>
                 <a:spcPct val="115000"/>
               </a:lnSpc>
@@ -3174,7 +2704,7 @@
                 <a:ea typeface="맑은 고딕" pitchFamily="34" charset="-122"/>
                 <a:cs typeface="맑은 고딕" pitchFamily="34" charset="-120"/>
               </a:rPr>
-              <a:t>좌표 예보</a:t>
+              <a:t>같은 필지번호 토양</a:t>
             </a:r>
             <a:endParaRPr lang="en-US" sz="1550" dirty="0"/>
           </a:p>
@@ -3182,7 +2712,7 @@
       </p:sp>
       <p:pic>
         <p:nvPicPr>
-          <p:cNvPr id="17" name="Image 3" descr="D:/Projects/batboda/발표/캡처/20260805_C03_산도_기온_눈금.png">    </p:cNvPr>
+          <p:cNvPr id="9" name="Image 1" descr="D:/Projects/batboda/발표/캡처/20260805_C02_판정서_상단.png"/>
           <p:cNvPicPr>
             <a:picLocks noChangeAspect="1"/>
           </p:cNvPicPr>
@@ -3196,8 +2726,8 @@
         </p:blipFill>
         <p:spPr>
           <a:xfrm>
-            <a:off x="7421088" y="2943560"/>
-            <a:ext cx="1918960" cy="2415632"/>
+            <a:off x="2851648" y="3621677"/>
+            <a:ext cx="1918960" cy="1059397"/>
           </a:xfrm>
           <a:prstGeom prst="rect">
             <a:avLst/>
@@ -3206,13 +2736,13 @@
       </p:pic>
       <p:sp>
         <p:nvSpPr>
-          <p:cNvPr id="18" name="Text 12"/>
-          <p:cNvSpPr/>
-          <p:nvPr/>
-        </p:nvSpPr>
-        <p:spPr>
-          <a:xfrm>
-            <a:off x="9340047" y="1929384"/>
+          <p:cNvPr id="10" name="Text 6"/>
+          <p:cNvSpPr/>
+          <p:nvPr/>
+        </p:nvSpPr>
+        <p:spPr>
+          <a:xfrm>
+            <a:off x="4770608" y="1929384"/>
             <a:ext cx="365760" cy="329184"/>
           </a:xfrm>
           <a:prstGeom prst="rect">
@@ -3225,7 +2755,7 @@
           <a:bodyPr wrap="square" lIns="0" tIns="0" rIns="0" bIns="0" rtlCol="0" anchor="t"/>
           <a:lstStyle/>
           <a:p>
-            <a:pPr algn="ctr" indent="0" marL="0">
+            <a:pPr marL="0" indent="0" algn="ctr">
               <a:buNone/>
             </a:pPr>
             <a:r>
@@ -3245,13 +2775,13 @@
       </p:sp>
       <p:sp>
         <p:nvSpPr>
-          <p:cNvPr id="19" name="Text 13"/>
-          <p:cNvSpPr/>
-          <p:nvPr/>
-        </p:nvSpPr>
-        <p:spPr>
-          <a:xfrm>
-            <a:off x="9705807" y="1572768"/>
+          <p:cNvPr id="11" name="Text 7"/>
+          <p:cNvSpPr/>
+          <p:nvPr/>
+        </p:nvSpPr>
+        <p:spPr>
+          <a:xfrm>
+            <a:off x="5136368" y="1572768"/>
             <a:ext cx="365760" cy="310896"/>
           </a:xfrm>
           <a:prstGeom prst="rect">
@@ -3264,7 +2794,7 @@
           <a:bodyPr wrap="square" lIns="0" tIns="0" rIns="0" bIns="0" rtlCol="0" anchor="ctr"/>
           <a:lstStyle/>
           <a:p>
-            <a:pPr indent="0" marL="0">
+            <a:pPr marL="0" indent="0">
               <a:buNone/>
             </a:pPr>
             <a:r>
@@ -3276,7 +2806,7 @@
                 <a:ea typeface="맑은 고딕" pitchFamily="34" charset="-122"/>
                 <a:cs typeface="맑은 고딕" pitchFamily="34" charset="-120"/>
               </a:rPr>
-              <a:t>5</a:t>
+              <a:t>3</a:t>
             </a:r>
             <a:endParaRPr lang="en-US" sz="1500" dirty="0"/>
           </a:p>
@@ -3284,13 +2814,13 @@
       </p:sp>
       <p:sp>
         <p:nvSpPr>
-          <p:cNvPr id="20" name="Text 14"/>
-          <p:cNvSpPr/>
-          <p:nvPr/>
-        </p:nvSpPr>
-        <p:spPr>
-          <a:xfrm>
-            <a:off x="9705807" y="1920240"/>
+          <p:cNvPr id="12" name="Text 8"/>
+          <p:cNvSpPr/>
+          <p:nvPr/>
+        </p:nvSpPr>
+        <p:spPr>
+          <a:xfrm>
+            <a:off x="5136368" y="1920240"/>
             <a:ext cx="1918960" cy="658368"/>
           </a:xfrm>
           <a:prstGeom prst="rect">
@@ -3303,7 +2833,7 @@
           <a:bodyPr wrap="square" lIns="0" tIns="0" rIns="0" bIns="0" rtlCol="0" anchor="t"/>
           <a:lstStyle/>
           <a:p>
-            <a:pPr indent="0" marL="0">
+            <a:pPr marL="0" indent="0">
               <a:lnSpc>
                 <a:spcPct val="115000"/>
               </a:lnSpc>
@@ -3318,7 +2848,7 @@
                 <a:ea typeface="맑은 고딕" pitchFamily="34" charset="-122"/>
                 <a:cs typeface="맑은 고딕" pitchFamily="34" charset="-120"/>
               </a:rPr>
-              <a:t>근거 추적</a:t>
+              <a:t>작물별 공식 등급</a:t>
             </a:r>
             <a:endParaRPr lang="en-US" sz="1550" dirty="0"/>
           </a:p>
@@ -3326,7 +2856,7 @@
       </p:sp>
       <p:pic>
         <p:nvPicPr>
-          <p:cNvPr id="21" name="Image 4" descr="D:/Projects/batboda/발표/캡처/20260805_C04b_상태_기준시각.png">    </p:cNvPr>
+          <p:cNvPr id="13" name="Image 2" descr="D:/Projects/batboda/발표/캡처/20260805_C06_유방동870답_상추_밭등급.png"/>
           <p:cNvPicPr>
             <a:picLocks noChangeAspect="1"/>
           </p:cNvPicPr>
@@ -3340,6 +2870,294 @@
         </p:blipFill>
         <p:spPr>
           <a:xfrm>
+            <a:off x="5136368" y="3450299"/>
+            <a:ext cx="1918960" cy="1402154"/>
+          </a:xfrm>
+          <a:prstGeom prst="rect">
+            <a:avLst/>
+          </a:prstGeom>
+        </p:spPr>
+      </p:pic>
+      <p:sp>
+        <p:nvSpPr>
+          <p:cNvPr id="14" name="Text 9"/>
+          <p:cNvSpPr/>
+          <p:nvPr/>
+        </p:nvSpPr>
+        <p:spPr>
+          <a:xfrm>
+            <a:off x="7055328" y="1929384"/>
+            <a:ext cx="365760" cy="329184"/>
+          </a:xfrm>
+          <a:prstGeom prst="rect">
+            <a:avLst/>
+          </a:prstGeom>
+          <a:noFill/>
+          <a:ln/>
+        </p:spPr>
+        <p:txBody>
+          <a:bodyPr wrap="square" lIns="0" tIns="0" rIns="0" bIns="0" rtlCol="0" anchor="t"/>
+          <a:lstStyle/>
+          <a:p>
+            <a:pPr marL="0" indent="0" algn="ctr">
+              <a:buNone/>
+            </a:pPr>
+            <a:r>
+              <a:rPr lang="en-US" sz="1600" b="1" dirty="0">
+                <a:solidFill>
+                  <a:srgbClr val="0891B2"/>
+                </a:solidFill>
+                <a:latin typeface="맑은 고딕" pitchFamily="34" charset="0"/>
+                <a:ea typeface="맑은 고딕" pitchFamily="34" charset="-122"/>
+                <a:cs typeface="맑은 고딕" pitchFamily="34" charset="-120"/>
+              </a:rPr>
+              <a:t>→</a:t>
+            </a:r>
+            <a:endParaRPr lang="en-US" sz="1600" dirty="0"/>
+          </a:p>
+        </p:txBody>
+      </p:sp>
+      <p:sp>
+        <p:nvSpPr>
+          <p:cNvPr id="15" name="Text 10"/>
+          <p:cNvSpPr/>
+          <p:nvPr/>
+        </p:nvSpPr>
+        <p:spPr>
+          <a:xfrm>
+            <a:off x="7421088" y="1572768"/>
+            <a:ext cx="365760" cy="310896"/>
+          </a:xfrm>
+          <a:prstGeom prst="rect">
+            <a:avLst/>
+          </a:prstGeom>
+          <a:noFill/>
+          <a:ln/>
+        </p:spPr>
+        <p:txBody>
+          <a:bodyPr wrap="square" lIns="0" tIns="0" rIns="0" bIns="0" rtlCol="0" anchor="ctr"/>
+          <a:lstStyle/>
+          <a:p>
+            <a:pPr marL="0" indent="0">
+              <a:buNone/>
+            </a:pPr>
+            <a:r>
+              <a:rPr lang="en-US" sz="1500" b="1" dirty="0">
+                <a:solidFill>
+                  <a:srgbClr val="CFFAFE"/>
+                </a:solidFill>
+                <a:latin typeface="맑은 고딕" pitchFamily="34" charset="0"/>
+                <a:ea typeface="맑은 고딕" pitchFamily="34" charset="-122"/>
+                <a:cs typeface="맑은 고딕" pitchFamily="34" charset="-120"/>
+              </a:rPr>
+              <a:t>4</a:t>
+            </a:r>
+            <a:endParaRPr lang="en-US" sz="1500" dirty="0"/>
+          </a:p>
+        </p:txBody>
+      </p:sp>
+      <p:sp>
+        <p:nvSpPr>
+          <p:cNvPr id="16" name="Text 11"/>
+          <p:cNvSpPr/>
+          <p:nvPr/>
+        </p:nvSpPr>
+        <p:spPr>
+          <a:xfrm>
+            <a:off x="7421088" y="1920240"/>
+            <a:ext cx="1918960" cy="658368"/>
+          </a:xfrm>
+          <a:prstGeom prst="rect">
+            <a:avLst/>
+          </a:prstGeom>
+          <a:noFill/>
+          <a:ln/>
+        </p:spPr>
+        <p:txBody>
+          <a:bodyPr wrap="square" lIns="0" tIns="0" rIns="0" bIns="0" rtlCol="0" anchor="t"/>
+          <a:lstStyle/>
+          <a:p>
+            <a:pPr marL="0" indent="0">
+              <a:lnSpc>
+                <a:spcPct val="115000"/>
+              </a:lnSpc>
+              <a:buNone/>
+            </a:pPr>
+            <a:r>
+              <a:rPr lang="en-US" sz="1550" b="1" dirty="0">
+                <a:solidFill>
+                  <a:srgbClr val="FFFFFF"/>
+                </a:solidFill>
+                <a:latin typeface="맑은 고딕" pitchFamily="34" charset="0"/>
+                <a:ea typeface="맑은 고딕" pitchFamily="34" charset="-122"/>
+                <a:cs typeface="맑은 고딕" pitchFamily="34" charset="-120"/>
+              </a:rPr>
+              <a:t>좌표 예보</a:t>
+            </a:r>
+            <a:endParaRPr lang="en-US" sz="1550" dirty="0"/>
+          </a:p>
+        </p:txBody>
+      </p:sp>
+      <p:pic>
+        <p:nvPicPr>
+          <p:cNvPr id="17" name="Image 3" descr="D:/Projects/batboda/발표/캡처/20260805_C03_산도_기온_눈금.png"/>
+          <p:cNvPicPr>
+            <a:picLocks noChangeAspect="1"/>
+          </p:cNvPicPr>
+          <p:nvPr/>
+        </p:nvPicPr>
+        <p:blipFill>
+          <a:blip r:embed="rId6"/>
+          <a:stretch>
+            <a:fillRect/>
+          </a:stretch>
+        </p:blipFill>
+        <p:spPr>
+          <a:xfrm>
+            <a:off x="7421088" y="2943560"/>
+            <a:ext cx="1918960" cy="2415632"/>
+          </a:xfrm>
+          <a:prstGeom prst="rect">
+            <a:avLst/>
+          </a:prstGeom>
+        </p:spPr>
+      </p:pic>
+      <p:sp>
+        <p:nvSpPr>
+          <p:cNvPr id="18" name="Text 12"/>
+          <p:cNvSpPr/>
+          <p:nvPr/>
+        </p:nvSpPr>
+        <p:spPr>
+          <a:xfrm>
+            <a:off x="9340047" y="1929384"/>
+            <a:ext cx="365760" cy="329184"/>
+          </a:xfrm>
+          <a:prstGeom prst="rect">
+            <a:avLst/>
+          </a:prstGeom>
+          <a:noFill/>
+          <a:ln/>
+        </p:spPr>
+        <p:txBody>
+          <a:bodyPr wrap="square" lIns="0" tIns="0" rIns="0" bIns="0" rtlCol="0" anchor="t"/>
+          <a:lstStyle/>
+          <a:p>
+            <a:pPr marL="0" indent="0" algn="ctr">
+              <a:buNone/>
+            </a:pPr>
+            <a:r>
+              <a:rPr lang="en-US" sz="1600" b="1" dirty="0">
+                <a:solidFill>
+                  <a:srgbClr val="0891B2"/>
+                </a:solidFill>
+                <a:latin typeface="맑은 고딕" pitchFamily="34" charset="0"/>
+                <a:ea typeface="맑은 고딕" pitchFamily="34" charset="-122"/>
+                <a:cs typeface="맑은 고딕" pitchFamily="34" charset="-120"/>
+              </a:rPr>
+              <a:t>→</a:t>
+            </a:r>
+            <a:endParaRPr lang="en-US" sz="1600" dirty="0"/>
+          </a:p>
+        </p:txBody>
+      </p:sp>
+      <p:sp>
+        <p:nvSpPr>
+          <p:cNvPr id="19" name="Text 13"/>
+          <p:cNvSpPr/>
+          <p:nvPr/>
+        </p:nvSpPr>
+        <p:spPr>
+          <a:xfrm>
+            <a:off x="9705807" y="1572768"/>
+            <a:ext cx="365760" cy="310896"/>
+          </a:xfrm>
+          <a:prstGeom prst="rect">
+            <a:avLst/>
+          </a:prstGeom>
+          <a:noFill/>
+          <a:ln/>
+        </p:spPr>
+        <p:txBody>
+          <a:bodyPr wrap="square" lIns="0" tIns="0" rIns="0" bIns="0" rtlCol="0" anchor="ctr"/>
+          <a:lstStyle/>
+          <a:p>
+            <a:pPr marL="0" indent="0">
+              <a:buNone/>
+            </a:pPr>
+            <a:r>
+              <a:rPr lang="en-US" sz="1500" b="1" dirty="0">
+                <a:solidFill>
+                  <a:srgbClr val="CFFAFE"/>
+                </a:solidFill>
+                <a:latin typeface="맑은 고딕" pitchFamily="34" charset="0"/>
+                <a:ea typeface="맑은 고딕" pitchFamily="34" charset="-122"/>
+                <a:cs typeface="맑은 고딕" pitchFamily="34" charset="-120"/>
+              </a:rPr>
+              <a:t>5</a:t>
+            </a:r>
+            <a:endParaRPr lang="en-US" sz="1500" dirty="0"/>
+          </a:p>
+        </p:txBody>
+      </p:sp>
+      <p:sp>
+        <p:nvSpPr>
+          <p:cNvPr id="20" name="Text 14"/>
+          <p:cNvSpPr/>
+          <p:nvPr/>
+        </p:nvSpPr>
+        <p:spPr>
+          <a:xfrm>
+            <a:off x="9705807" y="1920240"/>
+            <a:ext cx="1918960" cy="658368"/>
+          </a:xfrm>
+          <a:prstGeom prst="rect">
+            <a:avLst/>
+          </a:prstGeom>
+          <a:noFill/>
+          <a:ln/>
+        </p:spPr>
+        <p:txBody>
+          <a:bodyPr wrap="square" lIns="0" tIns="0" rIns="0" bIns="0" rtlCol="0" anchor="t"/>
+          <a:lstStyle/>
+          <a:p>
+            <a:pPr marL="0" indent="0">
+              <a:lnSpc>
+                <a:spcPct val="115000"/>
+              </a:lnSpc>
+              <a:buNone/>
+            </a:pPr>
+            <a:r>
+              <a:rPr lang="en-US" sz="1550" b="1" dirty="0">
+                <a:solidFill>
+                  <a:srgbClr val="FFFFFF"/>
+                </a:solidFill>
+                <a:latin typeface="맑은 고딕" pitchFamily="34" charset="0"/>
+                <a:ea typeface="맑은 고딕" pitchFamily="34" charset="-122"/>
+                <a:cs typeface="맑은 고딕" pitchFamily="34" charset="-120"/>
+              </a:rPr>
+              <a:t>근거 추적</a:t>
+            </a:r>
+            <a:endParaRPr lang="en-US" sz="1550" dirty="0"/>
+          </a:p>
+        </p:txBody>
+      </p:sp>
+      <p:pic>
+        <p:nvPicPr>
+          <p:cNvPr id="21" name="Image 4" descr="D:/Projects/batboda/발표/캡처/20260805_C04b_상태_기준시각.png"/>
+          <p:cNvPicPr>
+            <a:picLocks noChangeAspect="1"/>
+          </p:cNvPicPr>
+          <p:nvPr/>
+        </p:nvPicPr>
+        <p:blipFill>
+          <a:blip r:embed="rId7"/>
+          <a:stretch>
+            <a:fillRect/>
+          </a:stretch>
+        </p:blipFill>
+        <p:spPr>
+          <a:xfrm>
             <a:off x="9705807" y="2837270"/>
             <a:ext cx="1918960" cy="2628213"/>
           </a:xfrm>
@@ -3369,7 +3187,7 @@
           <a:bodyPr wrap="square" lIns="0" tIns="0" rIns="0" bIns="0" rtlCol="0" anchor="ctr"/>
           <a:lstStyle/>
           <a:p>
-            <a:pPr algn="r" indent="0" marL="0">
+            <a:pPr marL="0" indent="0" algn="r">
               <a:buNone/>
             </a:pPr>
             <a:r>
@@ -3403,6 +3221,7 @@
         <a:solidFill>
           <a:srgbClr val="F7F9FA"/>
         </a:solidFill>
+        <a:effectLst/>
       </p:bgPr>
     </p:bg>
     <p:spTree>
@@ -3440,7 +3259,7 @@
           <a:bodyPr wrap="square" lIns="0" tIns="0" rIns="0" bIns="0" rtlCol="0" anchor="ctr"/>
           <a:lstStyle/>
           <a:p>
-            <a:pPr algn="r" indent="0" marL="0">
+            <a:pPr marL="0" indent="0" algn="r">
               <a:buNone/>
             </a:pPr>
             <a:r>
@@ -3479,7 +3298,7 @@
           <a:bodyPr wrap="square" lIns="0" tIns="0" rIns="0" bIns="0" rtlCol="0" anchor="t"/>
           <a:lstStyle/>
           <a:p>
-            <a:pPr indent="0" marL="0">
+            <a:pPr marL="0" indent="0">
               <a:lnSpc>
                 <a:spcPct val="118000"/>
               </a:lnSpc>
@@ -3508,7 +3327,7 @@
         </p:nvSpPr>
         <p:spPr>
           <a:xfrm>
-            <a:off x="566928" y="2084832"/>
+            <a:off x="2947417" y="1531261"/>
             <a:ext cx="5577840" cy="841248"/>
           </a:xfrm>
           <a:prstGeom prst="roundRect">
@@ -3526,6 +3345,13 @@
             <a:prstDash val="solid"/>
           </a:ln>
         </p:spPr>
+        <p:txBody>
+          <a:bodyPr/>
+          <a:lstStyle/>
+          <a:p>
+            <a:endParaRPr lang="ko-KR" altLang="en-US"/>
+          </a:p>
+        </p:txBody>
       </p:sp>
       <p:sp>
         <p:nvSpPr>
@@ -3535,7 +3361,7 @@
         </p:nvSpPr>
         <p:spPr>
           <a:xfrm>
-            <a:off x="566928" y="2084832"/>
+            <a:off x="2947417" y="1531261"/>
             <a:ext cx="5577840" cy="841248"/>
           </a:xfrm>
           <a:prstGeom prst="rect">
@@ -3548,7 +3374,7 @@
           <a:bodyPr wrap="square" lIns="0" tIns="0" rIns="0" bIns="0" rtlCol="0" anchor="ctr"/>
           <a:lstStyle/>
           <a:p>
-            <a:pPr algn="ctr" indent="0" marL="0">
+            <a:pPr marL="0" indent="0" algn="ctr">
               <a:buNone/>
             </a:pPr>
             <a:r>
@@ -3574,7 +3400,7 @@
         </p:nvSpPr>
         <p:spPr>
           <a:xfrm>
-            <a:off x="566928" y="3108960"/>
+            <a:off x="2947417" y="2555389"/>
             <a:ext cx="5577840" cy="292608"/>
           </a:xfrm>
           <a:prstGeom prst="rect">
@@ -3587,7 +3413,7 @@
           <a:bodyPr wrap="square" lIns="0" tIns="0" rIns="0" bIns="0" rtlCol="0" anchor="ctr"/>
           <a:lstStyle/>
           <a:p>
-            <a:pPr indent="0" marL="0">
+            <a:pPr marL="0" indent="0">
               <a:buNone/>
             </a:pPr>
             <a:r>
@@ -3613,7 +3439,7 @@
         </p:nvSpPr>
         <p:spPr>
           <a:xfrm>
-            <a:off x="6455664" y="2084832"/>
+            <a:off x="359665" y="2893717"/>
             <a:ext cx="5175504" cy="274320"/>
           </a:xfrm>
           <a:prstGeom prst="rect">
@@ -3626,7 +3452,7 @@
           <a:bodyPr wrap="square" lIns="0" tIns="0" rIns="0" bIns="0" rtlCol="0" anchor="ctr"/>
           <a:lstStyle/>
           <a:p>
-            <a:pPr indent="0" marL="0">
+            <a:pPr marL="0" indent="0">
               <a:buNone/>
             </a:pPr>
             <a:r>
@@ -3644,321 +3470,384 @@
           </a:p>
         </p:txBody>
       </p:sp>
-      <p:pic>
-        <p:nvPicPr>
-          <p:cNvPr id="8" name="Image 0" descr="D:/Projects/batboda/발표/캡처/20260805_C01_대관령85-61전_경계.png">    </p:cNvPr>
-          <p:cNvPicPr>
-            <a:picLocks noChangeAspect="1"/>
-          </p:cNvPicPr>
-          <p:nvPr/>
-        </p:nvPicPr>
-        <p:blipFill>
-          <a:blip r:embed="rId1"/>
-          <a:stretch>
-            <a:fillRect/>
-          </a:stretch>
-        </p:blipFill>
-        <p:spPr>
-          <a:xfrm>
-            <a:off x="6455664" y="3331207"/>
-            <a:ext cx="932688" cy="524770"/>
-          </a:xfrm>
-          <a:prstGeom prst="rect">
-            <a:avLst/>
-          </a:prstGeom>
-        </p:spPr>
-      </p:pic>
-      <p:sp>
-        <p:nvSpPr>
-          <p:cNvPr id="9" name="Text 6"/>
-          <p:cNvSpPr/>
-          <p:nvPr/>
-        </p:nvSpPr>
-        <p:spPr>
-          <a:xfrm>
-            <a:off x="6455664" y="4809744"/>
-            <a:ext cx="932688" cy="256032"/>
-          </a:xfrm>
-          <a:prstGeom prst="rect">
-            <a:avLst/>
-          </a:prstGeom>
-          <a:noFill/>
-          <a:ln/>
-        </p:spPr>
-        <p:txBody>
-          <a:bodyPr wrap="square" lIns="0" tIns="0" rIns="0" bIns="0" rtlCol="0" anchor="ctr"/>
-          <a:lstStyle/>
-          <a:p>
-            <a:pPr algn="ctr" indent="0" marL="0">
-              <a:buNone/>
-            </a:pPr>
-            <a:r>
-              <a:rPr lang="en-US" sz="1100" b="1" dirty="0">
-                <a:solidFill>
-                  <a:srgbClr val="0B5A72"/>
-                </a:solidFill>
-                <a:latin typeface="맑은 고딕" pitchFamily="34" charset="0"/>
-                <a:ea typeface="맑은 고딕" pitchFamily="34" charset="-122"/>
-                <a:cs typeface="맑은 고딕" pitchFamily="34" charset="-120"/>
-              </a:rPr>
-              <a:t>농지 경계</a:t>
-            </a:r>
-            <a:endParaRPr lang="en-US" sz="1100" dirty="0"/>
-          </a:p>
-        </p:txBody>
-      </p:sp>
-      <p:pic>
-        <p:nvPicPr>
-          <p:cNvPr id="10" name="Image 1" descr="D:/Projects/batboda/발표/캡처/20260805_C02_판정서_상단.png">    </p:cNvPr>
-          <p:cNvPicPr>
-            <a:picLocks noChangeAspect="1"/>
-          </p:cNvPicPr>
-          <p:nvPr/>
-        </p:nvPicPr>
-        <p:blipFill>
-          <a:blip r:embed="rId2"/>
-          <a:stretch>
-            <a:fillRect/>
-          </a:stretch>
-        </p:blipFill>
-        <p:spPr>
-          <a:xfrm>
-            <a:off x="7516368" y="3336138"/>
-            <a:ext cx="932688" cy="514908"/>
-          </a:xfrm>
-          <a:prstGeom prst="rect">
-            <a:avLst/>
-          </a:prstGeom>
-        </p:spPr>
-      </p:pic>
-      <p:sp>
-        <p:nvSpPr>
-          <p:cNvPr id="11" name="Text 7"/>
-          <p:cNvSpPr/>
-          <p:nvPr/>
-        </p:nvSpPr>
-        <p:spPr>
-          <a:xfrm>
-            <a:off x="7516368" y="4809744"/>
-            <a:ext cx="932688" cy="256032"/>
-          </a:xfrm>
-          <a:prstGeom prst="rect">
-            <a:avLst/>
-          </a:prstGeom>
-          <a:noFill/>
-          <a:ln/>
-        </p:spPr>
-        <p:txBody>
-          <a:bodyPr wrap="square" lIns="0" tIns="0" rIns="0" bIns="0" rtlCol="0" anchor="ctr"/>
-          <a:lstStyle/>
-          <a:p>
-            <a:pPr algn="ctr" indent="0" marL="0">
-              <a:buNone/>
-            </a:pPr>
-            <a:r>
-              <a:rPr lang="en-US" sz="1100" b="1" dirty="0">
-                <a:solidFill>
-                  <a:srgbClr val="0B5A72"/>
-                </a:solidFill>
-                <a:latin typeface="맑은 고딕" pitchFamily="34" charset="0"/>
-                <a:ea typeface="맑은 고딕" pitchFamily="34" charset="-122"/>
-                <a:cs typeface="맑은 고딕" pitchFamily="34" charset="-120"/>
-              </a:rPr>
-              <a:t>판정과 상태</a:t>
-            </a:r>
-            <a:endParaRPr lang="en-US" sz="1100" dirty="0"/>
-          </a:p>
-        </p:txBody>
-      </p:sp>
-      <p:pic>
-        <p:nvPicPr>
-          <p:cNvPr id="12" name="Image 2" descr="D:/Projects/batboda/발표/캡처/20260805_C03_산도_기온_눈금.png">    </p:cNvPr>
-          <p:cNvPicPr>
-            <a:picLocks noChangeAspect="1"/>
-          </p:cNvPicPr>
-          <p:nvPr/>
-        </p:nvPicPr>
-        <p:blipFill>
-          <a:blip r:embed="rId3"/>
-          <a:stretch>
-            <a:fillRect/>
-          </a:stretch>
-        </p:blipFill>
-        <p:spPr>
-          <a:xfrm>
-            <a:off x="8577072" y="3006547"/>
-            <a:ext cx="932688" cy="1174090"/>
-          </a:xfrm>
-          <a:prstGeom prst="rect">
-            <a:avLst/>
-          </a:prstGeom>
-        </p:spPr>
-      </p:pic>
-      <p:sp>
-        <p:nvSpPr>
-          <p:cNvPr id="13" name="Text 8"/>
-          <p:cNvSpPr/>
-          <p:nvPr/>
-        </p:nvSpPr>
-        <p:spPr>
-          <a:xfrm>
-            <a:off x="8577072" y="4809744"/>
-            <a:ext cx="932688" cy="256032"/>
-          </a:xfrm>
-          <a:prstGeom prst="rect">
-            <a:avLst/>
-          </a:prstGeom>
-          <a:noFill/>
-          <a:ln/>
-        </p:spPr>
-        <p:txBody>
-          <a:bodyPr wrap="square" lIns="0" tIns="0" rIns="0" bIns="0" rtlCol="0" anchor="ctr"/>
-          <a:lstStyle/>
-          <a:p>
-            <a:pPr algn="ctr" indent="0" marL="0">
-              <a:buNone/>
-            </a:pPr>
-            <a:r>
-              <a:rPr lang="en-US" sz="1100" b="1" dirty="0">
-                <a:solidFill>
-                  <a:srgbClr val="0B5A72"/>
-                </a:solidFill>
-                <a:latin typeface="맑은 고딕" pitchFamily="34" charset="0"/>
-                <a:ea typeface="맑은 고딕" pitchFamily="34" charset="-122"/>
-                <a:cs typeface="맑은 고딕" pitchFamily="34" charset="-120"/>
-              </a:rPr>
-              <a:t>기준 대조</a:t>
-            </a:r>
-            <a:endParaRPr lang="en-US" sz="1100" dirty="0"/>
-          </a:p>
-        </p:txBody>
-      </p:sp>
-      <p:pic>
-        <p:nvPicPr>
-          <p:cNvPr id="14" name="Image 3" descr="D:/Projects/batboda/발표/캡처/20260805_C04_사용한자료_표.png">    </p:cNvPr>
-          <p:cNvPicPr>
-            <a:picLocks noChangeAspect="1"/>
-          </p:cNvPicPr>
-          <p:nvPr/>
-        </p:nvPicPr>
-        <p:blipFill>
-          <a:blip r:embed="rId4"/>
-          <a:stretch>
-            <a:fillRect/>
-          </a:stretch>
-        </p:blipFill>
-        <p:spPr>
-          <a:xfrm>
-            <a:off x="9637776" y="3248553"/>
-            <a:ext cx="932688" cy="690077"/>
-          </a:xfrm>
-          <a:prstGeom prst="rect">
-            <a:avLst/>
-          </a:prstGeom>
-        </p:spPr>
-      </p:pic>
-      <p:sp>
-        <p:nvSpPr>
-          <p:cNvPr id="15" name="Text 9"/>
-          <p:cNvSpPr/>
-          <p:nvPr/>
-        </p:nvSpPr>
-        <p:spPr>
-          <a:xfrm>
-            <a:off x="9637776" y="4809744"/>
-            <a:ext cx="932688" cy="256032"/>
-          </a:xfrm>
-          <a:prstGeom prst="rect">
-            <a:avLst/>
-          </a:prstGeom>
-          <a:noFill/>
-          <a:ln/>
-        </p:spPr>
-        <p:txBody>
-          <a:bodyPr wrap="square" lIns="0" tIns="0" rIns="0" bIns="0" rtlCol="0" anchor="ctr"/>
-          <a:lstStyle/>
-          <a:p>
-            <a:pPr algn="ctr" indent="0" marL="0">
-              <a:buNone/>
-            </a:pPr>
-            <a:r>
-              <a:rPr lang="en-US" sz="1100" b="1" dirty="0">
-                <a:solidFill>
-                  <a:srgbClr val="0B5A72"/>
-                </a:solidFill>
-                <a:latin typeface="맑은 고딕" pitchFamily="34" charset="0"/>
-                <a:ea typeface="맑은 고딕" pitchFamily="34" charset="-122"/>
-                <a:cs typeface="맑은 고딕" pitchFamily="34" charset="-120"/>
-              </a:rPr>
-              <a:t>출처 추적</a:t>
-            </a:r>
-            <a:endParaRPr lang="en-US" sz="1100" dirty="0"/>
-          </a:p>
-        </p:txBody>
-      </p:sp>
-      <p:pic>
-        <p:nvPicPr>
-          <p:cNvPr id="16" name="Image 4" descr="D:/Projects/batboda/발표/캡처/20260805_C07_04_상단_결론과근거.png">    </p:cNvPr>
-          <p:cNvPicPr>
-            <a:picLocks noChangeAspect="1"/>
-          </p:cNvPicPr>
-          <p:nvPr/>
-        </p:nvPicPr>
-        <p:blipFill>
-          <a:blip r:embed="rId5"/>
-          <a:stretch>
-            <a:fillRect/>
-          </a:stretch>
-        </p:blipFill>
-        <p:spPr>
-          <a:xfrm>
-            <a:off x="10698480" y="3229718"/>
-            <a:ext cx="932688" cy="727748"/>
-          </a:xfrm>
-          <a:prstGeom prst="rect">
-            <a:avLst/>
-          </a:prstGeom>
-        </p:spPr>
-      </p:pic>
-      <p:sp>
-        <p:nvSpPr>
-          <p:cNvPr id="17" name="Text 10"/>
-          <p:cNvSpPr/>
-          <p:nvPr/>
-        </p:nvSpPr>
-        <p:spPr>
-          <a:xfrm>
-            <a:off x="10698480" y="4809744"/>
-            <a:ext cx="932688" cy="256032"/>
-          </a:xfrm>
-          <a:prstGeom prst="rect">
-            <a:avLst/>
-          </a:prstGeom>
-          <a:noFill/>
-          <a:ln/>
-        </p:spPr>
-        <p:txBody>
-          <a:bodyPr wrap="square" lIns="0" tIns="0" rIns="0" bIns="0" rtlCol="0" anchor="ctr"/>
-          <a:lstStyle/>
-          <a:p>
-            <a:pPr algn="ctr" indent="0" marL="0">
-              <a:buNone/>
-            </a:pPr>
-            <a:r>
-              <a:rPr lang="en-US" sz="1100" b="1" dirty="0">
-                <a:solidFill>
-                  <a:srgbClr val="0B5A72"/>
-                </a:solidFill>
-                <a:latin typeface="맑은 고딕" pitchFamily="34" charset="0"/>
-                <a:ea typeface="맑은 고딕" pitchFamily="34" charset="-122"/>
-                <a:cs typeface="맑은 고딕" pitchFamily="34" charset="-120"/>
-              </a:rPr>
-              <a:t>쉬운 말</a:t>
-            </a:r>
-            <a:endParaRPr lang="en-US" sz="1100" dirty="0"/>
-          </a:p>
-        </p:txBody>
-      </p:sp>
+      <p:grpSp>
+        <p:nvGrpSpPr>
+          <p:cNvPr id="21" name="그룹 20">
+            <a:extLst>
+              <a:ext uri="{FF2B5EF4-FFF2-40B4-BE49-F238E27FC236}">
+                <a16:creationId xmlns:a16="http://schemas.microsoft.com/office/drawing/2014/main" id="{BB4D2DEE-2206-89D7-11AB-62906577FE01}"/>
+              </a:ext>
+            </a:extLst>
+          </p:cNvPr>
+          <p:cNvGrpSpPr/>
+          <p:nvPr/>
+        </p:nvGrpSpPr>
+        <p:grpSpPr>
+          <a:xfrm>
+            <a:off x="978736" y="3080810"/>
+            <a:ext cx="10588752" cy="3550092"/>
+            <a:chOff x="978736" y="3080810"/>
+            <a:chExt cx="10588752" cy="3550092"/>
+          </a:xfrm>
+        </p:grpSpPr>
+        <p:grpSp>
+          <p:nvGrpSpPr>
+            <p:cNvPr id="20" name="그룹 19">
+              <a:extLst>
+                <a:ext uri="{FF2B5EF4-FFF2-40B4-BE49-F238E27FC236}">
+                  <a16:creationId xmlns:a16="http://schemas.microsoft.com/office/drawing/2014/main" id="{F86E9C62-7805-1EE6-3272-0138EFA356A4}"/>
+                </a:ext>
+              </a:extLst>
+            </p:cNvPr>
+            <p:cNvGrpSpPr/>
+            <p:nvPr/>
+          </p:nvGrpSpPr>
+          <p:grpSpPr>
+            <a:xfrm>
+              <a:off x="978736" y="3080810"/>
+              <a:ext cx="10588752" cy="2541916"/>
+              <a:chOff x="2212848" y="3429000"/>
+              <a:chExt cx="5175504" cy="1174090"/>
+            </a:xfrm>
+          </p:grpSpPr>
+          <p:pic>
+            <p:nvPicPr>
+              <p:cNvPr id="8" name="Image 0" descr="D:/Projects/batboda/발표/캡처/20260805_C01_대관령85-61전_경계.png"/>
+              <p:cNvPicPr>
+                <a:picLocks noChangeAspect="1"/>
+              </p:cNvPicPr>
+              <p:nvPr/>
+            </p:nvPicPr>
+            <p:blipFill>
+              <a:blip r:embed="rId3"/>
+              <a:stretch>
+                <a:fillRect/>
+              </a:stretch>
+            </p:blipFill>
+            <p:spPr>
+              <a:xfrm>
+                <a:off x="2212848" y="3753660"/>
+                <a:ext cx="932688" cy="524770"/>
+              </a:xfrm>
+              <a:prstGeom prst="rect">
+                <a:avLst/>
+              </a:prstGeom>
+            </p:spPr>
+          </p:pic>
+          <p:pic>
+            <p:nvPicPr>
+              <p:cNvPr id="10" name="Image 1" descr="D:/Projects/batboda/발표/캡처/20260805_C02_판정서_상단.png"/>
+              <p:cNvPicPr>
+                <a:picLocks noChangeAspect="1"/>
+              </p:cNvPicPr>
+              <p:nvPr/>
+            </p:nvPicPr>
+            <p:blipFill>
+              <a:blip r:embed="rId4"/>
+              <a:stretch>
+                <a:fillRect/>
+              </a:stretch>
+            </p:blipFill>
+            <p:spPr>
+              <a:xfrm>
+                <a:off x="3273552" y="3758591"/>
+                <a:ext cx="932688" cy="514908"/>
+              </a:xfrm>
+              <a:prstGeom prst="rect">
+                <a:avLst/>
+              </a:prstGeom>
+            </p:spPr>
+          </p:pic>
+          <p:pic>
+            <p:nvPicPr>
+              <p:cNvPr id="12" name="Image 2" descr="D:/Projects/batboda/발표/캡처/20260805_C03_산도_기온_눈금.png"/>
+              <p:cNvPicPr>
+                <a:picLocks noChangeAspect="1"/>
+              </p:cNvPicPr>
+              <p:nvPr/>
+            </p:nvPicPr>
+            <p:blipFill>
+              <a:blip r:embed="rId5"/>
+              <a:stretch>
+                <a:fillRect/>
+              </a:stretch>
+            </p:blipFill>
+            <p:spPr>
+              <a:xfrm>
+                <a:off x="4334256" y="3429000"/>
+                <a:ext cx="932688" cy="1174090"/>
+              </a:xfrm>
+              <a:prstGeom prst="rect">
+                <a:avLst/>
+              </a:prstGeom>
+            </p:spPr>
+          </p:pic>
+          <p:pic>
+            <p:nvPicPr>
+              <p:cNvPr id="14" name="Image 3" descr="D:/Projects/batboda/발표/캡처/20260805_C04_사용한자료_표.png"/>
+              <p:cNvPicPr>
+                <a:picLocks noChangeAspect="1"/>
+              </p:cNvPicPr>
+              <p:nvPr/>
+            </p:nvPicPr>
+            <p:blipFill>
+              <a:blip r:embed="rId6"/>
+              <a:stretch>
+                <a:fillRect/>
+              </a:stretch>
+            </p:blipFill>
+            <p:spPr>
+              <a:xfrm>
+                <a:off x="5394960" y="3671006"/>
+                <a:ext cx="932688" cy="690077"/>
+              </a:xfrm>
+              <a:prstGeom prst="rect">
+                <a:avLst/>
+              </a:prstGeom>
+            </p:spPr>
+          </p:pic>
+          <p:pic>
+            <p:nvPicPr>
+              <p:cNvPr id="16" name="Image 4" descr="D:/Projects/batboda/발표/캡처/20260805_C07_04_상단_결론과근거.png"/>
+              <p:cNvPicPr>
+                <a:picLocks noChangeAspect="1"/>
+              </p:cNvPicPr>
+              <p:nvPr/>
+            </p:nvPicPr>
+            <p:blipFill>
+              <a:blip r:embed="rId7"/>
+              <a:stretch>
+                <a:fillRect/>
+              </a:stretch>
+            </p:blipFill>
+            <p:spPr>
+              <a:xfrm>
+                <a:off x="6455664" y="3652171"/>
+                <a:ext cx="932688" cy="727748"/>
+              </a:xfrm>
+              <a:prstGeom prst="rect">
+                <a:avLst/>
+              </a:prstGeom>
+            </p:spPr>
+          </p:pic>
+        </p:grpSp>
+        <p:grpSp>
+          <p:nvGrpSpPr>
+            <p:cNvPr id="19" name="그룹 18">
+              <a:extLst>
+                <a:ext uri="{FF2B5EF4-FFF2-40B4-BE49-F238E27FC236}">
+                  <a16:creationId xmlns:a16="http://schemas.microsoft.com/office/drawing/2014/main" id="{CD5689C0-3678-C16A-7B97-5B6C9B861E2F}"/>
+                </a:ext>
+              </a:extLst>
+            </p:cNvPr>
+            <p:cNvGrpSpPr/>
+            <p:nvPr/>
+          </p:nvGrpSpPr>
+          <p:grpSpPr>
+            <a:xfrm>
+              <a:off x="1178721" y="5396462"/>
+              <a:ext cx="10188784" cy="1234440"/>
+              <a:chOff x="2212848" y="5232197"/>
+              <a:chExt cx="5175504" cy="256032"/>
+            </a:xfrm>
+          </p:grpSpPr>
+          <p:sp>
+            <p:nvSpPr>
+              <p:cNvPr id="9" name="Text 6"/>
+              <p:cNvSpPr/>
+              <p:nvPr/>
+            </p:nvSpPr>
+            <p:spPr>
+              <a:xfrm>
+                <a:off x="2212848" y="5232197"/>
+                <a:ext cx="932688" cy="256032"/>
+              </a:xfrm>
+              <a:prstGeom prst="rect">
+                <a:avLst/>
+              </a:prstGeom>
+              <a:noFill/>
+              <a:ln/>
+            </p:spPr>
+            <p:txBody>
+              <a:bodyPr wrap="square" lIns="0" tIns="0" rIns="0" bIns="0" rtlCol="0" anchor="ctr"/>
+              <a:lstStyle/>
+              <a:p>
+                <a:pPr marL="0" indent="0" algn="ctr">
+                  <a:buNone/>
+                </a:pPr>
+                <a:r>
+                  <a:rPr lang="en-US" sz="2400" b="1" dirty="0">
+                    <a:solidFill>
+                      <a:srgbClr val="0B5A72"/>
+                    </a:solidFill>
+                    <a:latin typeface="맑은 고딕" pitchFamily="34" charset="0"/>
+                    <a:ea typeface="맑은 고딕" pitchFamily="34" charset="-122"/>
+                    <a:cs typeface="맑은 고딕" pitchFamily="34" charset="-120"/>
+                  </a:rPr>
+                  <a:t>농지 경계</a:t>
+                </a:r>
+                <a:endParaRPr lang="en-US" sz="2400" dirty="0"/>
+              </a:p>
+            </p:txBody>
+          </p:sp>
+          <p:sp>
+            <p:nvSpPr>
+              <p:cNvPr id="11" name="Text 7"/>
+              <p:cNvSpPr/>
+              <p:nvPr/>
+            </p:nvSpPr>
+            <p:spPr>
+              <a:xfrm>
+                <a:off x="3273552" y="5232197"/>
+                <a:ext cx="932688" cy="256032"/>
+              </a:xfrm>
+              <a:prstGeom prst="rect">
+                <a:avLst/>
+              </a:prstGeom>
+              <a:noFill/>
+              <a:ln/>
+            </p:spPr>
+            <p:txBody>
+              <a:bodyPr wrap="square" lIns="0" tIns="0" rIns="0" bIns="0" rtlCol="0" anchor="ctr"/>
+              <a:lstStyle/>
+              <a:p>
+                <a:pPr marL="0" indent="0" algn="ctr">
+                  <a:buNone/>
+                </a:pPr>
+                <a:r>
+                  <a:rPr lang="en-US" sz="2400" b="1" dirty="0">
+                    <a:solidFill>
+                      <a:srgbClr val="0B5A72"/>
+                    </a:solidFill>
+                    <a:latin typeface="맑은 고딕" pitchFamily="34" charset="0"/>
+                    <a:ea typeface="맑은 고딕" pitchFamily="34" charset="-122"/>
+                    <a:cs typeface="맑은 고딕" pitchFamily="34" charset="-120"/>
+                  </a:rPr>
+                  <a:t>판정과 상태</a:t>
+                </a:r>
+                <a:endParaRPr lang="en-US" sz="2400" dirty="0"/>
+              </a:p>
+            </p:txBody>
+          </p:sp>
+          <p:sp>
+            <p:nvSpPr>
+              <p:cNvPr id="13" name="Text 8"/>
+              <p:cNvSpPr/>
+              <p:nvPr/>
+            </p:nvSpPr>
+            <p:spPr>
+              <a:xfrm>
+                <a:off x="4334256" y="5232197"/>
+                <a:ext cx="932688" cy="256032"/>
+              </a:xfrm>
+              <a:prstGeom prst="rect">
+                <a:avLst/>
+              </a:prstGeom>
+              <a:noFill/>
+              <a:ln/>
+            </p:spPr>
+            <p:txBody>
+              <a:bodyPr wrap="square" lIns="0" tIns="0" rIns="0" bIns="0" rtlCol="0" anchor="ctr"/>
+              <a:lstStyle/>
+              <a:p>
+                <a:pPr marL="0" indent="0" algn="ctr">
+                  <a:buNone/>
+                </a:pPr>
+                <a:r>
+                  <a:rPr lang="en-US" sz="2400" b="1" dirty="0">
+                    <a:solidFill>
+                      <a:srgbClr val="0B5A72"/>
+                    </a:solidFill>
+                    <a:latin typeface="맑은 고딕" pitchFamily="34" charset="0"/>
+                    <a:ea typeface="맑은 고딕" pitchFamily="34" charset="-122"/>
+                    <a:cs typeface="맑은 고딕" pitchFamily="34" charset="-120"/>
+                  </a:rPr>
+                  <a:t>기준 대조</a:t>
+                </a:r>
+                <a:endParaRPr lang="en-US" sz="2400" dirty="0"/>
+              </a:p>
+            </p:txBody>
+          </p:sp>
+          <p:sp>
+            <p:nvSpPr>
+              <p:cNvPr id="15" name="Text 9"/>
+              <p:cNvSpPr/>
+              <p:nvPr/>
+            </p:nvSpPr>
+            <p:spPr>
+              <a:xfrm>
+                <a:off x="5394960" y="5232197"/>
+                <a:ext cx="932688" cy="256032"/>
+              </a:xfrm>
+              <a:prstGeom prst="rect">
+                <a:avLst/>
+              </a:prstGeom>
+              <a:noFill/>
+              <a:ln/>
+            </p:spPr>
+            <p:txBody>
+              <a:bodyPr wrap="square" lIns="0" tIns="0" rIns="0" bIns="0" rtlCol="0" anchor="ctr"/>
+              <a:lstStyle/>
+              <a:p>
+                <a:pPr marL="0" indent="0" algn="ctr">
+                  <a:buNone/>
+                </a:pPr>
+                <a:r>
+                  <a:rPr lang="en-US" sz="2400" b="1" dirty="0">
+                    <a:solidFill>
+                      <a:srgbClr val="0B5A72"/>
+                    </a:solidFill>
+                    <a:latin typeface="맑은 고딕" pitchFamily="34" charset="0"/>
+                    <a:ea typeface="맑은 고딕" pitchFamily="34" charset="-122"/>
+                    <a:cs typeface="맑은 고딕" pitchFamily="34" charset="-120"/>
+                  </a:rPr>
+                  <a:t>출처 추적</a:t>
+                </a:r>
+                <a:endParaRPr lang="en-US" sz="2400" dirty="0"/>
+              </a:p>
+            </p:txBody>
+          </p:sp>
+          <p:sp>
+            <p:nvSpPr>
+              <p:cNvPr id="17" name="Text 10"/>
+              <p:cNvSpPr/>
+              <p:nvPr/>
+            </p:nvSpPr>
+            <p:spPr>
+              <a:xfrm>
+                <a:off x="6455664" y="5232197"/>
+                <a:ext cx="932688" cy="256032"/>
+              </a:xfrm>
+              <a:prstGeom prst="rect">
+                <a:avLst/>
+              </a:prstGeom>
+              <a:noFill/>
+              <a:ln/>
+            </p:spPr>
+            <p:txBody>
+              <a:bodyPr wrap="square" lIns="0" tIns="0" rIns="0" bIns="0" rtlCol="0" anchor="ctr"/>
+              <a:lstStyle/>
+              <a:p>
+                <a:pPr marL="0" indent="0" algn="ctr">
+                  <a:buNone/>
+                </a:pPr>
+                <a:r>
+                  <a:rPr lang="en-US" sz="2400" b="1" dirty="0">
+                    <a:solidFill>
+                      <a:srgbClr val="0B5A72"/>
+                    </a:solidFill>
+                    <a:latin typeface="맑은 고딕" pitchFamily="34" charset="0"/>
+                    <a:ea typeface="맑은 고딕" pitchFamily="34" charset="-122"/>
+                    <a:cs typeface="맑은 고딕" pitchFamily="34" charset="-120"/>
+                  </a:rPr>
+                  <a:t>쉬운 말</a:t>
+                </a:r>
+                <a:endParaRPr lang="en-US" sz="2400" dirty="0"/>
+              </a:p>
+            </p:txBody>
+          </p:sp>
+        </p:grpSp>
+      </p:grpSp>
       <p:sp>
         <p:nvSpPr>
           <p:cNvPr id="18" name="Text 11"/>
@@ -3980,7 +3869,7 @@
           <a:bodyPr wrap="square" lIns="0" tIns="0" rIns="0" bIns="0" rtlCol="0" anchor="ctr"/>
           <a:lstStyle/>
           <a:p>
-            <a:pPr algn="r" indent="0" marL="0">
+            <a:pPr marL="0" indent="0" algn="r">
               <a:buNone/>
             </a:pPr>
             <a:r>
@@ -4014,6 +3903,7 @@
         <a:solidFill>
           <a:srgbClr val="F7F9FA"/>
         </a:solidFill>
+        <a:effectLst/>
       </p:bgPr>
     </p:bg>
     <p:spTree>
@@ -4051,7 +3941,7 @@
           <a:bodyPr wrap="square" lIns="0" tIns="0" rIns="0" bIns="0" rtlCol="0" anchor="ctr"/>
           <a:lstStyle/>
           <a:p>
-            <a:pPr algn="r" indent="0" marL="0">
+            <a:pPr marL="0" indent="0" algn="r">
               <a:buNone/>
             </a:pPr>
             <a:r>
@@ -4090,7 +3980,7 @@
           <a:bodyPr wrap="square" lIns="0" tIns="0" rIns="0" bIns="0" rtlCol="0" anchor="t"/>
           <a:lstStyle/>
           <a:p>
-            <a:pPr indent="0" marL="0">
+            <a:pPr marL="0" indent="0">
               <a:lnSpc>
                 <a:spcPct val="118000"/>
               </a:lnSpc>
@@ -4110,7 +4000,7 @@
             <a:endParaRPr lang="en-US" sz="2700" dirty="0"/>
           </a:p>
           <a:p>
-            <a:pPr indent="0" marL="0">
+            <a:pPr marL="0" indent="0">
               <a:lnSpc>
                 <a:spcPct val="118000"/>
               </a:lnSpc>
@@ -4157,6 +4047,13 @@
             <a:prstDash val="solid"/>
           </a:ln>
         </p:spPr>
+        <p:txBody>
+          <a:bodyPr/>
+          <a:lstStyle/>
+          <a:p>
+            <a:endParaRPr lang="ko-KR" altLang="en-US"/>
+          </a:p>
+        </p:txBody>
       </p:sp>
       <p:sp>
         <p:nvSpPr>
@@ -4179,7 +4076,7 @@
           <a:bodyPr wrap="square" lIns="0" tIns="0" rIns="0" bIns="0" rtlCol="0" anchor="ctr"/>
           <a:lstStyle/>
           <a:p>
-            <a:pPr indent="0" marL="0">
+            <a:pPr marL="0" indent="0">
               <a:buNone/>
             </a:pPr>
             <a:r>
@@ -4218,7 +4115,7 @@
           <a:bodyPr wrap="square" lIns="0" tIns="0" rIns="0" bIns="0" rtlCol="0" anchor="ctr"/>
           <a:lstStyle/>
           <a:p>
-            <a:pPr indent="0" marL="0">
+            <a:pPr marL="0" indent="0">
               <a:buNone/>
             </a:pPr>
             <a:r>
@@ -4262,6 +4159,13 @@
             <a:prstDash val="solid"/>
           </a:ln>
         </p:spPr>
+        <p:txBody>
+          <a:bodyPr/>
+          <a:lstStyle/>
+          <a:p>
+            <a:endParaRPr lang="ko-KR" altLang="en-US"/>
+          </a:p>
+        </p:txBody>
       </p:sp>
       <p:sp>
         <p:nvSpPr>
@@ -4284,7 +4188,7 @@
           <a:bodyPr wrap="square" lIns="0" tIns="0" rIns="0" bIns="0" rtlCol="0" anchor="ctr"/>
           <a:lstStyle/>
           <a:p>
-            <a:pPr algn="ctr" indent="0" marL="0">
+            <a:pPr marL="0" indent="0" algn="ctr">
               <a:buNone/>
             </a:pPr>
             <a:r>
@@ -4304,14 +4208,14 @@
       </p:sp>
       <p:pic>
         <p:nvPicPr>
-          <p:cNvPr id="9" name="Image 0" descr="D:/Projects/batboda/발표/캡처/20260805_C05_유방동870답_사과_과수등급.png">    </p:cNvPr>
+          <p:cNvPr id="9" name="Image 0" descr="D:/Projects/batboda/발표/캡처/20260805_C05_유방동870답_사과_과수등급.png"/>
           <p:cNvPicPr>
             <a:picLocks noChangeAspect="1"/>
           </p:cNvPicPr>
           <p:nvPr/>
         </p:nvPicPr>
         <p:blipFill>
-          <a:blip r:embed="rId1"/>
+          <a:blip r:embed="rId3"/>
           <a:stretch>
             <a:fillRect/>
           </a:stretch>
@@ -4347,7 +4251,7 @@
           <a:bodyPr wrap="square" lIns="0" tIns="0" rIns="0" bIns="0" rtlCol="0" anchor="ctr"/>
           <a:lstStyle/>
           <a:p>
-            <a:pPr indent="0" marL="0">
+            <a:pPr marL="0" indent="0">
               <a:buNone/>
             </a:pPr>
             <a:r>
@@ -4391,6 +4295,13 @@
             <a:prstDash val="solid"/>
           </a:ln>
         </p:spPr>
+        <p:txBody>
+          <a:bodyPr/>
+          <a:lstStyle/>
+          <a:p>
+            <a:endParaRPr lang="ko-KR" altLang="en-US"/>
+          </a:p>
+        </p:txBody>
       </p:sp>
       <p:sp>
         <p:nvSpPr>
@@ -4413,7 +4324,7 @@
           <a:bodyPr wrap="square" lIns="0" tIns="0" rIns="0" bIns="0" rtlCol="0" anchor="ctr"/>
           <a:lstStyle/>
           <a:p>
-            <a:pPr algn="ctr" indent="0" marL="0">
+            <a:pPr marL="0" indent="0" algn="ctr">
               <a:buNone/>
             </a:pPr>
             <a:r>
@@ -4433,14 +4344,14 @@
       </p:sp>
       <p:pic>
         <p:nvPicPr>
-          <p:cNvPr id="13" name="Image 1" descr="D:/Projects/batboda/발표/캡처/20260805_C06_유방동870답_상추_밭등급.png">    </p:cNvPr>
+          <p:cNvPr id="13" name="Image 1" descr="D:/Projects/batboda/발표/캡처/20260805_C06_유방동870답_상추_밭등급.png"/>
           <p:cNvPicPr>
             <a:picLocks noChangeAspect="1"/>
           </p:cNvPicPr>
           <p:nvPr/>
         </p:nvPicPr>
         <p:blipFill>
-          <a:blip r:embed="rId2"/>
+          <a:blip r:embed="rId4"/>
           <a:stretch>
             <a:fillRect/>
           </a:stretch>
@@ -4476,7 +4387,7 @@
           <a:bodyPr wrap="square" lIns="0" tIns="0" rIns="0" bIns="0" rtlCol="0" anchor="ctr"/>
           <a:lstStyle/>
           <a:p>
-            <a:pPr indent="0" marL="0">
+            <a:pPr marL="0" indent="0">
               <a:buNone/>
             </a:pPr>
             <a:r>
@@ -4515,7 +4426,7 @@
           <a:bodyPr wrap="square" lIns="0" tIns="0" rIns="0" bIns="0" rtlCol="0" anchor="ctr"/>
           <a:lstStyle/>
           <a:p>
-            <a:pPr algn="r" indent="0" marL="0">
+            <a:pPr marL="0" indent="0" algn="r">
               <a:buNone/>
             </a:pPr>
             <a:r>
@@ -4549,6 +4460,7 @@
         <a:solidFill>
           <a:srgbClr val="F7F9FA"/>
         </a:solidFill>
+        <a:effectLst/>
       </p:bgPr>
     </p:bg>
     <p:spTree>
@@ -4586,7 +4498,7 @@
           <a:bodyPr wrap="square" lIns="0" tIns="0" rIns="0" bIns="0" rtlCol="0" anchor="ctr"/>
           <a:lstStyle/>
           <a:p>
-            <a:pPr algn="r" indent="0" marL="0">
+            <a:pPr marL="0" indent="0" algn="r">
               <a:buNone/>
             </a:pPr>
             <a:r>
@@ -4625,7 +4537,7 @@
           <a:bodyPr wrap="square" lIns="0" tIns="0" rIns="0" bIns="0" rtlCol="0" anchor="t"/>
           <a:lstStyle/>
           <a:p>
-            <a:pPr indent="0" marL="0">
+            <a:pPr marL="0" indent="0">
               <a:lnSpc>
                 <a:spcPct val="118000"/>
               </a:lnSpc>
@@ -4667,7 +4579,7 @@
           <a:bodyPr wrap="square" lIns="0" tIns="0" rIns="0" bIns="0" rtlCol="0" anchor="ctr"/>
           <a:lstStyle/>
           <a:p>
-            <a:pPr indent="0" marL="0">
+            <a:pPr marL="0" indent="0">
               <a:buNone/>
             </a:pPr>
             <a:r>
@@ -4687,21 +4599,21 @@
       </p:sp>
       <p:pic>
         <p:nvPicPr>
-          <p:cNvPr id="5" name="Image 0" descr="D:/Projects/batboda/발표/캡처/20260805_C07_04_상단_결론과근거.png">    </p:cNvPr>
+          <p:cNvPr id="5" name="Image 0" descr="D:/Projects/batboda/발표/캡처/20260805_C07_04_상단_결론과근거.png"/>
           <p:cNvPicPr>
             <a:picLocks noChangeAspect="1"/>
           </p:cNvPicPr>
           <p:nvPr/>
         </p:nvPicPr>
         <p:blipFill>
-          <a:blip r:embed="rId1"/>
+          <a:blip r:embed="rId3"/>
           <a:stretch>
             <a:fillRect/>
           </a:stretch>
         </p:blipFill>
         <p:spPr>
           <a:xfrm>
-            <a:off x="2061709" y="2231136"/>
+            <a:off x="590112" y="2286000"/>
             <a:ext cx="3914158" cy="3054096"/>
           </a:xfrm>
           <a:prstGeom prst="rect">
@@ -4711,22 +4623,22 @@
       </p:pic>
       <p:pic>
         <p:nvPicPr>
-          <p:cNvPr id="6" name="Image 1" descr="D:/Projects/batboda/발표/캡처/20260805_C08_설명생성_5단계.png">    </p:cNvPr>
+          <p:cNvPr id="6" name="Image 1" descr="D:/Projects/batboda/발표/캡처/20260805_C08_설명생성_5단계.png"/>
           <p:cNvPicPr>
             <a:picLocks noChangeAspect="1"/>
           </p:cNvPicPr>
           <p:nvPr/>
         </p:nvPicPr>
         <p:blipFill>
-          <a:blip r:embed="rId2"/>
+          <a:blip r:embed="rId4"/>
           <a:stretch>
             <a:fillRect/>
           </a:stretch>
         </p:blipFill>
         <p:spPr>
           <a:xfrm>
-            <a:off x="7699248" y="3272762"/>
-            <a:ext cx="3931920" cy="970844"/>
+            <a:off x="4504270" y="3272761"/>
+            <a:ext cx="7126898" cy="1759727"/>
           </a:xfrm>
           <a:prstGeom prst="rect">
             <a:avLst/>
@@ -4759,6 +4671,13 @@
             <a:prstDash val="solid"/>
           </a:ln>
         </p:spPr>
+        <p:txBody>
+          <a:bodyPr/>
+          <a:lstStyle/>
+          <a:p>
+            <a:endParaRPr lang="ko-KR" altLang="en-US"/>
+          </a:p>
+        </p:txBody>
       </p:sp>
       <p:sp>
         <p:nvSpPr>
@@ -4781,7 +4700,7 @@
           <a:bodyPr wrap="square" lIns="0" tIns="0" rIns="0" bIns="0" rtlCol="0" anchor="ctr"/>
           <a:lstStyle/>
           <a:p>
-            <a:pPr indent="0" marL="0">
+            <a:pPr marL="0" indent="0">
               <a:buNone/>
             </a:pPr>
             <a:r>
@@ -4820,7 +4739,7 @@
           <a:bodyPr wrap="square" lIns="0" tIns="0" rIns="0" bIns="0" rtlCol="0" anchor="ctr"/>
           <a:lstStyle/>
           <a:p>
-            <a:pPr indent="0" marL="0">
+            <a:pPr marL="0" indent="0">
               <a:buNone/>
             </a:pPr>
             <a:r>
@@ -4859,7 +4778,7 @@
           <a:bodyPr wrap="square" lIns="0" tIns="0" rIns="0" bIns="0" rtlCol="0" anchor="ctr"/>
           <a:lstStyle/>
           <a:p>
-            <a:pPr algn="r" indent="0" marL="0">
+            <a:pPr marL="0" indent="0" algn="r">
               <a:buNone/>
             </a:pPr>
             <a:r>
@@ -4893,6 +4812,7 @@
         <a:solidFill>
           <a:srgbClr val="F7F9FA"/>
         </a:solidFill>
+        <a:effectLst/>
       </p:bgPr>
     </p:bg>
     <p:spTree>
@@ -4930,7 +4850,7 @@
           <a:bodyPr wrap="square" lIns="0" tIns="0" rIns="0" bIns="0" rtlCol="0" anchor="ctr"/>
           <a:lstStyle/>
           <a:p>
-            <a:pPr algn="r" indent="0" marL="0">
+            <a:pPr marL="0" indent="0" algn="r">
               <a:buNone/>
             </a:pPr>
             <a:r>
@@ -4969,7 +4889,7 @@
           <a:bodyPr wrap="square" lIns="0" tIns="0" rIns="0" bIns="0" rtlCol="0" anchor="t"/>
           <a:lstStyle/>
           <a:p>
-            <a:pPr indent="0" marL="0">
+            <a:pPr marL="0" indent="0">
               <a:lnSpc>
                 <a:spcPct val="118000"/>
               </a:lnSpc>
@@ -4989,7 +4909,7 @@
             <a:endParaRPr lang="en-US" sz="2800" dirty="0"/>
           </a:p>
           <a:p>
-            <a:pPr indent="0" marL="0">
+            <a:pPr marL="0" indent="0">
               <a:lnSpc>
                 <a:spcPct val="118000"/>
               </a:lnSpc>
@@ -5031,7 +4951,7 @@
           <a:bodyPr wrap="square" lIns="0" tIns="0" rIns="0" bIns="0" rtlCol="0" anchor="ctr"/>
           <a:lstStyle/>
           <a:p>
-            <a:pPr indent="0" marL="0">
+            <a:pPr marL="0" indent="0">
               <a:buNone/>
             </a:pPr>
             <a:r>
@@ -5058,7 +4978,7 @@
         <p:spPr>
           <a:xfrm>
             <a:off x="566928" y="2286000"/>
-            <a:ext cx="4114800" cy="713232"/>
+            <a:ext cx="3806787" cy="713232"/>
           </a:xfrm>
           <a:prstGeom prst="roundRect">
             <a:avLst>
@@ -5075,6 +4995,13 @@
             <a:prstDash val="solid"/>
           </a:ln>
         </p:spPr>
+        <p:txBody>
+          <a:bodyPr/>
+          <a:lstStyle/>
+          <a:p>
+            <a:endParaRPr lang="ko-KR" altLang="en-US"/>
+          </a:p>
+        </p:txBody>
       </p:sp>
       <p:sp>
         <p:nvSpPr>
@@ -5084,8 +5011,8 @@
         </p:nvSpPr>
         <p:spPr>
           <a:xfrm>
-            <a:off x="768096" y="2359152"/>
-            <a:ext cx="3749040" cy="274320"/>
+            <a:off x="768095" y="2359152"/>
+            <a:ext cx="3468405" cy="274320"/>
           </a:xfrm>
           <a:prstGeom prst="rect">
             <a:avLst/>
@@ -5097,7 +5024,7 @@
           <a:bodyPr wrap="square" lIns="0" tIns="0" rIns="0" bIns="0" rtlCol="0" anchor="ctr"/>
           <a:lstStyle/>
           <a:p>
-            <a:pPr indent="0" marL="0">
+            <a:pPr marL="0" indent="0">
               <a:buNone/>
             </a:pPr>
             <a:r>
@@ -5123,8 +5050,8 @@
         </p:nvSpPr>
         <p:spPr>
           <a:xfrm>
-            <a:off x="768096" y="2651760"/>
-            <a:ext cx="3749040" cy="256032"/>
+            <a:off x="768095" y="2651760"/>
+            <a:ext cx="3468405" cy="256032"/>
           </a:xfrm>
           <a:prstGeom prst="rect">
             <a:avLst/>
@@ -5136,7 +5063,7 @@
           <a:bodyPr wrap="square" lIns="0" tIns="0" rIns="0" bIns="0" rtlCol="0" anchor="ctr"/>
           <a:lstStyle/>
           <a:p>
-            <a:pPr indent="0" marL="0">
+            <a:pPr marL="0" indent="0">
               <a:buNone/>
             </a:pPr>
             <a:r>
@@ -5163,7 +5090,7 @@
         <p:spPr>
           <a:xfrm>
             <a:off x="566928" y="3163824"/>
-            <a:ext cx="4114800" cy="713232"/>
+            <a:ext cx="3806787" cy="713232"/>
           </a:xfrm>
           <a:prstGeom prst="roundRect">
             <a:avLst>
@@ -5180,6 +5107,13 @@
             <a:prstDash val="solid"/>
           </a:ln>
         </p:spPr>
+        <p:txBody>
+          <a:bodyPr/>
+          <a:lstStyle/>
+          <a:p>
+            <a:endParaRPr lang="ko-KR" altLang="en-US"/>
+          </a:p>
+        </p:txBody>
       </p:sp>
       <p:sp>
         <p:nvSpPr>
@@ -5189,8 +5123,8 @@
         </p:nvSpPr>
         <p:spPr>
           <a:xfrm>
-            <a:off x="768096" y="3236976"/>
-            <a:ext cx="3749040" cy="274320"/>
+            <a:off x="768095" y="3236976"/>
+            <a:ext cx="3468405" cy="274320"/>
           </a:xfrm>
           <a:prstGeom prst="rect">
             <a:avLst/>
@@ -5202,7 +5136,7 @@
           <a:bodyPr wrap="square" lIns="0" tIns="0" rIns="0" bIns="0" rtlCol="0" anchor="ctr"/>
           <a:lstStyle/>
           <a:p>
-            <a:pPr indent="0" marL="0">
+            <a:pPr marL="0" indent="0">
               <a:buNone/>
             </a:pPr>
             <a:r>
@@ -5228,8 +5162,8 @@
         </p:nvSpPr>
         <p:spPr>
           <a:xfrm>
-            <a:off x="768096" y="3529584"/>
-            <a:ext cx="3749040" cy="256032"/>
+            <a:off x="768095" y="3529584"/>
+            <a:ext cx="3468405" cy="256032"/>
           </a:xfrm>
           <a:prstGeom prst="rect">
             <a:avLst/>
@@ -5241,7 +5175,7 @@
           <a:bodyPr wrap="square" lIns="0" tIns="0" rIns="0" bIns="0" rtlCol="0" anchor="ctr"/>
           <a:lstStyle/>
           <a:p>
-            <a:pPr indent="0" marL="0">
+            <a:pPr marL="0" indent="0">
               <a:buNone/>
             </a:pPr>
             <a:r>
@@ -5268,7 +5202,7 @@
         <p:spPr>
           <a:xfrm>
             <a:off x="566928" y="4041648"/>
-            <a:ext cx="4114800" cy="713232"/>
+            <a:ext cx="3806787" cy="713232"/>
           </a:xfrm>
           <a:prstGeom prst="roundRect">
             <a:avLst>
@@ -5285,6 +5219,13 @@
             <a:prstDash val="solid"/>
           </a:ln>
         </p:spPr>
+        <p:txBody>
+          <a:bodyPr/>
+          <a:lstStyle/>
+          <a:p>
+            <a:endParaRPr lang="ko-KR" altLang="en-US"/>
+          </a:p>
+        </p:txBody>
       </p:sp>
       <p:sp>
         <p:nvSpPr>
@@ -5294,8 +5235,8 @@
         </p:nvSpPr>
         <p:spPr>
           <a:xfrm>
-            <a:off x="768096" y="4114800"/>
-            <a:ext cx="3749040" cy="274320"/>
+            <a:off x="768095" y="4114800"/>
+            <a:ext cx="3468405" cy="274320"/>
           </a:xfrm>
           <a:prstGeom prst="rect">
             <a:avLst/>
@@ -5307,7 +5248,7 @@
           <a:bodyPr wrap="square" lIns="0" tIns="0" rIns="0" bIns="0" rtlCol="0" anchor="ctr"/>
           <a:lstStyle/>
           <a:p>
-            <a:pPr indent="0" marL="0">
+            <a:pPr marL="0" indent="0">
               <a:buNone/>
             </a:pPr>
             <a:r>
@@ -5333,8 +5274,8 @@
         </p:nvSpPr>
         <p:spPr>
           <a:xfrm>
-            <a:off x="768096" y="4407408"/>
-            <a:ext cx="3749040" cy="256032"/>
+            <a:off x="768095" y="4407408"/>
+            <a:ext cx="3468405" cy="256032"/>
           </a:xfrm>
           <a:prstGeom prst="rect">
             <a:avLst/>
@@ -5346,7 +5287,7 @@
           <a:bodyPr wrap="square" lIns="0" tIns="0" rIns="0" bIns="0" rtlCol="0" anchor="ctr"/>
           <a:lstStyle/>
           <a:p>
-            <a:pPr indent="0" marL="0">
+            <a:pPr marL="0" indent="0">
               <a:buNone/>
             </a:pPr>
             <a:r>
@@ -5366,22 +5307,22 @@
       </p:sp>
       <p:pic>
         <p:nvPicPr>
-          <p:cNvPr id="14" name="Image 0" descr="D:/Projects/batboda/발표/캡처/20260805_C04b_상태_기준시각.png">    </p:cNvPr>
+          <p:cNvPr id="14" name="Image 0" descr="D:/Projects/batboda/발표/캡처/20260805_C04b_상태_기준시각.png"/>
           <p:cNvPicPr>
             <a:picLocks noChangeAspect="1"/>
           </p:cNvPicPr>
           <p:nvPr/>
         </p:nvPicPr>
         <p:blipFill>
-          <a:blip r:embed="rId1"/>
+          <a:blip r:embed="rId3"/>
           <a:stretch>
             <a:fillRect/>
           </a:stretch>
         </p:blipFill>
         <p:spPr>
           <a:xfrm>
-            <a:off x="4901184" y="1956958"/>
-            <a:ext cx="3017520" cy="4132804"/>
+            <a:off x="4532529" y="1956957"/>
+            <a:ext cx="3386175" cy="4637715"/>
           </a:xfrm>
           <a:prstGeom prst="rect">
             <a:avLst/>
@@ -5414,6 +5355,13 @@
             <a:prstDash val="solid"/>
           </a:ln>
         </p:spPr>
+        <p:txBody>
+          <a:bodyPr/>
+          <a:lstStyle/>
+          <a:p>
+            <a:endParaRPr lang="ko-KR" altLang="en-US"/>
+          </a:p>
+        </p:txBody>
       </p:sp>
       <p:sp>
         <p:nvSpPr>
@@ -5436,7 +5384,7 @@
           <a:bodyPr wrap="square" lIns="0" tIns="0" rIns="0" bIns="0" rtlCol="0" anchor="t"/>
           <a:lstStyle/>
           <a:p>
-            <a:pPr indent="0" marL="0">
+            <a:pPr marL="0" indent="0">
               <a:lnSpc>
                 <a:spcPct val="120000"/>
               </a:lnSpc>
@@ -5456,7 +5404,7 @@
             <a:endParaRPr lang="en-US" sz="1400" dirty="0"/>
           </a:p>
           <a:p>
-            <a:pPr indent="0" marL="0">
+            <a:pPr marL="0" indent="0">
               <a:lnSpc>
                 <a:spcPct val="120000"/>
               </a:lnSpc>
@@ -5498,7 +5446,7 @@
           <a:bodyPr wrap="square" lIns="0" tIns="0" rIns="0" bIns="0" rtlCol="0" anchor="t"/>
           <a:lstStyle/>
           <a:p>
-            <a:pPr indent="0" marL="0">
+            <a:pPr marL="0" indent="0">
               <a:lnSpc>
                 <a:spcPct val="125000"/>
               </a:lnSpc>
@@ -5540,7 +5488,7 @@
           <a:bodyPr wrap="square" lIns="0" tIns="0" rIns="0" bIns="0" rtlCol="0" anchor="t"/>
           <a:lstStyle/>
           <a:p>
-            <a:pPr indent="0" marL="0">
+            <a:pPr marL="0" indent="0">
               <a:lnSpc>
                 <a:spcPct val="125000"/>
               </a:lnSpc>
@@ -5582,7 +5530,7 @@
           <a:bodyPr wrap="square" lIns="0" tIns="0" rIns="0" bIns="0" rtlCol="0" anchor="ctr"/>
           <a:lstStyle/>
           <a:p>
-            <a:pPr algn="r" indent="0" marL="0">
+            <a:pPr marL="0" indent="0" algn="r">
               <a:buNone/>
             </a:pPr>
             <a:r>
@@ -5616,6 +5564,7 @@
         <a:solidFill>
           <a:srgbClr val="F7F9FA"/>
         </a:solidFill>
+        <a:effectLst/>
       </p:bgPr>
     </p:bg>
     <p:spTree>
@@ -5653,7 +5602,7 @@
           <a:bodyPr wrap="square" lIns="0" tIns="0" rIns="0" bIns="0" rtlCol="0" anchor="ctr"/>
           <a:lstStyle/>
           <a:p>
-            <a:pPr algn="r" indent="0" marL="0">
+            <a:pPr marL="0" indent="0" algn="r">
               <a:buNone/>
             </a:pPr>
             <a:r>
@@ -5692,7 +5641,7 @@
           <a:bodyPr wrap="square" lIns="0" tIns="0" rIns="0" bIns="0" rtlCol="0" anchor="t"/>
           <a:lstStyle/>
           <a:p>
-            <a:pPr indent="0" marL="0">
+            <a:pPr marL="0" indent="0">
               <a:lnSpc>
                 <a:spcPct val="118000"/>
               </a:lnSpc>
@@ -5734,7 +5683,7 @@
           <a:bodyPr wrap="square" lIns="0" tIns="0" rIns="0" bIns="0" rtlCol="0" anchor="ctr"/>
           <a:lstStyle/>
           <a:p>
-            <a:pPr indent="0" marL="0">
+            <a:pPr marL="0" indent="0">
               <a:buNone/>
             </a:pPr>
             <a:r>
@@ -5773,7 +5722,7 @@
           <a:bodyPr wrap="square" lIns="0" tIns="0" rIns="0" bIns="0" rtlCol="0" anchor="ctr"/>
           <a:lstStyle/>
           <a:p>
-            <a:pPr indent="0" marL="0">
+            <a:pPr marL="0" indent="0">
               <a:buNone/>
             </a:pPr>
             <a:r>
@@ -5812,7 +5761,7 @@
           <a:bodyPr wrap="square" lIns="0" tIns="0" rIns="0" bIns="0" rtlCol="0" anchor="ctr"/>
           <a:lstStyle/>
           <a:p>
-            <a:pPr indent="0" marL="0">
+            <a:pPr marL="0" indent="0">
               <a:buNone/>
             </a:pPr>
             <a:r>
@@ -5851,7 +5800,7 @@
           <a:bodyPr wrap="square" lIns="0" tIns="0" rIns="0" bIns="0" rtlCol="0" anchor="ctr"/>
           <a:lstStyle/>
           <a:p>
-            <a:pPr indent="0" marL="0">
+            <a:pPr marL="0" indent="0">
               <a:buNone/>
             </a:pPr>
             <a:r>
@@ -5890,7 +5839,7 @@
           <a:bodyPr wrap="square" lIns="0" tIns="0" rIns="0" bIns="0" rtlCol="0" anchor="ctr"/>
           <a:lstStyle/>
           <a:p>
-            <a:pPr indent="0" marL="0">
+            <a:pPr marL="0" indent="0">
               <a:buNone/>
             </a:pPr>
             <a:r>
@@ -5929,7 +5878,7 @@
           <a:bodyPr wrap="square" lIns="0" tIns="0" rIns="0" bIns="0" rtlCol="0" anchor="ctr"/>
           <a:lstStyle/>
           <a:p>
-            <a:pPr indent="0" marL="0">
+            <a:pPr marL="0" indent="0">
               <a:buNone/>
             </a:pPr>
             <a:r>
@@ -5968,7 +5917,7 @@
           <a:bodyPr wrap="square" lIns="0" tIns="0" rIns="0" bIns="0" rtlCol="0" anchor="t"/>
           <a:lstStyle/>
           <a:p>
-            <a:pPr indent="0" marL="0">
+            <a:pPr marL="0" indent="0">
               <a:lnSpc>
                 <a:spcPct val="130000"/>
               </a:lnSpc>
@@ -5991,22 +5940,23 @@
       </p:sp>
       <p:pic>
         <p:nvPicPr>
-          <p:cNvPr id="11" name="Image 0" descr="D:/Projects/batboda/발표/캡처/20260805_C09_내농지_즐겨찾기.png">    </p:cNvPr>
+          <p:cNvPr id="11" name="Image 0" descr="D:/Projects/batboda/발표/캡처/20260805_C09_내농지_즐겨찾기.png"/>
           <p:cNvPicPr>
             <a:picLocks noChangeAspect="1"/>
           </p:cNvPicPr>
           <p:nvPr/>
         </p:nvPicPr>
         <p:blipFill>
-          <a:blip r:embed="rId1"/>
+          <a:blip r:embed="rId3"/>
+          <a:srcRect r="51091"/>
           <a:stretch>
             <a:fillRect/>
           </a:stretch>
         </p:blipFill>
         <p:spPr>
           <a:xfrm>
-            <a:off x="5175504" y="2907731"/>
-            <a:ext cx="6455664" cy="987674"/>
+            <a:off x="5175504" y="2130552"/>
+            <a:ext cx="5641930" cy="1764853"/>
           </a:xfrm>
           <a:prstGeom prst="rect">
             <a:avLst/>
@@ -6039,6 +5989,13 @@
             <a:prstDash val="solid"/>
           </a:ln>
         </p:spPr>
+        <p:txBody>
+          <a:bodyPr/>
+          <a:lstStyle/>
+          <a:p>
+            <a:endParaRPr lang="ko-KR" altLang="en-US"/>
+          </a:p>
+        </p:txBody>
       </p:sp>
       <p:sp>
         <p:nvSpPr>
@@ -6066,6 +6023,13 @@
             <a:prstDash val="solid"/>
           </a:ln>
         </p:spPr>
+        <p:txBody>
+          <a:bodyPr/>
+          <a:lstStyle/>
+          <a:p>
+            <a:endParaRPr lang="ko-KR" altLang="en-US"/>
+          </a:p>
+        </p:txBody>
       </p:sp>
       <p:sp>
         <p:nvSpPr>
@@ -6088,7 +6052,7 @@
           <a:bodyPr wrap="square" lIns="0" tIns="0" rIns="0" bIns="0" rtlCol="0" anchor="ctr"/>
           <a:lstStyle/>
           <a:p>
-            <a:pPr algn="ctr" indent="0" marL="0">
+            <a:pPr marL="0" indent="0" algn="ctr">
               <a:buNone/>
             </a:pPr>
             <a:r>
@@ -6127,7 +6091,7 @@
           <a:bodyPr wrap="square" lIns="0" tIns="0" rIns="0" bIns="0" rtlCol="0" anchor="t"/>
           <a:lstStyle/>
           <a:p>
-            <a:pPr indent="0" marL="0">
+            <a:pPr marL="0" indent="0">
               <a:lnSpc>
                 <a:spcPct val="130000"/>
               </a:lnSpc>
@@ -6169,7 +6133,7 @@
           <a:bodyPr wrap="square" lIns="0" tIns="0" rIns="0" bIns="0" rtlCol="0" anchor="ctr"/>
           <a:lstStyle/>
           <a:p>
-            <a:pPr algn="r" indent="0" marL="0">
+            <a:pPr marL="0" indent="0" algn="r">
               <a:buNone/>
             </a:pPr>
             <a:r>
@@ -6203,6 +6167,7 @@
         <a:solidFill>
           <a:srgbClr val="F7F9FA"/>
         </a:solidFill>
+        <a:effectLst/>
       </p:bgPr>
     </p:bg>
     <p:spTree>
@@ -6240,7 +6205,7 @@
           <a:bodyPr wrap="square" lIns="0" tIns="0" rIns="0" bIns="0" rtlCol="0" anchor="ctr"/>
           <a:lstStyle/>
           <a:p>
-            <a:pPr algn="r" indent="0" marL="0">
+            <a:pPr marL="0" indent="0" algn="r">
               <a:buNone/>
             </a:pPr>
             <a:r>
@@ -6279,7 +6244,7 @@
           <a:bodyPr wrap="square" lIns="0" tIns="0" rIns="0" bIns="0" rtlCol="0" anchor="t"/>
           <a:lstStyle/>
           <a:p>
-            <a:pPr indent="0" marL="0">
+            <a:pPr marL="0" indent="0">
               <a:lnSpc>
                 <a:spcPct val="118000"/>
               </a:lnSpc>
@@ -6309,7 +6274,7 @@
         <p:spPr>
           <a:xfrm>
             <a:off x="566928" y="2157984"/>
-            <a:ext cx="6675120" cy="896112"/>
+            <a:ext cx="4215581" cy="896112"/>
           </a:xfrm>
           <a:prstGeom prst="roundRect">
             <a:avLst>
@@ -6326,6 +6291,13 @@
             <a:prstDash val="solid"/>
           </a:ln>
         </p:spPr>
+        <p:txBody>
+          <a:bodyPr/>
+          <a:lstStyle/>
+          <a:p>
+            <a:endParaRPr lang="ko-KR" altLang="en-US"/>
+          </a:p>
+        </p:txBody>
       </p:sp>
       <p:sp>
         <p:nvSpPr>
@@ -6348,7 +6320,7 @@
           <a:bodyPr wrap="square" lIns="0" tIns="0" rIns="0" bIns="0" rtlCol="0" anchor="ctr"/>
           <a:lstStyle/>
           <a:p>
-            <a:pPr indent="0" marL="0">
+            <a:pPr marL="0" indent="0">
               <a:buNone/>
             </a:pPr>
             <a:r>
@@ -6387,7 +6359,7 @@
           <a:bodyPr wrap="square" lIns="0" tIns="0" rIns="0" bIns="0" rtlCol="0" anchor="ctr"/>
           <a:lstStyle/>
           <a:p>
-            <a:pPr indent="0" marL="0">
+            <a:pPr marL="0" indent="0">
               <a:buNone/>
             </a:pPr>
             <a:r>
@@ -6426,7 +6398,7 @@
           <a:bodyPr wrap="square" lIns="0" tIns="0" rIns="0" bIns="0" rtlCol="0" anchor="ctr"/>
           <a:lstStyle/>
           <a:p>
-            <a:pPr indent="0" marL="0">
+            <a:pPr marL="0" indent="0">
               <a:buNone/>
             </a:pPr>
             <a:r>
@@ -6453,7 +6425,7 @@
         <p:spPr>
           <a:xfrm>
             <a:off x="566928" y="3200400"/>
-            <a:ext cx="6675120" cy="896112"/>
+            <a:ext cx="5031305" cy="896112"/>
           </a:xfrm>
           <a:prstGeom prst="roundRect">
             <a:avLst>
@@ -6470,6 +6442,13 @@
             <a:prstDash val="solid"/>
           </a:ln>
         </p:spPr>
+        <p:txBody>
+          <a:bodyPr/>
+          <a:lstStyle/>
+          <a:p>
+            <a:endParaRPr lang="ko-KR" altLang="en-US"/>
+          </a:p>
+        </p:txBody>
       </p:sp>
       <p:sp>
         <p:nvSpPr>
@@ -6492,7 +6471,7 @@
           <a:bodyPr wrap="square" lIns="0" tIns="0" rIns="0" bIns="0" rtlCol="0" anchor="ctr"/>
           <a:lstStyle/>
           <a:p>
-            <a:pPr indent="0" marL="0">
+            <a:pPr marL="0" indent="0">
               <a:buNone/>
             </a:pPr>
             <a:r>
@@ -6531,7 +6510,7 @@
           <a:bodyPr wrap="square" lIns="0" tIns="0" rIns="0" bIns="0" rtlCol="0" anchor="ctr"/>
           <a:lstStyle/>
           <a:p>
-            <a:pPr indent="0" marL="0">
+            <a:pPr marL="0" indent="0">
               <a:buNone/>
             </a:pPr>
             <a:r>
@@ -6570,7 +6549,7 @@
           <a:bodyPr wrap="square" lIns="0" tIns="0" rIns="0" bIns="0" rtlCol="0" anchor="ctr"/>
           <a:lstStyle/>
           <a:p>
-            <a:pPr indent="0" marL="0">
+            <a:pPr marL="0" indent="0">
               <a:buNone/>
             </a:pPr>
             <a:r>
@@ -6597,7 +6576,7 @@
         <p:spPr>
           <a:xfrm>
             <a:off x="566928" y="4242816"/>
-            <a:ext cx="6675120" cy="896112"/>
+            <a:ext cx="5820715" cy="896112"/>
           </a:xfrm>
           <a:prstGeom prst="roundRect">
             <a:avLst>
@@ -6614,6 +6593,13 @@
             <a:prstDash val="solid"/>
           </a:ln>
         </p:spPr>
+        <p:txBody>
+          <a:bodyPr/>
+          <a:lstStyle/>
+          <a:p>
+            <a:endParaRPr lang="ko-KR" altLang="en-US"/>
+          </a:p>
+        </p:txBody>
       </p:sp>
       <p:sp>
         <p:nvSpPr>
@@ -6636,7 +6622,7 @@
           <a:bodyPr wrap="square" lIns="0" tIns="0" rIns="0" bIns="0" rtlCol="0" anchor="ctr"/>
           <a:lstStyle/>
           <a:p>
-            <a:pPr indent="0" marL="0">
+            <a:pPr marL="0" indent="0">
               <a:buNone/>
             </a:pPr>
             <a:r>
@@ -6675,7 +6661,7 @@
           <a:bodyPr wrap="square" lIns="0" tIns="0" rIns="0" bIns="0" rtlCol="0" anchor="ctr"/>
           <a:lstStyle/>
           <a:p>
-            <a:pPr indent="0" marL="0">
+            <a:pPr marL="0" indent="0">
               <a:buNone/>
             </a:pPr>
             <a:r>
@@ -6714,7 +6700,7 @@
           <a:bodyPr wrap="square" lIns="0" tIns="0" rIns="0" bIns="0" rtlCol="0" anchor="ctr"/>
           <a:lstStyle/>
           <a:p>
-            <a:pPr indent="0" marL="0">
+            <a:pPr marL="0" indent="0">
               <a:buNone/>
             </a:pPr>
             <a:r>
@@ -6753,7 +6739,7 @@
           <a:bodyPr wrap="square" lIns="0" tIns="0" rIns="0" bIns="0" rtlCol="0" anchor="ctr"/>
           <a:lstStyle/>
           <a:p>
-            <a:pPr indent="0" marL="0">
+            <a:pPr marL="0" indent="0">
               <a:buNone/>
             </a:pPr>
             <a:r>
@@ -6773,22 +6759,22 @@
       </p:sp>
       <p:pic>
         <p:nvPicPr>
-          <p:cNvPr id="17" name="Image 0" descr="D:/Projects/batboda/발표/캡처/20260805_C10_최근관측_관측소거리.png">    </p:cNvPr>
+          <p:cNvPr id="17" name="Image 0" descr="D:/Projects/batboda/발표/캡처/20260805_C10_최근관측_관측소거리.png"/>
           <p:cNvPicPr>
             <a:picLocks noChangeAspect="1"/>
           </p:cNvPicPr>
           <p:nvPr/>
         </p:nvPicPr>
         <p:blipFill>
-          <a:blip r:embed="rId1"/>
+          <a:blip r:embed="rId3"/>
           <a:stretch>
             <a:fillRect/>
           </a:stretch>
         </p:blipFill>
         <p:spPr>
           <a:xfrm>
-            <a:off x="7461504" y="2597970"/>
-            <a:ext cx="4169664" cy="692796"/>
+            <a:off x="5804017" y="2141307"/>
+            <a:ext cx="5827151" cy="968190"/>
           </a:xfrm>
           <a:prstGeom prst="rect">
             <a:avLst/>
@@ -6797,22 +6783,22 @@
       </p:pic>
       <p:pic>
         <p:nvPicPr>
-          <p:cNvPr id="18" name="Image 1" descr="D:/Projects/batboda/발표/캡처/20260805_C11_현재판정방식.png">    </p:cNvPr>
+          <p:cNvPr id="18" name="Image 1" descr="D:/Projects/batboda/발표/캡처/20260805_C11_현재판정방식.png"/>
           <p:cNvPicPr>
             <a:picLocks noChangeAspect="1"/>
           </p:cNvPicPr>
           <p:nvPr/>
         </p:nvPicPr>
         <p:blipFill>
-          <a:blip r:embed="rId2"/>
+          <a:blip r:embed="rId4"/>
           <a:stretch>
             <a:fillRect/>
           </a:stretch>
         </p:blipFill>
         <p:spPr>
           <a:xfrm>
-            <a:off x="7461504" y="3882475"/>
-            <a:ext cx="4169664" cy="1763099"/>
+            <a:off x="6742878" y="3264408"/>
+            <a:ext cx="4888290" cy="2066963"/>
           </a:xfrm>
           <a:prstGeom prst="rect">
             <a:avLst/>
@@ -6840,7 +6826,7 @@
           <a:bodyPr wrap="square" lIns="0" tIns="0" rIns="0" bIns="0" rtlCol="0" anchor="ctr"/>
           <a:lstStyle/>
           <a:p>
-            <a:pPr algn="r" indent="0" marL="0">
+            <a:pPr marL="0" indent="0" algn="r">
               <a:buNone/>
             </a:pPr>
             <a:r>
@@ -7159,4 +7145,319 @@
     </a:ext>
   </a:extLst>
 </a:theme>
+</file>
+
+<file path=ppt/theme/theme2.xml><?xml version="1.0" encoding="utf-8"?>
+<a:theme xmlns:a="http://schemas.openxmlformats.org/drawingml/2006/main" name="Office 테마">
+  <a:themeElements>
+    <a:clrScheme name="Office">
+      <a:dk1>
+        <a:sysClr val="windowText" lastClr="000000"/>
+      </a:dk1>
+      <a:lt1>
+        <a:sysClr val="window" lastClr="FFFFFF"/>
+      </a:lt1>
+      <a:dk2>
+        <a:srgbClr val="0E2841"/>
+      </a:dk2>
+      <a:lt2>
+        <a:srgbClr val="E8E8E8"/>
+      </a:lt2>
+      <a:accent1>
+        <a:srgbClr val="156082"/>
+      </a:accent1>
+      <a:accent2>
+        <a:srgbClr val="E97132"/>
+      </a:accent2>
+      <a:accent3>
+        <a:srgbClr val="196B24"/>
+      </a:accent3>
+      <a:accent4>
+        <a:srgbClr val="0F9ED5"/>
+      </a:accent4>
+      <a:accent5>
+        <a:srgbClr val="A02B93"/>
+      </a:accent5>
+      <a:accent6>
+        <a:srgbClr val="4EA72E"/>
+      </a:accent6>
+      <a:hlink>
+        <a:srgbClr val="467886"/>
+      </a:hlink>
+      <a:folHlink>
+        <a:srgbClr val="96607D"/>
+      </a:folHlink>
+    </a:clrScheme>
+    <a:fontScheme name="Office">
+      <a:majorFont>
+        <a:latin typeface="맑은 고딕" panose="02110004020202020204"/>
+        <a:ea typeface=""/>
+        <a:cs typeface=""/>
+        <a:font script="Jpan" typeface="游ゴシック Light"/>
+        <a:font script="Hang" typeface="맑은 고딕"/>
+        <a:font script="Hans" typeface="等线 Light"/>
+        <a:font script="Hant" typeface="新細明體"/>
+        <a:font script="Arab" typeface="Times New Roman"/>
+        <a:font script="Hebr" typeface="Times New Roman"/>
+        <a:font script="Thai" typeface="Angsana New"/>
+        <a:font script="Ethi" typeface="Nyala"/>
+        <a:font script="Beng" typeface="Vrinda"/>
+        <a:font script="Gujr" typeface="Shruti"/>
+        <a:font script="Khmr" typeface="MoolBoran"/>
+        <a:font script="Knda" typeface="Tunga"/>
+        <a:font script="Guru" typeface="Raavi"/>
+        <a:font script="Cans" typeface="Euphemia"/>
+        <a:font script="Cher" typeface="Plantagenet Cherokee"/>
+        <a:font script="Yiii" typeface="Microsoft Yi Baiti"/>
+        <a:font script="Tibt" typeface="Microsoft Himalaya"/>
+        <a:font script="Thaa" typeface="MV Boli"/>
+        <a:font script="Deva" typeface="Mangal"/>
+        <a:font script="Telu" typeface="Gautami"/>
+        <a:font script="Taml" typeface="Latha"/>
+        <a:font script="Syrc" typeface="Estrangelo Edessa"/>
+        <a:font script="Orya" typeface="Kalinga"/>
+        <a:font script="Mlym" typeface="Kartika"/>
+        <a:font script="Laoo" typeface="DokChampa"/>
+        <a:font script="Sinh" typeface="Iskoola Pota"/>
+        <a:font script="Mong" typeface="Mongolian Baiti"/>
+        <a:font script="Viet" typeface="Times New Roman"/>
+        <a:font script="Uigh" typeface="Microsoft Uighur"/>
+        <a:font script="Geor" typeface="Sylfaen"/>
+        <a:font script="Armn" typeface="Arial"/>
+        <a:font script="Bugi" typeface="Leelawadee UI"/>
+        <a:font script="Bopo" typeface="Microsoft JhengHei"/>
+        <a:font script="Java" typeface="Javanese Text"/>
+        <a:font script="Lisu" typeface="Segoe UI"/>
+        <a:font script="Mymr" typeface="Myanmar Text"/>
+        <a:font script="Nkoo" typeface="Ebrima"/>
+        <a:font script="Olck" typeface="Nirmala UI"/>
+        <a:font script="Osma" typeface="Ebrima"/>
+        <a:font script="Phag" typeface="Phagspa"/>
+        <a:font script="Syrn" typeface="Estrangelo Edessa"/>
+        <a:font script="Syrj" typeface="Estrangelo Edessa"/>
+        <a:font script="Syre" typeface="Estrangelo Edessa"/>
+        <a:font script="Sora" typeface="Nirmala UI"/>
+        <a:font script="Tale" typeface="Microsoft Tai Le"/>
+        <a:font script="Talu" typeface="Microsoft New Tai Lue"/>
+        <a:font script="Tfng" typeface="Ebrima"/>
+      </a:majorFont>
+      <a:minorFont>
+        <a:latin typeface="맑은 고딕" panose="02110004020202020204"/>
+        <a:ea typeface=""/>
+        <a:cs typeface=""/>
+        <a:font script="Jpan" typeface="游ゴシック"/>
+        <a:font script="Hang" typeface="맑은 고딕"/>
+        <a:font script="Hans" typeface="等线"/>
+        <a:font script="Hant" typeface="新細明體"/>
+        <a:font script="Arab" typeface="Arial"/>
+        <a:font script="Hebr" typeface="Arial"/>
+        <a:font script="Thai" typeface="Cordia New"/>
+        <a:font script="Ethi" typeface="Nyala"/>
+        <a:font script="Beng" typeface="Vrinda"/>
+        <a:font script="Gujr" typeface="Shruti"/>
+        <a:font script="Khmr" typeface="DaunPenh"/>
+        <a:font script="Knda" typeface="Tunga"/>
+        <a:font script="Guru" typeface="Raavi"/>
+        <a:font script="Cans" typeface="Euphemia"/>
+        <a:font script="Cher" typeface="Plantagenet Cherokee"/>
+        <a:font script="Yiii" typeface="Microsoft Yi Baiti"/>
+        <a:font script="Tibt" typeface="Microsoft Himalaya"/>
+        <a:font script="Thaa" typeface="MV Boli"/>
+        <a:font script="Deva" typeface="Mangal"/>
+        <a:font script="Telu" typeface="Gautami"/>
+        <a:font script="Taml" typeface="Latha"/>
+        <a:font script="Syrc" typeface="Estrangelo Edessa"/>
+        <a:font script="Orya" typeface="Kalinga"/>
+        <a:font script="Mlym" typeface="Kartika"/>
+        <a:font script="Laoo" typeface="DokChampa"/>
+        <a:font script="Sinh" typeface="Iskoola Pota"/>
+        <a:font script="Mong" typeface="Mongolian Baiti"/>
+        <a:font script="Viet" typeface="Arial"/>
+        <a:font script="Uigh" typeface="Microsoft Uighur"/>
+        <a:font script="Geor" typeface="Sylfaen"/>
+        <a:font script="Armn" typeface="Arial"/>
+        <a:font script="Bugi" typeface="Leelawadee UI"/>
+        <a:font script="Bopo" typeface="Microsoft JhengHei"/>
+        <a:font script="Java" typeface="Javanese Text"/>
+        <a:font script="Lisu" typeface="Segoe UI"/>
+        <a:font script="Mymr" typeface="Myanmar Text"/>
+        <a:font script="Nkoo" typeface="Ebrima"/>
+        <a:font script="Olck" typeface="Nirmala UI"/>
+        <a:font script="Osma" typeface="Ebrima"/>
+        <a:font script="Phag" typeface="Phagspa"/>
+        <a:font script="Syrn" typeface="Estrangelo Edessa"/>
+        <a:font script="Syrj" typeface="Estrangelo Edessa"/>
+        <a:font script="Syre" typeface="Estrangelo Edessa"/>
+        <a:font script="Sora" typeface="Nirmala UI"/>
+        <a:font script="Tale" typeface="Microsoft Tai Le"/>
+        <a:font script="Talu" typeface="Microsoft New Tai Lue"/>
+        <a:font script="Tfng" typeface="Ebrima"/>
+      </a:minorFont>
+    </a:fontScheme>
+    <a:fmtScheme name="Office">
+      <a:fillStyleLst>
+        <a:solidFill>
+          <a:schemeClr val="phClr"/>
+        </a:solidFill>
+        <a:gradFill rotWithShape="1">
+          <a:gsLst>
+            <a:gs pos="0">
+              <a:schemeClr val="phClr">
+                <a:lumMod val="110000"/>
+                <a:satMod val="105000"/>
+                <a:tint val="67000"/>
+              </a:schemeClr>
+            </a:gs>
+            <a:gs pos="50000">
+              <a:schemeClr val="phClr">
+                <a:lumMod val="105000"/>
+                <a:satMod val="103000"/>
+                <a:tint val="73000"/>
+              </a:schemeClr>
+            </a:gs>
+            <a:gs pos="100000">
+              <a:schemeClr val="phClr">
+                <a:lumMod val="105000"/>
+                <a:satMod val="109000"/>
+                <a:tint val="81000"/>
+              </a:schemeClr>
+            </a:gs>
+          </a:gsLst>
+          <a:lin ang="5400000" scaled="0"/>
+        </a:gradFill>
+        <a:gradFill rotWithShape="1">
+          <a:gsLst>
+            <a:gs pos="0">
+              <a:schemeClr val="phClr">
+                <a:satMod val="103000"/>
+                <a:lumMod val="102000"/>
+                <a:tint val="94000"/>
+              </a:schemeClr>
+            </a:gs>
+            <a:gs pos="50000">
+              <a:schemeClr val="phClr">
+                <a:satMod val="110000"/>
+                <a:lumMod val="100000"/>
+                <a:shade val="100000"/>
+              </a:schemeClr>
+            </a:gs>
+            <a:gs pos="100000">
+              <a:schemeClr val="phClr">
+                <a:lumMod val="99000"/>
+                <a:satMod val="120000"/>
+                <a:shade val="78000"/>
+              </a:schemeClr>
+            </a:gs>
+          </a:gsLst>
+          <a:lin ang="5400000" scaled="0"/>
+        </a:gradFill>
+      </a:fillStyleLst>
+      <a:lnStyleLst>
+        <a:ln w="12700" cap="flat" cmpd="sng" algn="ctr">
+          <a:solidFill>
+            <a:schemeClr val="phClr"/>
+          </a:solidFill>
+          <a:prstDash val="solid"/>
+          <a:miter lim="800000"/>
+        </a:ln>
+        <a:ln w="19050" cap="flat" cmpd="sng" algn="ctr">
+          <a:solidFill>
+            <a:schemeClr val="phClr"/>
+          </a:solidFill>
+          <a:prstDash val="solid"/>
+          <a:miter lim="800000"/>
+        </a:ln>
+        <a:ln w="25400" cap="flat" cmpd="sng" algn="ctr">
+          <a:solidFill>
+            <a:schemeClr val="phClr"/>
+          </a:solidFill>
+          <a:prstDash val="solid"/>
+          <a:miter lim="800000"/>
+        </a:ln>
+      </a:lnStyleLst>
+      <a:effectStyleLst>
+        <a:effectStyle>
+          <a:effectLst/>
+        </a:effectStyle>
+        <a:effectStyle>
+          <a:effectLst/>
+        </a:effectStyle>
+        <a:effectStyle>
+          <a:effectLst>
+            <a:outerShdw blurRad="57150" dist="19050" dir="5400000" algn="ctr" rotWithShape="0">
+              <a:srgbClr val="000000">
+                <a:alpha val="63000"/>
+              </a:srgbClr>
+            </a:outerShdw>
+          </a:effectLst>
+        </a:effectStyle>
+      </a:effectStyleLst>
+      <a:bgFillStyleLst>
+        <a:solidFill>
+          <a:schemeClr val="phClr"/>
+        </a:solidFill>
+        <a:solidFill>
+          <a:schemeClr val="phClr">
+            <a:tint val="95000"/>
+            <a:satMod val="170000"/>
+          </a:schemeClr>
+        </a:solidFill>
+        <a:gradFill rotWithShape="1">
+          <a:gsLst>
+            <a:gs pos="0">
+              <a:schemeClr val="phClr">
+                <a:tint val="93000"/>
+                <a:satMod val="150000"/>
+                <a:shade val="98000"/>
+                <a:lumMod val="102000"/>
+              </a:schemeClr>
+            </a:gs>
+            <a:gs pos="50000">
+              <a:schemeClr val="phClr">
+                <a:tint val="98000"/>
+                <a:satMod val="130000"/>
+                <a:shade val="90000"/>
+                <a:lumMod val="103000"/>
+              </a:schemeClr>
+            </a:gs>
+            <a:gs pos="100000">
+              <a:schemeClr val="phClr">
+                <a:shade val="63000"/>
+                <a:satMod val="120000"/>
+              </a:schemeClr>
+            </a:gs>
+          </a:gsLst>
+          <a:lin ang="5400000" scaled="0"/>
+        </a:gradFill>
+      </a:bgFillStyleLst>
+    </a:fmtScheme>
+  </a:themeElements>
+  <a:objectDefaults>
+    <a:lnDef>
+      <a:spPr/>
+      <a:bodyPr/>
+      <a:lstStyle/>
+      <a:style>
+        <a:lnRef idx="2">
+          <a:schemeClr val="accent1"/>
+        </a:lnRef>
+        <a:fillRef idx="0">
+          <a:schemeClr val="accent1"/>
+        </a:fillRef>
+        <a:effectRef idx="1">
+          <a:schemeClr val="accent1"/>
+        </a:effectRef>
+        <a:fontRef idx="minor">
+          <a:schemeClr val="tx1"/>
+        </a:fontRef>
+      </a:style>
+    </a:lnDef>
+  </a:objectDefaults>
+  <a:extraClrSchemeLst/>
+  <a:extLst>
+    <a:ext uri="{05A4C25C-085E-4340-85A3-A5531E510DB2}">
+      <thm15:themeFamily xmlns:thm15="http://schemas.microsoft.com/office/thememl/2012/main" name="Office Theme" id="{2E142A2C-CD16-42D6-873A-C26D2A0506FA}" vid="{1BDDFF52-6CD6-40A5-AB3C-68EB2F1E4D0A}"/>
+    </a:ext>
+  </a:extLst>
+</a:theme>
 </file>